--- a/submission/presentation/Nimbus_Growth_Desk_Final_KO.pptx
+++ b/submission/presentation/Nimbus_Growth_Desk_Final_KO.pptx
@@ -19,9 +19,11 @@
     <p:sldId id="267" r:id="rId13"/>
     <p:sldId id="268" r:id="rId14"/>
     <p:sldId id="269" r:id="rId15"/>
+    <p:sldId id="270" r:id="rId16"/>
+    <p:sldId id="271" r:id="rId17"/>
   </p:sldIdLst>
   <p:notesMasterIdLst>
-    <p:notesMasterId r:id="rId16"/>
+    <p:notesMasterId r:id="rId18"/>
   </p:notesMasterIdLst>
   <p:sldSz cx="12192000" cy="6858000"/>
   <p:notesSz cx="6858000" cy="12192000"/>
@@ -603,7 +605,7 @@
           <a:p>
             <a:r>
               <a:rPr lang="en-US" dirty="0"/>
-              <a:t>권장 시간: 질문 시 1:00,,예상 가치의 계산 범위를 묻는 질문에 사용한다.,$4M은 회사 전체 결제 완료율 1%p의 연간 단순 환산이고, $721.3K는 이번 고객군과 관측기간에 대한 예상 순가치라고 설명한다.,과거 시험에서 실제로 관측한 효과와 이번 시험의 예상 효과를 구분한다.</a:t>
+              <a:t>권장 시간: 0:55,,“앱의 역할은 시험안을 승인하고 기록하는 데까지이며, 실제 고객 화면은 제품팀이 변경합니다.”,오늘 시험안을 승인하고 제품팀이 고객 25%에게 한 화면 간편결제를 적용한다.,24시간 동안 결제 완료율, 오류율, AI 비용을 확인하고 72시간 뒤 확대하거나 중단한다.,성공 기준은 결제 완료율 회복, 안정적인 결제, 통제된 AI 비용, 승인 기록 보존이다.</a:t>
             </a:r>
             <a:endParaRPr lang="en-US" dirty="0"/>
           </a:p>
@@ -691,7 +693,7 @@
           <a:p>
             <a:r>
               <a:rPr lang="en-US" dirty="0"/>
-              <a:t>권장 시간: 질문 시 1:15,,승인 책임과 시스템 통제 질문에 사용한다.,AI는 시험안만 만들고 로그인한 담당자가 승인한 뒤에만 최종 결정 기록이 가능하다.,승인을 건너뛰려는 요청은 서버가 거부하고 모든 과정은 같은 결정 번호에 보관한다.,구체적인 API 주소와 상태 코드는 기술 검증 자료에서 확인할 수 있다.</a:t>
+              <a:t>권장 시간: 질문 시 1:00,,예상 가치의 계산 범위를 묻는 질문에 사용한다.,$4M은 회사 전체 결제 완료율 1%p의 연간 단순 환산이고, $721.3K는 이번 고객군과 관측기간에 대한 예상 순가치라고 설명한다.,과거 시험에서 실제로 관측한 효과와 이번 시험의 예상 효과를 구분한다.</a:t>
             </a:r>
             <a:endParaRPr lang="en-US" dirty="0"/>
           </a:p>
@@ -779,7 +781,7 @@
           <a:p>
             <a:r>
               <a:rPr lang="en-US" dirty="0"/>
-              <a:t>권장 시간: 질문 시 1:00,,데이터 보호와 초기화 안전성을 묻는 질문에 사용한다.,고객군과 과거 시험 데이터는 읽기만 하며 앱은 승인된 결정만 별도 테이블에 기록한다.,시연 초기화는 지정된 고객군의 앱 작성 기록만 삭제하고 원본 데이터는 변경하지 않는다.</a:t>
+              <a:t>권장 시간: 질문 시 1:15,,승인 책임과 시스템 통제 질문에 사용한다.,AI는 시험안만 만들고 로그인한 담당자가 승인한 뒤에만 최종 결정 기록이 가능하다.,승인을 건너뛰려는 요청은 서버가 거부하고 모든 과정은 같은 결정 번호에 보관한다.,구체적인 API 주소와 상태 코드는 기술 검증 자료에서 확인할 수 있다.</a:t>
             </a:r>
             <a:endParaRPr lang="en-US" dirty="0"/>
           </a:p>
@@ -867,7 +869,7 @@
           <a:p>
             <a:r>
               <a:rPr lang="en-US" dirty="0"/>
-              <a:t>권장 시간: 질문 시 1:15,,AI 비용 계산과 통제 질문에 사용한다.,사용량과 명시 단가로 계산한 예상 비용을 외부 제공사의 실제 청구액과 섞지 않는다.,현재 차단 3건은 요청 번호와 함께 확인할 수 있다고 설명한다.,구체적인 필드명과 상태 코드는 제출 증거에서 확인할 수 있다.</a:t>
+              <a:t>권장 시간: 질문 시 1:00,,데이터 보호와 초기화 안전성을 묻는 질문에 사용한다.,고객군과 과거 시험 데이터는 읽기만 하며 앱은 승인된 결정만 별도 테이블에 기록한다.,시연 초기화는 지정된 고객군의 앱 작성 기록만 삭제하고 원본 데이터는 변경하지 않는다.</a:t>
             </a:r>
             <a:endParaRPr lang="en-US" dirty="0"/>
           </a:p>
@@ -955,7 +957,7 @@
           <a:p>
             <a:r>
               <a:rPr lang="en-US" dirty="0"/>
-              <a:t>권장 시간: 질문 시 필요 항목만,,질문을 받은 항목만 짧게 사용한다.,주장보다 승인 기록, AI 사용 내역, 데이터 보호 범위처럼 확인 가능한 근거로 답한다.,더 깊은 기술 질문은 QA_OBJECTIONS_KO.md를 참조한다.</a:t>
+              <a:t>권장 시간: 질문 시 1:15,,AI 비용 계산과 통제 질문에 사용한다.,사용량과 명시 단가로 계산한 예상 비용을 외부 제공사의 실제 청구액과 섞지 않는다.,현재 차단 3건은 요청 번호와 함께 확인할 수 있다고 설명한다.,구체적인 필드명과 상태 코드는 제출 증거에서 확인할 수 있다.</a:t>
             </a:r>
             <a:endParaRPr lang="en-US" dirty="0"/>
           </a:p>
@@ -979,6 +981,182 @@
             <a:fld id="{F7021451-1387-4CA6-816F-3879F97B5CBC}" type="slidenum">
               <a:rPr lang="en-US"/>
               <a:t>14</a:t>
+            </a:fld>
+            <a:endParaRPr lang="en-US"/>
+          </a:p>
+        </p:txBody>
+      </p:sp>
+    </p:spTree>
+    <p:extLst>
+      <p:ext uri="{BB962C8B-B14F-4D97-AF65-F5344CB8AC3E}">
+        <p14:creationId xmlns:p14="http://schemas.microsoft.com/office/powerpoint/2010/main" val="1024086991"/>
+      </p:ext>
+    </p:extLst>
+  </p:cSld>
+  <p:clrMapOvr>
+    <a:masterClrMapping/>
+  </p:clrMapOvr>
+</p:notes>
+</file>
+
+<file path=ppt/notesSlides/notesSlide15.xml><?xml version="1.0" encoding="utf-8"?>
+<p:notes xmlns:a="http://schemas.openxmlformats.org/drawingml/2006/main" xmlns:r="http://schemas.openxmlformats.org/officeDocument/2006/relationships" xmlns:p="http://schemas.openxmlformats.org/presentationml/2006/main">
+  <p:cSld>
+    <p:spTree>
+      <p:nvGrpSpPr>
+        <p:cNvPr id="1" name=""/>
+        <p:cNvGrpSpPr/>
+        <p:nvPr/>
+      </p:nvGrpSpPr>
+      <p:grpSpPr>
+        <a:xfrm>
+          <a:off x="0" y="0"/>
+          <a:ext cx="0" cy="0"/>
+          <a:chOff x="0" y="0"/>
+          <a:chExt cx="0" cy="0"/>
+        </a:xfrm>
+      </p:grpSpPr>
+      <p:sp>
+        <p:nvSpPr>
+          <p:cNvPr id="2" name="Slide Image Placeholder 1"/>
+          <p:cNvSpPr>
+            <a:spLocks noGrp="1" noRot="1" noChangeAspect="1"/>
+          </p:cNvSpPr>
+          <p:nvPr>
+            <p:ph type="sldImg"/>
+          </p:nvPr>
+        </p:nvSpPr>
+        <p:spPr/>
+      </p:sp>
+      <p:sp>
+        <p:nvSpPr>
+          <p:cNvPr id="3" name="Notes Placeholder 2"/>
+          <p:cNvSpPr>
+            <a:spLocks noGrp="1"/>
+          </p:cNvSpPr>
+          <p:nvPr>
+            <p:ph type="body" idx="1"/>
+          </p:nvPr>
+        </p:nvSpPr>
+        <p:spPr/>
+        <p:txBody>
+          <a:bodyPr/>
+          <a:lstStyle/>
+          <a:p>
+            <a:r>
+              <a:rPr lang="en-US" dirty="0"/>
+              <a:t>권장 시간: 질문 시 필요 항목만,,질문을 받은 항목만 짧게 사용한다.,주장보다 승인 기록, AI 사용 내역, 데이터 보호 범위처럼 확인 가능한 근거로 답한다.,더 깊은 기술 질문은 QA_OBJECTIONS_KO.md를 참조한다.</a:t>
+            </a:r>
+            <a:endParaRPr lang="en-US" dirty="0"/>
+          </a:p>
+        </p:txBody>
+      </p:sp>
+      <p:sp>
+        <p:nvSpPr>
+          <p:cNvPr id="4" name="Slide Number Placeholder 3"/>
+          <p:cNvSpPr>
+            <a:spLocks noGrp="1"/>
+          </p:cNvSpPr>
+          <p:nvPr>
+            <p:ph type="sldNum" sz="quarter" idx="10"/>
+          </p:nvPr>
+        </p:nvSpPr>
+        <p:spPr/>
+        <p:txBody>
+          <a:bodyPr/>
+          <a:lstStyle/>
+          <a:p>
+            <a:fld id="{F7021451-1387-4CA6-816F-3879F97B5CBC}" type="slidenum">
+              <a:rPr lang="en-US"/>
+              <a:t>15</a:t>
+            </a:fld>
+            <a:endParaRPr lang="en-US"/>
+          </a:p>
+        </p:txBody>
+      </p:sp>
+    </p:spTree>
+    <p:extLst>
+      <p:ext uri="{BB962C8B-B14F-4D97-AF65-F5344CB8AC3E}">
+        <p14:creationId xmlns:p14="http://schemas.microsoft.com/office/powerpoint/2010/main" val="1024086991"/>
+      </p:ext>
+    </p:extLst>
+  </p:cSld>
+  <p:clrMapOvr>
+    <a:masterClrMapping/>
+  </p:clrMapOvr>
+</p:notes>
+</file>
+
+<file path=ppt/notesSlides/notesSlide16.xml><?xml version="1.0" encoding="utf-8"?>
+<p:notes xmlns:a="http://schemas.openxmlformats.org/drawingml/2006/main" xmlns:r="http://schemas.openxmlformats.org/officeDocument/2006/relationships" xmlns:p="http://schemas.openxmlformats.org/presentationml/2006/main">
+  <p:cSld>
+    <p:spTree>
+      <p:nvGrpSpPr>
+        <p:cNvPr id="1" name=""/>
+        <p:cNvGrpSpPr/>
+        <p:nvPr/>
+      </p:nvGrpSpPr>
+      <p:grpSpPr>
+        <a:xfrm>
+          <a:off x="0" y="0"/>
+          <a:ext cx="0" cy="0"/>
+          <a:chOff x="0" y="0"/>
+          <a:chExt cx="0" cy="0"/>
+        </a:xfrm>
+      </p:grpSpPr>
+      <p:sp>
+        <p:nvSpPr>
+          <p:cNvPr id="2" name="Slide Image Placeholder 1"/>
+          <p:cNvSpPr>
+            <a:spLocks noGrp="1" noRot="1" noChangeAspect="1"/>
+          </p:cNvSpPr>
+          <p:nvPr>
+            <p:ph type="sldImg"/>
+          </p:nvPr>
+        </p:nvSpPr>
+        <p:spPr/>
+      </p:sp>
+      <p:sp>
+        <p:nvSpPr>
+          <p:cNvPr id="3" name="Notes Placeholder 2"/>
+          <p:cNvSpPr>
+            <a:spLocks noGrp="1"/>
+          </p:cNvSpPr>
+          <p:nvPr>
+            <p:ph type="body" idx="1"/>
+          </p:nvPr>
+        </p:nvSpPr>
+        <p:spPr/>
+        <p:txBody>
+          <a:bodyPr/>
+          <a:lstStyle/>
+          <a:p>
+            <a:r>
+              <a:rPr lang="en-US" dirty="0"/>
+              <a:t>권장 시간: 질문 시 1:15,,Why Databricks 슬라이드의 각 주장에 어떤 기능과 프로젝트 증거가 연결되는지 묻는 질문에 사용한다.,같은 전환율 정의, 동기화된 고객 상태, Genie 자연어 답변, 사람 승인 기록, Gateway의 비용·차단 증거를 차례로 설명한다.,경제성은 검증되지 않은 절감액이 아니라 관리형 운영, Lakebase 유휴 시 축소, AI 예산 통제로 설명한다.,하단 공식 출처 링크에서 각 제품의 책임 범위를 확인할 수 있다.</a:t>
+            </a:r>
+            <a:endParaRPr lang="en-US" dirty="0"/>
+          </a:p>
+        </p:txBody>
+      </p:sp>
+      <p:sp>
+        <p:nvSpPr>
+          <p:cNvPr id="4" name="Slide Number Placeholder 3"/>
+          <p:cNvSpPr>
+            <a:spLocks noGrp="1"/>
+          </p:cNvSpPr>
+          <p:nvPr>
+            <p:ph type="sldNum" sz="quarter" idx="10"/>
+          </p:nvPr>
+        </p:nvSpPr>
+        <p:spPr/>
+        <p:txBody>
+          <a:bodyPr/>
+          <a:lstStyle/>
+          <a:p>
+            <a:fld id="{F7021451-1387-4CA6-816F-3879F97B5CBC}" type="slidenum">
+              <a:rPr lang="en-US"/>
+              <a:t>16</a:t>
             </a:fld>
             <a:endParaRPr lang="en-US"/>
           </a:p>
@@ -1483,7 +1661,7 @@
           <a:p>
             <a:r>
               <a:rPr lang="en-US" dirty="0"/>
-              <a:t>권장 시간: 전환 0:15 + 라이브 10:00,,“이제 문제를 찾고 시험안을 승인해 기록하는 실제 흐름을 보여드리겠습니다.”,앱에서 하락 고객군 찾기, 과거 성공 사례 비교, AI 시험안 확인, 담당자 승인을 차례로 실행한다.,승인자와 기록 시각이 즉시 남는 것을 보여준 뒤 AI 사용량과 비용 화면을 연다.,앱이 고객 화면을 직접 변경하는 것은 아니며, 승인된 시험안은 제품팀이 실행한다고 분명히 설명한다.</a:t>
+              <a:t>권장 시간: 0:55,,“Databricks의 가치는 제품 목록이 아니라 문제 발견부터 비용 통제까지 하나의 운영 흐름으로 이어지는 데 있습니다.”,최신 상태를 지속적으로 반영하고, 같은 지표 정의를 대시보드와 Genie가 함께 사용해 자연어 분석 부담을 낮춘다.,관리형 서비스와 유휴 시 축소로 운영 부담을 줄이고, 앱은 담당자가 승인한 결정만 기록하며 실제 실행은 제품팀이 담당한다.,Unity Catalog는 데이터와 AI 자산의 접근·보호·추적성을, Unity AI Gateway는 AI 사용량·비용과 예산 초과 차단을 담당한다고 구분해 설명한다.</a:t>
             </a:r>
             <a:endParaRPr lang="en-US" dirty="0"/>
           </a:p>
@@ -1571,7 +1749,7 @@
           <a:p>
             <a:r>
               <a:rPr lang="en-US" dirty="0"/>
-              <a:t>권장 시간: 1:00,,“재무 책임자는 AI가 싸다는 약속보다 누가 얼마를 사용했고 어디서 멈췄는지 확인할 수 있어야 합니다.”,현재 측정된 AI 요청 55건, 총 처리량 414.6K 토큰, 예상 비용 $0.0976, 차단 3건을 보여준다.,실제 외부 청구액 자료는 제공되지 않았으므로 0이라고 말하지 않고, 사용량과 명시 단가로 계산한 예상 비용이라고 설명한다.,$0.03과 $0.05는 실제 운영 예산이 아니라 시연을 위해 낮게 설정한 한도라고 설명한다.</a:t>
+              <a:t>권장 시간: 전환 0:15 + 라이브 10:00,,“이제 문제를 찾고 시험안을 승인해 기록하는 실제 흐름을 보여드리겠습니다.”,앱에서 하락 고객군 찾기, 과거 성공 사례 비교, AI 시험안 확인, 담당자 승인을 차례로 실행한다.,승인자와 기록 시각이 즉시 남는 것을 보여준 뒤 AI 사용량과 비용 화면을 연다.,앱이 고객 화면을 직접 변경하는 것은 아니며, 승인된 시험안은 제품팀이 실행한다고 분명히 설명한다.</a:t>
             </a:r>
             <a:endParaRPr lang="en-US" dirty="0"/>
           </a:p>
@@ -1659,7 +1837,7 @@
           <a:p>
             <a:r>
               <a:rPr lang="en-US" dirty="0"/>
-              <a:t>권장 시간: 0:55,,“앱의 역할은 시험안을 승인하고 기록하는 데까지이며, 실제 고객 화면은 제품팀이 변경합니다.”,오늘 시험안을 승인하고 제품팀이 고객 25%에게 한 화면 간편결제를 적용한다.,24시간 동안 결제 완료율, 오류율, AI 비용을 확인하고 72시간 뒤 확대하거나 중단한다.,성공 기준은 결제 완료율 회복, 안정적인 결제, 통제된 AI 비용, 승인 기록 보존이다.</a:t>
+              <a:t>권장 시간: 1:00,,“재무 책임자는 AI가 싸다는 약속보다 누가 얼마를 사용했고 어디서 멈췄는지 확인할 수 있어야 합니다.”,현재 측정된 AI 요청 55건, 총 처리량 414.6K 토큰, 예상 비용 $0.0976, 차단 3건을 보여준다.,실제 외부 청구액 자료는 제공되지 않았으므로 0이라고 말하지 않고, 사용량과 명시 단가로 계산한 예상 비용이라고 설명한다.,$0.03과 $0.05는 실제 운영 예산이 아니라 시연을 위해 낮게 설정한 한도라고 설명한다.</a:t>
             </a:r>
             <a:endParaRPr lang="en-US" dirty="0"/>
           </a:p>
@@ -2880,7 +3058,7 @@
                 <a:ea typeface="Noto Sans KR" pitchFamily="34" charset="-122"/>
                 <a:cs typeface="Noto Sans KR" pitchFamily="34" charset="-120"/>
               </a:rPr>
-              <a:t>부록 A</a:t>
+              <a:t>다음 단계</a:t>
             </a:r>
             <a:endParaRPr lang="en-US" sz="900" dirty="0"/>
           </a:p>
@@ -2944,7 +3122,7 @@
                 <a:ea typeface="Noto Sans KR" pitchFamily="34" charset="-122"/>
                 <a:cs typeface="Noto Sans KR" pitchFamily="34" charset="-120"/>
               </a:rPr>
-              <a:t>예상 가치의 계산 범위</a:t>
+              <a:t>작게 시험하고, 결과를 보고 확대하거나 중단합니다</a:t>
             </a:r>
             <a:endParaRPr lang="en-US" sz="2800" dirty="0"/>
           </a:p>
@@ -2985,7 +3163,7 @@
                 <a:ea typeface="Noto Sans KR" pitchFamily="34" charset="-122"/>
                 <a:cs typeface="Noto Sans KR" pitchFamily="34" charset="-120"/>
               </a:rPr>
-              <a:t>회사 전체의 단순 환산값과 이번 고객군의 예상 가치를 구분합니다.</a:t>
+              <a:t>앱에서 승인한 시험안을 제품팀이 실행하고 결제 완료율과 AI 비용을 함께 확인합니다.</a:t>
             </a:r>
             <a:endParaRPr lang="en-US" sz="1200" dirty="0"/>
           </a:p>
@@ -2999,20 +3177,20 @@
         </p:nvSpPr>
         <p:spPr>
           <a:xfrm>
-            <a:off x="640080" y="1828800"/>
-            <a:ext cx="5166360" cy="1143000"/>
+            <a:off x="594360" y="1920240"/>
+            <a:ext cx="2487168" cy="3246120"/>
           </a:xfrm>
           <a:prstGeom prst="roundRect">
             <a:avLst>
-              <a:gd name="adj" fmla="val 6400"/>
+              <a:gd name="adj" fmla="val 2941"/>
             </a:avLst>
           </a:prstGeom>
           <a:solidFill>
             <a:srgbClr val="FFFFFF"/>
           </a:solidFill>
-          <a:ln w="17780">
+          <a:ln w="12700">
             <a:solidFill>
-              <a:srgbClr val="2272B4"/>
+              <a:srgbClr val="DCE1E7"/>
             </a:solidFill>
             <a:prstDash val="solid"/>
           </a:ln>
@@ -3026,8 +3204,8 @@
         </p:nvSpPr>
         <p:spPr>
           <a:xfrm>
-            <a:off x="786384" y="1938528"/>
-            <a:ext cx="4873752" cy="274320"/>
+            <a:off x="777240" y="2130552"/>
+            <a:ext cx="502920" cy="310896"/>
           </a:xfrm>
           <a:prstGeom prst="rect">
             <a:avLst/>
@@ -3041,11 +3219,52 @@
           </a:bodyPr>
           <a:lstStyle/>
           <a:p>
-            <a:pPr algn="ctr" indent="0" marL="0">
-              <a:buNone/>
-            </a:pPr>
-            <a:r>
-              <a:rPr lang="en-US" sz="1200" b="1" dirty="0">
+            <a:pPr indent="0" marL="0">
+              <a:buNone/>
+            </a:pPr>
+            <a:r>
+              <a:rPr lang="en-US" sz="1000" b="1" dirty="0">
+                <a:solidFill>
+                  <a:srgbClr val="EE3D2C"/>
+                </a:solidFill>
+                <a:latin typeface="Noto Sans KR" pitchFamily="34" charset="0"/>
+                <a:ea typeface="Noto Sans KR" pitchFamily="34" charset="-122"/>
+                <a:cs typeface="Noto Sans KR" pitchFamily="34" charset="-120"/>
+              </a:rPr>
+              <a:t>01</a:t>
+            </a:r>
+            <a:endParaRPr lang="en-US" sz="1000" dirty="0"/>
+          </a:p>
+        </p:txBody>
+      </p:sp>
+      <p:sp>
+        <p:nvSpPr>
+          <p:cNvPr id="8" name="Text 5"/>
+          <p:cNvSpPr/>
+          <p:nvPr/>
+        </p:nvSpPr>
+        <p:spPr>
+          <a:xfrm>
+            <a:off x="777240" y="2670048"/>
+            <a:ext cx="2103120" cy="621792"/>
+          </a:xfrm>
+          <a:prstGeom prst="rect">
+            <a:avLst/>
+          </a:prstGeom>
+          <a:noFill/>
+          <a:ln/>
+        </p:spPr>
+        <p:txBody>
+          <a:bodyPr wrap="square" lIns="0" tIns="0" rIns="0" bIns="0" rtlCol="0" anchor="t">
+            <a:normAutofit/>
+          </a:bodyPr>
+          <a:lstStyle/>
+          <a:p>
+            <a:pPr indent="0" marL="0">
+              <a:buNone/>
+            </a:pPr>
+            <a:r>
+              <a:rPr lang="en-US" sz="1800" b="1" dirty="0">
                 <a:solidFill>
                   <a:srgbClr val="1F2530"/>
                 </a:solidFill>
@@ -3053,50 +3272,9 @@
                 <a:ea typeface="Noto Sans KR" pitchFamily="34" charset="-122"/>
                 <a:cs typeface="Noto Sans KR" pitchFamily="34" charset="-120"/>
               </a:rPr>
-              <a:t>회사 전체</a:t>
-            </a:r>
-            <a:endParaRPr lang="en-US" sz="1200" dirty="0"/>
-          </a:p>
-        </p:txBody>
-      </p:sp>
-      <p:sp>
-        <p:nvSpPr>
-          <p:cNvPr id="8" name="Text 5"/>
-          <p:cNvSpPr/>
-          <p:nvPr/>
-        </p:nvSpPr>
-        <p:spPr>
-          <a:xfrm>
-            <a:off x="786384" y="2249424"/>
-            <a:ext cx="4873752" cy="630936"/>
-          </a:xfrm>
-          <a:prstGeom prst="rect">
-            <a:avLst/>
-          </a:prstGeom>
-          <a:noFill/>
-          <a:ln/>
-        </p:spPr>
-        <p:txBody>
-          <a:bodyPr wrap="square" lIns="0" tIns="0" rIns="0" bIns="0" rtlCol="0" anchor="t">
-            <a:normAutofit/>
-          </a:bodyPr>
-          <a:lstStyle/>
-          <a:p>
-            <a:pPr algn="ctr" indent="0" marL="0">
-              <a:buNone/>
-            </a:pPr>
-            <a:r>
-              <a:rPr lang="en-US" sz="900" dirty="0">
-                <a:solidFill>
-                  <a:srgbClr val="5B6573"/>
-                </a:solidFill>
-                <a:latin typeface="Noto Sans KR" pitchFamily="34" charset="0"/>
-                <a:ea typeface="Noto Sans KR" pitchFamily="34" charset="-122"/>
-                <a:cs typeface="Noto Sans KR" pitchFamily="34" charset="-120"/>
-              </a:rPr>
-              <a:t>$400M × 1%p = $4M/년</a:t>
-            </a:r>
-            <a:endParaRPr lang="en-US" sz="900" dirty="0"/>
+              <a:t>오늘</a:t>
+            </a:r>
+            <a:endParaRPr lang="en-US" sz="1800" dirty="0"/>
           </a:p>
         </p:txBody>
       </p:sp>
@@ -3108,20 +3286,129 @@
         </p:nvSpPr>
         <p:spPr>
           <a:xfrm>
-            <a:off x="6355080" y="1828800"/>
-            <a:ext cx="5166360" cy="1143000"/>
+            <a:off x="777240" y="3493008"/>
+            <a:ext cx="2103120" cy="329184"/>
           </a:xfrm>
           <a:prstGeom prst="roundRect">
             <a:avLst>
-              <a:gd name="adj" fmla="val 6400"/>
+              <a:gd name="adj" fmla="val 22222"/>
+            </a:avLst>
+          </a:prstGeom>
+          <a:solidFill>
+            <a:srgbClr val="EDF4FA"/>
+          </a:solidFill>
+          <a:ln w="12700">
+            <a:solidFill>
+              <a:srgbClr val="EDF4FA"/>
+            </a:solidFill>
+            <a:prstDash val="solid"/>
+          </a:ln>
+        </p:spPr>
+      </p:sp>
+      <p:sp>
+        <p:nvSpPr>
+          <p:cNvPr id="10" name="Text 7"/>
+          <p:cNvSpPr/>
+          <p:nvPr/>
+        </p:nvSpPr>
+        <p:spPr>
+          <a:xfrm>
+            <a:off x="850392" y="3493008"/>
+            <a:ext cx="1956816" cy="329184"/>
+          </a:xfrm>
+          <a:prstGeom prst="rect">
+            <a:avLst/>
+          </a:prstGeom>
+          <a:noFill/>
+          <a:ln/>
+        </p:spPr>
+        <p:txBody>
+          <a:bodyPr wrap="square" lIns="0" tIns="0" rIns="0" bIns="0" rtlCol="0" anchor="ctr">
+            <a:normAutofit/>
+          </a:bodyPr>
+          <a:lstStyle/>
+          <a:p>
+            <a:pPr algn="ctr" indent="0" marL="0">
+              <a:buNone/>
+            </a:pPr>
+            <a:r>
+              <a:rPr lang="en-US" sz="900" b="1" dirty="0">
+                <a:solidFill>
+                  <a:srgbClr val="2272B4"/>
+                </a:solidFill>
+                <a:latin typeface="Noto Sans KR" pitchFamily="34" charset="0"/>
+                <a:ea typeface="Noto Sans KR" pitchFamily="34" charset="-122"/>
+                <a:cs typeface="Noto Sans KR" pitchFamily="34" charset="-120"/>
+              </a:rPr>
+              <a:t>시험안 승인·기록</a:t>
+            </a:r>
+            <a:endParaRPr lang="en-US" sz="900" dirty="0"/>
+          </a:p>
+        </p:txBody>
+      </p:sp>
+      <p:sp>
+        <p:nvSpPr>
+          <p:cNvPr id="11" name="Text 8"/>
+          <p:cNvSpPr/>
+          <p:nvPr/>
+        </p:nvSpPr>
+        <p:spPr>
+          <a:xfrm>
+            <a:off x="777240" y="4041648"/>
+            <a:ext cx="2103120" cy="658368"/>
+          </a:xfrm>
+          <a:prstGeom prst="rect">
+            <a:avLst/>
+          </a:prstGeom>
+          <a:noFill/>
+          <a:ln/>
+        </p:spPr>
+        <p:txBody>
+          <a:bodyPr wrap="square" lIns="0" tIns="0" rIns="0" bIns="0" rtlCol="0" anchor="t">
+            <a:normAutofit/>
+          </a:bodyPr>
+          <a:lstStyle/>
+          <a:p>
+            <a:pPr indent="0" marL="0">
+              <a:buNone/>
+            </a:pPr>
+            <a:r>
+              <a:rPr lang="en-US" sz="1050" dirty="0">
+                <a:solidFill>
+                  <a:srgbClr val="5B6573"/>
+                </a:solidFill>
+                <a:latin typeface="Noto Sans KR" pitchFamily="34" charset="0"/>
+                <a:ea typeface="Noto Sans KR" pitchFamily="34" charset="-122"/>
+                <a:cs typeface="Noto Sans KR" pitchFamily="34" charset="-120"/>
+              </a:rPr>
+              <a:t>담당자가 고객 25% 시험안을 검토하고 승인</a:t>
+            </a:r>
+            <a:endParaRPr lang="en-US" sz="1050" dirty="0"/>
+          </a:p>
+        </p:txBody>
+      </p:sp>
+      <p:sp>
+        <p:nvSpPr>
+          <p:cNvPr id="12" name="Shape 9"/>
+          <p:cNvSpPr/>
+          <p:nvPr/>
+        </p:nvSpPr>
+        <p:spPr>
+          <a:xfrm>
+            <a:off x="3447288" y="1920240"/>
+            <a:ext cx="2487168" cy="3246120"/>
+          </a:xfrm>
+          <a:prstGeom prst="roundRect">
+            <a:avLst>
+              <a:gd name="adj" fmla="val 2941"/>
             </a:avLst>
           </a:prstGeom>
           <a:solidFill>
             <a:srgbClr val="FFFFFF"/>
           </a:solidFill>
-          <a:ln w="17780">
+          <a:ln w="12700">
             <a:solidFill>
-              <a:srgbClr val="2F9E6F"/>
+              <a:srgbClr val="DCE1E7"/>
             </a:solidFill>
             <a:prstDash val="solid"/>
           </a:ln>
@@ -3129,14 +3416,14 @@
       </p:sp>
       <p:sp>
         <p:nvSpPr>
-          <p:cNvPr id="10" name="Text 7"/>
-          <p:cNvSpPr/>
-          <p:nvPr/>
-        </p:nvSpPr>
-        <p:spPr>
-          <a:xfrm>
-            <a:off x="6501384" y="1938528"/>
-            <a:ext cx="4873752" cy="274320"/>
+          <p:cNvPr id="13" name="Text 10"/>
+          <p:cNvSpPr/>
+          <p:nvPr/>
+        </p:nvSpPr>
+        <p:spPr>
+          <a:xfrm>
+            <a:off x="3630168" y="2130552"/>
+            <a:ext cx="502920" cy="310896"/>
           </a:xfrm>
           <a:prstGeom prst="rect">
             <a:avLst/>
@@ -3150,11 +3437,270 @@
           </a:bodyPr>
           <a:lstStyle/>
           <a:p>
+            <a:pPr indent="0" marL="0">
+              <a:buNone/>
+            </a:pPr>
+            <a:r>
+              <a:rPr lang="en-US" sz="1000" b="1" dirty="0">
+                <a:solidFill>
+                  <a:srgbClr val="EE3D2C"/>
+                </a:solidFill>
+                <a:latin typeface="Noto Sans KR" pitchFamily="34" charset="0"/>
+                <a:ea typeface="Noto Sans KR" pitchFamily="34" charset="-122"/>
+                <a:cs typeface="Noto Sans KR" pitchFamily="34" charset="-120"/>
+              </a:rPr>
+              <a:t>02</a:t>
+            </a:r>
+            <a:endParaRPr lang="en-US" sz="1000" dirty="0"/>
+          </a:p>
+        </p:txBody>
+      </p:sp>
+      <p:sp>
+        <p:nvSpPr>
+          <p:cNvPr id="14" name="Text 11"/>
+          <p:cNvSpPr/>
+          <p:nvPr/>
+        </p:nvSpPr>
+        <p:spPr>
+          <a:xfrm>
+            <a:off x="3630168" y="2670048"/>
+            <a:ext cx="2103120" cy="621792"/>
+          </a:xfrm>
+          <a:prstGeom prst="rect">
+            <a:avLst/>
+          </a:prstGeom>
+          <a:noFill/>
+          <a:ln/>
+        </p:spPr>
+        <p:txBody>
+          <a:bodyPr wrap="square" lIns="0" tIns="0" rIns="0" bIns="0" rtlCol="0" anchor="t">
+            <a:normAutofit/>
+          </a:bodyPr>
+          <a:lstStyle/>
+          <a:p>
+            <a:pPr indent="0" marL="0">
+              <a:buNone/>
+            </a:pPr>
+            <a:r>
+              <a:rPr lang="en-US" sz="1800" b="1" dirty="0">
+                <a:solidFill>
+                  <a:srgbClr val="1F2530"/>
+                </a:solidFill>
+                <a:latin typeface="Noto Sans KR" pitchFamily="34" charset="0"/>
+                <a:ea typeface="Noto Sans KR" pitchFamily="34" charset="-122"/>
+                <a:cs typeface="Noto Sans KR" pitchFamily="34" charset="-120"/>
+              </a:rPr>
+              <a:t>제품팀 실행</a:t>
+            </a:r>
+            <a:endParaRPr lang="en-US" sz="1800" dirty="0"/>
+          </a:p>
+        </p:txBody>
+      </p:sp>
+      <p:sp>
+        <p:nvSpPr>
+          <p:cNvPr id="15" name="Shape 12"/>
+          <p:cNvSpPr/>
+          <p:nvPr/>
+        </p:nvSpPr>
+        <p:spPr>
+          <a:xfrm>
+            <a:off x="3630168" y="3493008"/>
+            <a:ext cx="2103120" cy="329184"/>
+          </a:xfrm>
+          <a:prstGeom prst="roundRect">
+            <a:avLst>
+              <a:gd name="adj" fmla="val 22222"/>
+            </a:avLst>
+          </a:prstGeom>
+          <a:solidFill>
+            <a:srgbClr val="EDF4FA"/>
+          </a:solidFill>
+          <a:ln w="12700">
+            <a:solidFill>
+              <a:srgbClr val="EDF4FA"/>
+            </a:solidFill>
+            <a:prstDash val="solid"/>
+          </a:ln>
+        </p:spPr>
+      </p:sp>
+      <p:sp>
+        <p:nvSpPr>
+          <p:cNvPr id="16" name="Text 13"/>
+          <p:cNvSpPr/>
+          <p:nvPr/>
+        </p:nvSpPr>
+        <p:spPr>
+          <a:xfrm>
+            <a:off x="3703320" y="3493008"/>
+            <a:ext cx="1956816" cy="329184"/>
+          </a:xfrm>
+          <a:prstGeom prst="rect">
+            <a:avLst/>
+          </a:prstGeom>
+          <a:noFill/>
+          <a:ln/>
+        </p:spPr>
+        <p:txBody>
+          <a:bodyPr wrap="square" lIns="0" tIns="0" rIns="0" bIns="0" rtlCol="0" anchor="ctr">
+            <a:normAutofit/>
+          </a:bodyPr>
+          <a:lstStyle/>
+          <a:p>
             <a:pPr algn="ctr" indent="0" marL="0">
               <a:buNone/>
             </a:pPr>
             <a:r>
-              <a:rPr lang="en-US" sz="1200" b="1" dirty="0">
+              <a:rPr lang="en-US" sz="900" b="1" dirty="0">
+                <a:solidFill>
+                  <a:srgbClr val="2272B4"/>
+                </a:solidFill>
+                <a:latin typeface="Noto Sans KR" pitchFamily="34" charset="0"/>
+                <a:ea typeface="Noto Sans KR" pitchFamily="34" charset="-122"/>
+                <a:cs typeface="Noto Sans KR" pitchFamily="34" charset="-120"/>
+              </a:rPr>
+              <a:t>25% 시험 시작</a:t>
+            </a:r>
+            <a:endParaRPr lang="en-US" sz="900" dirty="0"/>
+          </a:p>
+        </p:txBody>
+      </p:sp>
+      <p:sp>
+        <p:nvSpPr>
+          <p:cNvPr id="17" name="Text 14"/>
+          <p:cNvSpPr/>
+          <p:nvPr/>
+        </p:nvSpPr>
+        <p:spPr>
+          <a:xfrm>
+            <a:off x="3630168" y="4041648"/>
+            <a:ext cx="2103120" cy="658368"/>
+          </a:xfrm>
+          <a:prstGeom prst="rect">
+            <a:avLst/>
+          </a:prstGeom>
+          <a:noFill/>
+          <a:ln/>
+        </p:spPr>
+        <p:txBody>
+          <a:bodyPr wrap="square" lIns="0" tIns="0" rIns="0" bIns="0" rtlCol="0" anchor="t">
+            <a:normAutofit/>
+          </a:bodyPr>
+          <a:lstStyle/>
+          <a:p>
+            <a:pPr indent="0" marL="0">
+              <a:buNone/>
+            </a:pPr>
+            <a:r>
+              <a:rPr lang="en-US" sz="1050" dirty="0">
+                <a:solidFill>
+                  <a:srgbClr val="5B6573"/>
+                </a:solidFill>
+                <a:latin typeface="Noto Sans KR" pitchFamily="34" charset="0"/>
+                <a:ea typeface="Noto Sans KR" pitchFamily="34" charset="-122"/>
+                <a:cs typeface="Noto Sans KR" pitchFamily="34" charset="-120"/>
+              </a:rPr>
+              <a:t>한 화면 간편결제를 실제 고객에게 적용</a:t>
+            </a:r>
+            <a:endParaRPr lang="en-US" sz="1050" dirty="0"/>
+          </a:p>
+        </p:txBody>
+      </p:sp>
+      <p:sp>
+        <p:nvSpPr>
+          <p:cNvPr id="18" name="Shape 15"/>
+          <p:cNvSpPr/>
+          <p:nvPr/>
+        </p:nvSpPr>
+        <p:spPr>
+          <a:xfrm>
+            <a:off x="6300216" y="1920240"/>
+            <a:ext cx="2487168" cy="3246120"/>
+          </a:xfrm>
+          <a:prstGeom prst="roundRect">
+            <a:avLst>
+              <a:gd name="adj" fmla="val 2941"/>
+            </a:avLst>
+          </a:prstGeom>
+          <a:solidFill>
+            <a:srgbClr val="FFFFFF"/>
+          </a:solidFill>
+          <a:ln w="12700">
+            <a:solidFill>
+              <a:srgbClr val="DCE1E7"/>
+            </a:solidFill>
+            <a:prstDash val="solid"/>
+          </a:ln>
+        </p:spPr>
+      </p:sp>
+      <p:sp>
+        <p:nvSpPr>
+          <p:cNvPr id="19" name="Text 16"/>
+          <p:cNvSpPr/>
+          <p:nvPr/>
+        </p:nvSpPr>
+        <p:spPr>
+          <a:xfrm>
+            <a:off x="6483096" y="2130552"/>
+            <a:ext cx="502920" cy="310896"/>
+          </a:xfrm>
+          <a:prstGeom prst="rect">
+            <a:avLst/>
+          </a:prstGeom>
+          <a:noFill/>
+          <a:ln/>
+        </p:spPr>
+        <p:txBody>
+          <a:bodyPr wrap="square" lIns="0" tIns="0" rIns="0" bIns="0" rtlCol="0" anchor="ctr">
+            <a:normAutofit/>
+          </a:bodyPr>
+          <a:lstStyle/>
+          <a:p>
+            <a:pPr indent="0" marL="0">
+              <a:buNone/>
+            </a:pPr>
+            <a:r>
+              <a:rPr lang="en-US" sz="1000" b="1" dirty="0">
+                <a:solidFill>
+                  <a:srgbClr val="EE3D2C"/>
+                </a:solidFill>
+                <a:latin typeface="Noto Sans KR" pitchFamily="34" charset="0"/>
+                <a:ea typeface="Noto Sans KR" pitchFamily="34" charset="-122"/>
+                <a:cs typeface="Noto Sans KR" pitchFamily="34" charset="-120"/>
+              </a:rPr>
+              <a:t>03</a:t>
+            </a:r>
+            <a:endParaRPr lang="en-US" sz="1000" dirty="0"/>
+          </a:p>
+        </p:txBody>
+      </p:sp>
+      <p:sp>
+        <p:nvSpPr>
+          <p:cNvPr id="20" name="Text 17"/>
+          <p:cNvSpPr/>
+          <p:nvPr/>
+        </p:nvSpPr>
+        <p:spPr>
+          <a:xfrm>
+            <a:off x="6483096" y="2670048"/>
+            <a:ext cx="2103120" cy="621792"/>
+          </a:xfrm>
+          <a:prstGeom prst="rect">
+            <a:avLst/>
+          </a:prstGeom>
+          <a:noFill/>
+          <a:ln/>
+        </p:spPr>
+        <p:txBody>
+          <a:bodyPr wrap="square" lIns="0" tIns="0" rIns="0" bIns="0" rtlCol="0" anchor="t">
+            <a:normAutofit/>
+          </a:bodyPr>
+          <a:lstStyle/>
+          <a:p>
+            <a:pPr indent="0" marL="0">
+              <a:buNone/>
+            </a:pPr>
+            <a:r>
+              <a:rPr lang="en-US" sz="1800" b="1" dirty="0">
                 <a:solidFill>
                   <a:srgbClr val="1F2530"/>
                 </a:solidFill>
@@ -3162,22 +3708,90 @@
                 <a:ea typeface="Noto Sans KR" pitchFamily="34" charset="-122"/>
                 <a:cs typeface="Noto Sans KR" pitchFamily="34" charset="-120"/>
               </a:rPr>
-              <a:t>이번 고객군</a:t>
-            </a:r>
-            <a:endParaRPr lang="en-US" sz="1200" dirty="0"/>
-          </a:p>
-        </p:txBody>
-      </p:sp>
-      <p:sp>
-        <p:nvSpPr>
-          <p:cNvPr id="11" name="Text 8"/>
-          <p:cNvSpPr/>
-          <p:nvPr/>
-        </p:nvSpPr>
-        <p:spPr>
-          <a:xfrm>
-            <a:off x="6501384" y="2249424"/>
-            <a:ext cx="4873752" cy="630936"/>
+              <a:t>24시간</a:t>
+            </a:r>
+            <a:endParaRPr lang="en-US" sz="1800" dirty="0"/>
+          </a:p>
+        </p:txBody>
+      </p:sp>
+      <p:sp>
+        <p:nvSpPr>
+          <p:cNvPr id="21" name="Shape 18"/>
+          <p:cNvSpPr/>
+          <p:nvPr/>
+        </p:nvSpPr>
+        <p:spPr>
+          <a:xfrm>
+            <a:off x="6483096" y="3493008"/>
+            <a:ext cx="2103120" cy="329184"/>
+          </a:xfrm>
+          <a:prstGeom prst="roundRect">
+            <a:avLst>
+              <a:gd name="adj" fmla="val 22222"/>
+            </a:avLst>
+          </a:prstGeom>
+          <a:solidFill>
+            <a:srgbClr val="EDF4FA"/>
+          </a:solidFill>
+          <a:ln w="12700">
+            <a:solidFill>
+              <a:srgbClr val="EDF4FA"/>
+            </a:solidFill>
+            <a:prstDash val="solid"/>
+          </a:ln>
+        </p:spPr>
+      </p:sp>
+      <p:sp>
+        <p:nvSpPr>
+          <p:cNvPr id="22" name="Text 19"/>
+          <p:cNvSpPr/>
+          <p:nvPr/>
+        </p:nvSpPr>
+        <p:spPr>
+          <a:xfrm>
+            <a:off x="6556248" y="3493008"/>
+            <a:ext cx="1956816" cy="329184"/>
+          </a:xfrm>
+          <a:prstGeom prst="rect">
+            <a:avLst/>
+          </a:prstGeom>
+          <a:noFill/>
+          <a:ln/>
+        </p:spPr>
+        <p:txBody>
+          <a:bodyPr wrap="square" lIns="0" tIns="0" rIns="0" bIns="0" rtlCol="0" anchor="ctr">
+            <a:normAutofit/>
+          </a:bodyPr>
+          <a:lstStyle/>
+          <a:p>
+            <a:pPr algn="ctr" indent="0" marL="0">
+              <a:buNone/>
+            </a:pPr>
+            <a:r>
+              <a:rPr lang="en-US" sz="900" b="1" dirty="0">
+                <a:solidFill>
+                  <a:srgbClr val="2272B4"/>
+                </a:solidFill>
+                <a:latin typeface="Noto Sans KR" pitchFamily="34" charset="0"/>
+                <a:ea typeface="Noto Sans KR" pitchFamily="34" charset="-122"/>
+                <a:cs typeface="Noto Sans KR" pitchFamily="34" charset="-120"/>
+              </a:rPr>
+              <a:t>효과·비용 확인</a:t>
+            </a:r>
+            <a:endParaRPr lang="en-US" sz="900" dirty="0"/>
+          </a:p>
+        </p:txBody>
+      </p:sp>
+      <p:sp>
+        <p:nvSpPr>
+          <p:cNvPr id="23" name="Text 20"/>
+          <p:cNvSpPr/>
+          <p:nvPr/>
+        </p:nvSpPr>
+        <p:spPr>
+          <a:xfrm>
+            <a:off x="6483096" y="4041648"/>
+            <a:ext cx="2103120" cy="658368"/>
           </a:xfrm>
           <a:prstGeom prst="rect">
             <a:avLst/>
@@ -3191,19 +3805,196 @@
           </a:bodyPr>
           <a:lstStyle/>
           <a:p>
+            <a:pPr indent="0" marL="0">
+              <a:buNone/>
+            </a:pPr>
+            <a:r>
+              <a:rPr lang="en-US" sz="1050" dirty="0">
+                <a:solidFill>
+                  <a:srgbClr val="5B6573"/>
+                </a:solidFill>
+                <a:latin typeface="Noto Sans KR" pitchFamily="34" charset="0"/>
+                <a:ea typeface="Noto Sans KR" pitchFamily="34" charset="-122"/>
+                <a:cs typeface="Noto Sans KR" pitchFamily="34" charset="-120"/>
+              </a:rPr>
+              <a:t>결제 완료율, 오류율, AI 사용 비용 점검</a:t>
+            </a:r>
+            <a:endParaRPr lang="en-US" sz="1050" dirty="0"/>
+          </a:p>
+        </p:txBody>
+      </p:sp>
+      <p:sp>
+        <p:nvSpPr>
+          <p:cNvPr id="24" name="Shape 21"/>
+          <p:cNvSpPr/>
+          <p:nvPr/>
+        </p:nvSpPr>
+        <p:spPr>
+          <a:xfrm>
+            <a:off x="9153144" y="1920240"/>
+            <a:ext cx="2487168" cy="3246120"/>
+          </a:xfrm>
+          <a:prstGeom prst="roundRect">
+            <a:avLst>
+              <a:gd name="adj" fmla="val 2941"/>
+            </a:avLst>
+          </a:prstGeom>
+          <a:solidFill>
+            <a:srgbClr val="11171C"/>
+          </a:solidFill>
+          <a:ln w="12700">
+            <a:solidFill>
+              <a:srgbClr val="11171C"/>
+            </a:solidFill>
+            <a:prstDash val="solid"/>
+          </a:ln>
+        </p:spPr>
+      </p:sp>
+      <p:sp>
+        <p:nvSpPr>
+          <p:cNvPr id="25" name="Text 22"/>
+          <p:cNvSpPr/>
+          <p:nvPr/>
+        </p:nvSpPr>
+        <p:spPr>
+          <a:xfrm>
+            <a:off x="9336024" y="2130552"/>
+            <a:ext cx="502920" cy="310896"/>
+          </a:xfrm>
+          <a:prstGeom prst="rect">
+            <a:avLst/>
+          </a:prstGeom>
+          <a:noFill/>
+          <a:ln/>
+        </p:spPr>
+        <p:txBody>
+          <a:bodyPr wrap="square" lIns="0" tIns="0" rIns="0" bIns="0" rtlCol="0" anchor="ctr">
+            <a:normAutofit/>
+          </a:bodyPr>
+          <a:lstStyle/>
+          <a:p>
+            <a:pPr indent="0" marL="0">
+              <a:buNone/>
+            </a:pPr>
+            <a:r>
+              <a:rPr lang="en-US" sz="1000" b="1" dirty="0">
+                <a:solidFill>
+                  <a:srgbClr val="40D1F5"/>
+                </a:solidFill>
+                <a:latin typeface="Noto Sans KR" pitchFamily="34" charset="0"/>
+                <a:ea typeface="Noto Sans KR" pitchFamily="34" charset="-122"/>
+                <a:cs typeface="Noto Sans KR" pitchFamily="34" charset="-120"/>
+              </a:rPr>
+              <a:t>04</a:t>
+            </a:r>
+            <a:endParaRPr lang="en-US" sz="1000" dirty="0"/>
+          </a:p>
+        </p:txBody>
+      </p:sp>
+      <p:sp>
+        <p:nvSpPr>
+          <p:cNvPr id="26" name="Text 23"/>
+          <p:cNvSpPr/>
+          <p:nvPr/>
+        </p:nvSpPr>
+        <p:spPr>
+          <a:xfrm>
+            <a:off x="9336024" y="2670048"/>
+            <a:ext cx="2103120" cy="621792"/>
+          </a:xfrm>
+          <a:prstGeom prst="rect">
+            <a:avLst/>
+          </a:prstGeom>
+          <a:noFill/>
+          <a:ln/>
+        </p:spPr>
+        <p:txBody>
+          <a:bodyPr wrap="square" lIns="0" tIns="0" rIns="0" bIns="0" rtlCol="0" anchor="t">
+            <a:normAutofit/>
+          </a:bodyPr>
+          <a:lstStyle/>
+          <a:p>
+            <a:pPr indent="0" marL="0">
+              <a:buNone/>
+            </a:pPr>
+            <a:r>
+              <a:rPr lang="en-US" sz="1800" b="1" dirty="0">
+                <a:solidFill>
+                  <a:srgbClr val="FFFFFF"/>
+                </a:solidFill>
+                <a:latin typeface="Noto Sans KR" pitchFamily="34" charset="0"/>
+                <a:ea typeface="Noto Sans KR" pitchFamily="34" charset="-122"/>
+                <a:cs typeface="Noto Sans KR" pitchFamily="34" charset="-120"/>
+              </a:rPr>
+              <a:t>72시간</a:t>
+            </a:r>
+            <a:endParaRPr lang="en-US" sz="1800" dirty="0"/>
+          </a:p>
+        </p:txBody>
+      </p:sp>
+      <p:sp>
+        <p:nvSpPr>
+          <p:cNvPr id="27" name="Shape 24"/>
+          <p:cNvSpPr/>
+          <p:nvPr/>
+        </p:nvSpPr>
+        <p:spPr>
+          <a:xfrm>
+            <a:off x="9336024" y="3493008"/>
+            <a:ext cx="2103120" cy="329184"/>
+          </a:xfrm>
+          <a:prstGeom prst="roundRect">
+            <a:avLst>
+              <a:gd name="adj" fmla="val 22222"/>
+            </a:avLst>
+          </a:prstGeom>
+          <a:solidFill>
+            <a:srgbClr val="243039"/>
+          </a:solidFill>
+          <a:ln w="12700">
+            <a:solidFill>
+              <a:srgbClr val="243039"/>
+            </a:solidFill>
+            <a:prstDash val="solid"/>
+          </a:ln>
+        </p:spPr>
+      </p:sp>
+      <p:sp>
+        <p:nvSpPr>
+          <p:cNvPr id="28" name="Text 25"/>
+          <p:cNvSpPr/>
+          <p:nvPr/>
+        </p:nvSpPr>
+        <p:spPr>
+          <a:xfrm>
+            <a:off x="9409176" y="3493008"/>
+            <a:ext cx="1956816" cy="329184"/>
+          </a:xfrm>
+          <a:prstGeom prst="rect">
+            <a:avLst/>
+          </a:prstGeom>
+          <a:noFill/>
+          <a:ln/>
+        </p:spPr>
+        <p:txBody>
+          <a:bodyPr wrap="square" lIns="0" tIns="0" rIns="0" bIns="0" rtlCol="0" anchor="ctr">
+            <a:normAutofit/>
+          </a:bodyPr>
+          <a:lstStyle/>
+          <a:p>
             <a:pPr algn="ctr" indent="0" marL="0">
               <a:buNone/>
             </a:pPr>
             <a:r>
-              <a:rPr lang="en-US" sz="900" dirty="0">
-                <a:solidFill>
-                  <a:srgbClr val="5B6573"/>
-                </a:solidFill>
-                <a:latin typeface="Noto Sans KR" pitchFamily="34" charset="0"/>
-                <a:ea typeface="Noto Sans KR" pitchFamily="34" charset="-122"/>
-                <a:cs typeface="Noto Sans KR" pitchFamily="34" charset="-120"/>
-              </a:rPr>
-              <a:t>예상 총가치 - 실행 비용 = $721.3K 순가치</a:t>
+              <a:rPr lang="en-US" sz="900" b="1" dirty="0">
+                <a:solidFill>
+                  <a:srgbClr val="40D1F5"/>
+                </a:solidFill>
+                <a:latin typeface="Noto Sans KR" pitchFamily="34" charset="0"/>
+                <a:ea typeface="Noto Sans KR" pitchFamily="34" charset="-122"/>
+                <a:cs typeface="Noto Sans KR" pitchFamily="34" charset="-120"/>
+              </a:rPr>
+              <a:t>확대 또는 중단</a:t>
             </a:r>
             <a:endParaRPr lang="en-US" sz="900" dirty="0"/>
           </a:p>
@@ -3211,23 +4002,23 @@
       </p:sp>
       <p:sp>
         <p:nvSpPr>
-          <p:cNvPr id="12" name="Text 9"/>
-          <p:cNvSpPr/>
-          <p:nvPr/>
-        </p:nvSpPr>
-        <p:spPr>
-          <a:xfrm>
-            <a:off x="713232" y="3520440"/>
-            <a:ext cx="2011680" cy="310896"/>
-          </a:xfrm>
-          <a:prstGeom prst="rect">
-            <a:avLst/>
-          </a:prstGeom>
-          <a:noFill/>
-          <a:ln/>
-        </p:spPr>
-        <p:txBody>
-          <a:bodyPr wrap="square" lIns="0" tIns="0" rIns="0" bIns="0" rtlCol="0" anchor="ctr">
+          <p:cNvPr id="29" name="Text 26"/>
+          <p:cNvSpPr/>
+          <p:nvPr/>
+        </p:nvSpPr>
+        <p:spPr>
+          <a:xfrm>
+            <a:off x="9336024" y="4041648"/>
+            <a:ext cx="2103120" cy="658368"/>
+          </a:xfrm>
+          <a:prstGeom prst="rect">
+            <a:avLst/>
+          </a:prstGeom>
+          <a:noFill/>
+          <a:ln/>
+        </p:spPr>
+        <p:txBody>
+          <a:bodyPr wrap="square" lIns="0" tIns="0" rIns="0" bIns="0" rtlCol="0" anchor="t">
             <a:normAutofit/>
           </a:bodyPr>
           <a:lstStyle/>
@@ -3236,157 +4027,17 @@
               <a:buNone/>
             </a:pPr>
             <a:r>
-              <a:rPr lang="en-US" sz="1300" b="1" dirty="0">
-                <a:solidFill>
-                  <a:srgbClr val="1F2530"/>
-                </a:solidFill>
-                <a:latin typeface="Noto Sans KR" pitchFamily="34" charset="0"/>
-                <a:ea typeface="Noto Sans KR" pitchFamily="34" charset="-122"/>
-                <a:cs typeface="Noto Sans KR" pitchFamily="34" charset="-120"/>
-              </a:rPr>
-              <a:t>예상 순가치</a:t>
-            </a:r>
-            <a:endParaRPr lang="en-US" sz="1300" dirty="0"/>
-          </a:p>
-        </p:txBody>
-      </p:sp>
-      <p:sp>
-        <p:nvSpPr>
-          <p:cNvPr id="13" name="Text 10"/>
-          <p:cNvSpPr/>
-          <p:nvPr/>
-        </p:nvSpPr>
-        <p:spPr>
-          <a:xfrm>
-            <a:off x="2240280" y="3401568"/>
-            <a:ext cx="8686800" cy="749808"/>
-          </a:xfrm>
-          <a:prstGeom prst="rect">
-            <a:avLst/>
-          </a:prstGeom>
-          <a:noFill/>
-          <a:ln/>
-        </p:spPr>
-        <p:txBody>
-          <a:bodyPr wrap="square" lIns="0" tIns="0" rIns="0" bIns="0" rtlCol="0" anchor="ctr">
-            <a:normAutofit/>
-          </a:bodyPr>
-          <a:lstStyle/>
-          <a:p>
-            <a:pPr indent="0" marL="0">
-              <a:buNone/>
-            </a:pPr>
-            <a:r>
-              <a:rPr lang="en-US" sz="1600" b="1" dirty="0">
-                <a:solidFill>
-                  <a:srgbClr val="1F2530"/>
-                </a:solidFill>
-                <a:latin typeface="Noto Sans KR" pitchFamily="34" charset="0"/>
-                <a:ea typeface="Noto Sans KR" pitchFamily="34" charset="-122"/>
-                <a:cs typeface="Noto Sans KR" pitchFamily="34" charset="-120"/>
-              </a:rPr>
-              <a:t>= 예상 결제 완료 증가 × 대상 고객 수 × 평균 주문금액 × 관측기간</a:t>
-            </a:r>
-            <a:endParaRPr lang="en-US" sz="1600" dirty="0"/>
-          </a:p>
-          <a:p>
-            <a:pPr indent="0" marL="0">
-              <a:buNone/>
-            </a:pPr>
-            <a:r>
-              <a:rPr lang="en-US" sz="1600" b="1" dirty="0">
-                <a:solidFill>
-                  <a:srgbClr val="1F2530"/>
-                </a:solidFill>
-                <a:latin typeface="Noto Sans KR" pitchFamily="34" charset="0"/>
-                <a:ea typeface="Noto Sans KR" pitchFamily="34" charset="-122"/>
-                <a:cs typeface="Noto Sans KR" pitchFamily="34" charset="-120"/>
-              </a:rPr>
-              <a:t>  - 시험·개발·운영 비용($5K)</a:t>
-            </a:r>
-            <a:endParaRPr lang="en-US" sz="1600" dirty="0"/>
-          </a:p>
-        </p:txBody>
-      </p:sp>
-      <p:sp>
-        <p:nvSpPr>
-          <p:cNvPr id="14" name="Text 11"/>
-          <p:cNvSpPr/>
-          <p:nvPr/>
-        </p:nvSpPr>
-        <p:spPr>
-          <a:xfrm>
-            <a:off x="713232" y="4754880"/>
-            <a:ext cx="10287000" cy="365760"/>
-          </a:xfrm>
-          <a:prstGeom prst="rect">
-            <a:avLst/>
-          </a:prstGeom>
-          <a:noFill/>
-          <a:ln/>
-        </p:spPr>
-        <p:txBody>
-          <a:bodyPr wrap="square" lIns="0" tIns="0" rIns="0" bIns="0" rtlCol="0" anchor="ctr">
-            <a:normAutofit/>
-          </a:bodyPr>
-          <a:lstStyle/>
-          <a:p>
-            <a:pPr indent="0" marL="0">
-              <a:buNone/>
-            </a:pPr>
-            <a:r>
-              <a:rPr lang="en-US" sz="1200" b="1" dirty="0">
-                <a:solidFill>
-                  <a:srgbClr val="EE3D2C"/>
-                </a:solidFill>
-                <a:latin typeface="Noto Sans KR" pitchFamily="34" charset="0"/>
-                <a:ea typeface="Noto Sans KR" pitchFamily="34" charset="-122"/>
-                <a:cs typeface="Noto Sans KR" pitchFamily="34" charset="-120"/>
-              </a:rPr>
-              <a:t>주의: +2.25%p는 과거 시험의 실제 결과이고, +1.80%p는 이번 고객군에 대한 예상치입니다.</a:t>
-            </a:r>
-            <a:endParaRPr lang="en-US" sz="1200" dirty="0"/>
-          </a:p>
-        </p:txBody>
-      </p:sp>
-      <p:sp>
-        <p:nvSpPr>
-          <p:cNvPr id="15" name="Text 12"/>
-          <p:cNvSpPr/>
-          <p:nvPr/>
-        </p:nvSpPr>
-        <p:spPr>
-          <a:xfrm>
-            <a:off x="713232" y="5285232"/>
-            <a:ext cx="10287000" cy="365760"/>
-          </a:xfrm>
-          <a:prstGeom prst="rect">
-            <a:avLst/>
-          </a:prstGeom>
-          <a:noFill/>
-          <a:ln/>
-        </p:spPr>
-        <p:txBody>
-          <a:bodyPr wrap="square" lIns="0" tIns="0" rIns="0" bIns="0" rtlCol="0" anchor="ctr">
-            <a:normAutofit/>
-          </a:bodyPr>
-          <a:lstStyle/>
-          <a:p>
-            <a:pPr indent="0" marL="0">
-              <a:buNone/>
-            </a:pPr>
-            <a:r>
-              <a:rPr lang="en-US" sz="1100" dirty="0">
-                <a:solidFill>
-                  <a:srgbClr val="5B6573"/>
-                </a:solidFill>
-                <a:latin typeface="Noto Sans KR" pitchFamily="34" charset="0"/>
-                <a:ea typeface="Noto Sans KR" pitchFamily="34" charset="-122"/>
-                <a:cs typeface="Noto Sans KR" pitchFamily="34" charset="-120"/>
-              </a:rPr>
-              <a:t>대시보드의 $0.03/$0.05는 라이브 데모에서 검증한 AI 예산 임계값이며 연간 비용 상한이 아닙니다.</a:t>
-            </a:r>
-            <a:endParaRPr lang="en-US" sz="1100" dirty="0"/>
+              <a:rPr lang="en-US" sz="1050" dirty="0">
+                <a:solidFill>
+                  <a:srgbClr val="B7C5CD"/>
+                </a:solidFill>
+                <a:latin typeface="Noto Sans KR" pitchFamily="34" charset="0"/>
+                <a:ea typeface="Noto Sans KR" pitchFamily="34" charset="-122"/>
+                <a:cs typeface="Noto Sans KR" pitchFamily="34" charset="-120"/>
+              </a:rPr>
+              <a:t>효과가 있으면 50%로 확대 · 문제 시 중단</a:t>
+            </a:r>
+            <a:endParaRPr lang="en-US" sz="1050" dirty="0"/>
           </a:p>
         </p:txBody>
       </p:sp>
@@ -3498,7 +4149,7 @@
                 <a:ea typeface="Noto Sans KR" pitchFamily="34" charset="-122"/>
                 <a:cs typeface="Noto Sans KR" pitchFamily="34" charset="-120"/>
               </a:rPr>
-              <a:t>부록 B</a:t>
+              <a:t>부록 A</a:t>
             </a:r>
             <a:endParaRPr lang="en-US" sz="900" dirty="0"/>
           </a:p>
@@ -3562,7 +4213,7 @@
                 <a:ea typeface="Noto Sans KR" pitchFamily="34" charset="-122"/>
                 <a:cs typeface="Noto Sans KR" pitchFamily="34" charset="-120"/>
               </a:rPr>
-              <a:t>AI 초안과 사람의 승인을 분리합니다</a:t>
+              <a:t>예상 가치의 계산 범위</a:t>
             </a:r>
             <a:endParaRPr lang="en-US" sz="2800" dirty="0"/>
           </a:p>
@@ -3603,7 +4254,7 @@
                 <a:ea typeface="Noto Sans KR" pitchFamily="34" charset="-122"/>
                 <a:cs typeface="Noto Sans KR" pitchFamily="34" charset="-120"/>
               </a:rPr>
-              <a:t>AI는 시험안을 작성할 뿐이며, 담당자 승인 없이는 최종 결정으로 기록할 수 없습니다.</a:t>
+              <a:t>회사 전체의 단순 환산값과 이번 고객군의 예상 가치를 구분합니다.</a:t>
             </a:r>
             <a:endParaRPr lang="en-US" sz="1200" dirty="0"/>
           </a:p>
@@ -3617,78 +4268,12 @@
         </p:nvSpPr>
         <p:spPr>
           <a:xfrm>
-            <a:off x="2011680" y="1828800"/>
-            <a:ext cx="566928" cy="566928"/>
-          </a:xfrm>
-          <a:prstGeom prst="ellipse">
-            <a:avLst/>
-          </a:prstGeom>
-          <a:solidFill>
-            <a:srgbClr val="FF8F5B"/>
-          </a:solidFill>
-          <a:ln w="12700">
-            <a:solidFill>
-              <a:srgbClr val="FF8F5B"/>
-            </a:solidFill>
-            <a:prstDash val="solid"/>
-          </a:ln>
-        </p:spPr>
-      </p:sp>
-      <p:sp>
-        <p:nvSpPr>
-          <p:cNvPr id="7" name="Text 4"/>
-          <p:cNvSpPr/>
-          <p:nvPr/>
-        </p:nvSpPr>
-        <p:spPr>
-          <a:xfrm>
-            <a:off x="2011680" y="1828800"/>
-            <a:ext cx="566928" cy="566928"/>
-          </a:xfrm>
-          <a:prstGeom prst="rect">
-            <a:avLst/>
-          </a:prstGeom>
-          <a:noFill/>
-          <a:ln/>
-        </p:spPr>
-        <p:txBody>
-          <a:bodyPr wrap="square" lIns="0" tIns="0" rIns="0" bIns="0" rtlCol="0" anchor="ctr">
-            <a:normAutofit/>
-          </a:bodyPr>
-          <a:lstStyle/>
-          <a:p>
-            <a:pPr algn="ctr" indent="0" marL="0">
-              <a:buNone/>
-            </a:pPr>
-            <a:r>
-              <a:rPr lang="en-US" sz="1600" b="1" dirty="0">
-                <a:solidFill>
-                  <a:srgbClr val="FFFFFF"/>
-                </a:solidFill>
-                <a:latin typeface="Noto Sans KR" pitchFamily="34" charset="0"/>
-                <a:ea typeface="Noto Sans KR" pitchFamily="34" charset="-122"/>
-                <a:cs typeface="Noto Sans KR" pitchFamily="34" charset="-120"/>
-              </a:rPr>
-              <a:t>1</a:t>
-            </a:r>
-            <a:endParaRPr lang="en-US" sz="1600" dirty="0"/>
-          </a:p>
-        </p:txBody>
-      </p:sp>
-      <p:sp>
-        <p:nvSpPr>
-          <p:cNvPr id="8" name="Shape 5"/>
-          <p:cNvSpPr/>
-          <p:nvPr/>
-        </p:nvSpPr>
-        <p:spPr>
-          <a:xfrm>
-            <a:off x="731520" y="2651760"/>
-            <a:ext cx="3127248" cy="1417320"/>
+            <a:off x="640080" y="1828800"/>
+            <a:ext cx="5166360" cy="1143000"/>
           </a:xfrm>
           <a:prstGeom prst="roundRect">
             <a:avLst>
-              <a:gd name="adj" fmla="val 5161"/>
+              <a:gd name="adj" fmla="val 6400"/>
             </a:avLst>
           </a:prstGeom>
           <a:solidFill>
@@ -3696,7 +4281,7 @@
           </a:solidFill>
           <a:ln w="17780">
             <a:solidFill>
-              <a:srgbClr val="FF8F5B"/>
+              <a:srgbClr val="2272B4"/>
             </a:solidFill>
             <a:prstDash val="solid"/>
           </a:ln>
@@ -3704,14 +4289,14 @@
       </p:sp>
       <p:sp>
         <p:nvSpPr>
-          <p:cNvPr id="9" name="Text 6"/>
-          <p:cNvSpPr/>
-          <p:nvPr/>
-        </p:nvSpPr>
-        <p:spPr>
-          <a:xfrm>
-            <a:off x="877824" y="2761488"/>
-            <a:ext cx="2834640" cy="274320"/>
+          <p:cNvPr id="7" name="Text 4"/>
+          <p:cNvSpPr/>
+          <p:nvPr/>
+        </p:nvSpPr>
+        <p:spPr>
+          <a:xfrm>
+            <a:off x="786384" y="1938528"/>
+            <a:ext cx="4873752" cy="274320"/>
           </a:xfrm>
           <a:prstGeom prst="rect">
             <a:avLst/>
@@ -3737,7 +4322,7 @@
                 <a:ea typeface="Noto Sans KR" pitchFamily="34" charset="-122"/>
                 <a:cs typeface="Noto Sans KR" pitchFamily="34" charset="-120"/>
               </a:rPr>
-              <a:t>시험안 작성</a:t>
+              <a:t>회사 전체</a:t>
             </a:r>
             <a:endParaRPr lang="en-US" sz="1200" dirty="0"/>
           </a:p>
@@ -3745,14 +4330,14 @@
       </p:sp>
       <p:sp>
         <p:nvSpPr>
-          <p:cNvPr id="10" name="Text 7"/>
-          <p:cNvSpPr/>
-          <p:nvPr/>
-        </p:nvSpPr>
-        <p:spPr>
-          <a:xfrm>
-            <a:off x="877824" y="3072384"/>
-            <a:ext cx="2834640" cy="905256"/>
+          <p:cNvPr id="8" name="Text 5"/>
+          <p:cNvSpPr/>
+          <p:nvPr/>
+        </p:nvSpPr>
+        <p:spPr>
+          <a:xfrm>
+            <a:off x="786384" y="2249424"/>
+            <a:ext cx="4873752" cy="630936"/>
           </a:xfrm>
           <a:prstGeom prst="rect">
             <a:avLst/>
@@ -3778,134 +4363,26 @@
                 <a:ea typeface="Noto Sans KR" pitchFamily="34" charset="-122"/>
                 <a:cs typeface="Noto Sans KR" pitchFamily="34" charset="-120"/>
               </a:rPr>
-              <a:t>AI 초안 + 사용한 근거</a:t>
+              <a:t>$400M × 1%p = $4M/년</a:t>
             </a:r>
             <a:endParaRPr lang="en-US" sz="900" dirty="0"/>
           </a:p>
-          <a:p>
-            <a:pPr algn="ctr" indent="0" marL="0">
-              <a:buNone/>
-            </a:pPr>
-            <a:r>
-              <a:rPr lang="en-US" sz="900" dirty="0">
-                <a:solidFill>
-                  <a:srgbClr val="5B6573"/>
-                </a:solidFill>
-                <a:latin typeface="Noto Sans KR" pitchFamily="34" charset="0"/>
-                <a:ea typeface="Noto Sans KR" pitchFamily="34" charset="-122"/>
-                <a:cs typeface="Noto Sans KR" pitchFamily="34" charset="-120"/>
-              </a:rPr>
-              <a:t>(proposed)</a:t>
-            </a:r>
-            <a:endParaRPr lang="en-US" sz="900" dirty="0"/>
-          </a:p>
-        </p:txBody>
-      </p:sp>
-      <p:sp>
-        <p:nvSpPr>
-          <p:cNvPr id="11" name="Shape 8"/>
-          <p:cNvSpPr/>
-          <p:nvPr/>
-        </p:nvSpPr>
-        <p:spPr>
-          <a:xfrm>
-            <a:off x="3950208" y="3355848"/>
-            <a:ext cx="438912" cy="0"/>
-          </a:xfrm>
-          <a:prstGeom prst="line">
-            <a:avLst/>
-          </a:prstGeom>
-          <a:noFill/>
-          <a:ln w="27940">
-            <a:solidFill>
-              <a:srgbClr val="DCE1E7"/>
-            </a:solidFill>
-            <a:prstDash val="solid"/>
-            <a:headEnd type="none"/>
-            <a:tailEnd type="triangle"/>
-          </a:ln>
-        </p:spPr>
-      </p:sp>
-      <p:sp>
-        <p:nvSpPr>
-          <p:cNvPr id="12" name="Shape 9"/>
-          <p:cNvSpPr/>
-          <p:nvPr/>
-        </p:nvSpPr>
-        <p:spPr>
-          <a:xfrm>
-            <a:off x="5806440" y="1828800"/>
-            <a:ext cx="566928" cy="566928"/>
-          </a:xfrm>
-          <a:prstGeom prst="ellipse">
-            <a:avLst/>
-          </a:prstGeom>
-          <a:solidFill>
-            <a:srgbClr val="2F9E6F"/>
-          </a:solidFill>
-          <a:ln w="12700">
-            <a:solidFill>
-              <a:srgbClr val="2F9E6F"/>
-            </a:solidFill>
-            <a:prstDash val="solid"/>
-          </a:ln>
-        </p:spPr>
-      </p:sp>
-      <p:sp>
-        <p:nvSpPr>
-          <p:cNvPr id="13" name="Text 10"/>
-          <p:cNvSpPr/>
-          <p:nvPr/>
-        </p:nvSpPr>
-        <p:spPr>
-          <a:xfrm>
-            <a:off x="5806440" y="1828800"/>
-            <a:ext cx="566928" cy="566928"/>
-          </a:xfrm>
-          <a:prstGeom prst="rect">
-            <a:avLst/>
-          </a:prstGeom>
-          <a:noFill/>
-          <a:ln/>
-        </p:spPr>
-        <p:txBody>
-          <a:bodyPr wrap="square" lIns="0" tIns="0" rIns="0" bIns="0" rtlCol="0" anchor="ctr">
-            <a:normAutofit/>
-          </a:bodyPr>
-          <a:lstStyle/>
-          <a:p>
-            <a:pPr algn="ctr" indent="0" marL="0">
-              <a:buNone/>
-            </a:pPr>
-            <a:r>
-              <a:rPr lang="en-US" sz="1600" b="1" dirty="0">
-                <a:solidFill>
-                  <a:srgbClr val="FFFFFF"/>
-                </a:solidFill>
-                <a:latin typeface="Noto Sans KR" pitchFamily="34" charset="0"/>
-                <a:ea typeface="Noto Sans KR" pitchFamily="34" charset="-122"/>
-                <a:cs typeface="Noto Sans KR" pitchFamily="34" charset="-120"/>
-              </a:rPr>
-              <a:t>2</a:t>
-            </a:r>
-            <a:endParaRPr lang="en-US" sz="1600" dirty="0"/>
-          </a:p>
-        </p:txBody>
-      </p:sp>
-      <p:sp>
-        <p:nvSpPr>
-          <p:cNvPr id="14" name="Shape 11"/>
-          <p:cNvSpPr/>
-          <p:nvPr/>
-        </p:nvSpPr>
-        <p:spPr>
-          <a:xfrm>
-            <a:off x="4526280" y="2651760"/>
-            <a:ext cx="3127248" cy="1417320"/>
+        </p:txBody>
+      </p:sp>
+      <p:sp>
+        <p:nvSpPr>
+          <p:cNvPr id="9" name="Shape 6"/>
+          <p:cNvSpPr/>
+          <p:nvPr/>
+        </p:nvSpPr>
+        <p:spPr>
+          <a:xfrm>
+            <a:off x="6355080" y="1828800"/>
+            <a:ext cx="5166360" cy="1143000"/>
           </a:xfrm>
           <a:prstGeom prst="roundRect">
             <a:avLst>
-              <a:gd name="adj" fmla="val 5161"/>
+              <a:gd name="adj" fmla="val 6400"/>
             </a:avLst>
           </a:prstGeom>
           <a:solidFill>
@@ -3921,14 +4398,236 @@
       </p:sp>
       <p:sp>
         <p:nvSpPr>
+          <p:cNvPr id="10" name="Text 7"/>
+          <p:cNvSpPr/>
+          <p:nvPr/>
+        </p:nvSpPr>
+        <p:spPr>
+          <a:xfrm>
+            <a:off x="6501384" y="1938528"/>
+            <a:ext cx="4873752" cy="274320"/>
+          </a:xfrm>
+          <a:prstGeom prst="rect">
+            <a:avLst/>
+          </a:prstGeom>
+          <a:noFill/>
+          <a:ln/>
+        </p:spPr>
+        <p:txBody>
+          <a:bodyPr wrap="square" lIns="0" tIns="0" rIns="0" bIns="0" rtlCol="0" anchor="ctr">
+            <a:normAutofit/>
+          </a:bodyPr>
+          <a:lstStyle/>
+          <a:p>
+            <a:pPr algn="ctr" indent="0" marL="0">
+              <a:buNone/>
+            </a:pPr>
+            <a:r>
+              <a:rPr lang="en-US" sz="1200" b="1" dirty="0">
+                <a:solidFill>
+                  <a:srgbClr val="1F2530"/>
+                </a:solidFill>
+                <a:latin typeface="Noto Sans KR" pitchFamily="34" charset="0"/>
+                <a:ea typeface="Noto Sans KR" pitchFamily="34" charset="-122"/>
+                <a:cs typeface="Noto Sans KR" pitchFamily="34" charset="-120"/>
+              </a:rPr>
+              <a:t>이번 고객군</a:t>
+            </a:r>
+            <a:endParaRPr lang="en-US" sz="1200" dirty="0"/>
+          </a:p>
+        </p:txBody>
+      </p:sp>
+      <p:sp>
+        <p:nvSpPr>
+          <p:cNvPr id="11" name="Text 8"/>
+          <p:cNvSpPr/>
+          <p:nvPr/>
+        </p:nvSpPr>
+        <p:spPr>
+          <a:xfrm>
+            <a:off x="6501384" y="2249424"/>
+            <a:ext cx="4873752" cy="630936"/>
+          </a:xfrm>
+          <a:prstGeom prst="rect">
+            <a:avLst/>
+          </a:prstGeom>
+          <a:noFill/>
+          <a:ln/>
+        </p:spPr>
+        <p:txBody>
+          <a:bodyPr wrap="square" lIns="0" tIns="0" rIns="0" bIns="0" rtlCol="0" anchor="t">
+            <a:normAutofit/>
+          </a:bodyPr>
+          <a:lstStyle/>
+          <a:p>
+            <a:pPr algn="ctr" indent="0" marL="0">
+              <a:buNone/>
+            </a:pPr>
+            <a:r>
+              <a:rPr lang="en-US" sz="900" dirty="0">
+                <a:solidFill>
+                  <a:srgbClr val="5B6573"/>
+                </a:solidFill>
+                <a:latin typeface="Noto Sans KR" pitchFamily="34" charset="0"/>
+                <a:ea typeface="Noto Sans KR" pitchFamily="34" charset="-122"/>
+                <a:cs typeface="Noto Sans KR" pitchFamily="34" charset="-120"/>
+              </a:rPr>
+              <a:t>예상 총가치 - 실행 비용 = $721.3K 순가치</a:t>
+            </a:r>
+            <a:endParaRPr lang="en-US" sz="900" dirty="0"/>
+          </a:p>
+        </p:txBody>
+      </p:sp>
+      <p:sp>
+        <p:nvSpPr>
+          <p:cNvPr id="12" name="Text 9"/>
+          <p:cNvSpPr/>
+          <p:nvPr/>
+        </p:nvSpPr>
+        <p:spPr>
+          <a:xfrm>
+            <a:off x="713232" y="3520440"/>
+            <a:ext cx="2011680" cy="310896"/>
+          </a:xfrm>
+          <a:prstGeom prst="rect">
+            <a:avLst/>
+          </a:prstGeom>
+          <a:noFill/>
+          <a:ln/>
+        </p:spPr>
+        <p:txBody>
+          <a:bodyPr wrap="square" lIns="0" tIns="0" rIns="0" bIns="0" rtlCol="0" anchor="ctr">
+            <a:normAutofit/>
+          </a:bodyPr>
+          <a:lstStyle/>
+          <a:p>
+            <a:pPr indent="0" marL="0">
+              <a:buNone/>
+            </a:pPr>
+            <a:r>
+              <a:rPr lang="en-US" sz="1300" b="1" dirty="0">
+                <a:solidFill>
+                  <a:srgbClr val="1F2530"/>
+                </a:solidFill>
+                <a:latin typeface="Noto Sans KR" pitchFamily="34" charset="0"/>
+                <a:ea typeface="Noto Sans KR" pitchFamily="34" charset="-122"/>
+                <a:cs typeface="Noto Sans KR" pitchFamily="34" charset="-120"/>
+              </a:rPr>
+              <a:t>예상 순가치</a:t>
+            </a:r>
+            <a:endParaRPr lang="en-US" sz="1300" dirty="0"/>
+          </a:p>
+        </p:txBody>
+      </p:sp>
+      <p:sp>
+        <p:nvSpPr>
+          <p:cNvPr id="13" name="Text 10"/>
+          <p:cNvSpPr/>
+          <p:nvPr/>
+        </p:nvSpPr>
+        <p:spPr>
+          <a:xfrm>
+            <a:off x="2240280" y="3401568"/>
+            <a:ext cx="8686800" cy="749808"/>
+          </a:xfrm>
+          <a:prstGeom prst="rect">
+            <a:avLst/>
+          </a:prstGeom>
+          <a:noFill/>
+          <a:ln/>
+        </p:spPr>
+        <p:txBody>
+          <a:bodyPr wrap="square" lIns="0" tIns="0" rIns="0" bIns="0" rtlCol="0" anchor="ctr">
+            <a:normAutofit/>
+          </a:bodyPr>
+          <a:lstStyle/>
+          <a:p>
+            <a:pPr indent="0" marL="0">
+              <a:buNone/>
+            </a:pPr>
+            <a:r>
+              <a:rPr lang="en-US" sz="1600" b="1" dirty="0">
+                <a:solidFill>
+                  <a:srgbClr val="1F2530"/>
+                </a:solidFill>
+                <a:latin typeface="Noto Sans KR" pitchFamily="34" charset="0"/>
+                <a:ea typeface="Noto Sans KR" pitchFamily="34" charset="-122"/>
+                <a:cs typeface="Noto Sans KR" pitchFamily="34" charset="-120"/>
+              </a:rPr>
+              <a:t>= 예상 결제 완료 증가 × 대상 고객 수 × 평균 주문금액 × 관측기간</a:t>
+            </a:r>
+            <a:endParaRPr lang="en-US" sz="1600" dirty="0"/>
+          </a:p>
+          <a:p>
+            <a:pPr indent="0" marL="0">
+              <a:buNone/>
+            </a:pPr>
+            <a:r>
+              <a:rPr lang="en-US" sz="1600" b="1" dirty="0">
+                <a:solidFill>
+                  <a:srgbClr val="1F2530"/>
+                </a:solidFill>
+                <a:latin typeface="Noto Sans KR" pitchFamily="34" charset="0"/>
+                <a:ea typeface="Noto Sans KR" pitchFamily="34" charset="-122"/>
+                <a:cs typeface="Noto Sans KR" pitchFamily="34" charset="-120"/>
+              </a:rPr>
+              <a:t>  - 시험·개발·운영 비용($5K)</a:t>
+            </a:r>
+            <a:endParaRPr lang="en-US" sz="1600" dirty="0"/>
+          </a:p>
+        </p:txBody>
+      </p:sp>
+      <p:sp>
+        <p:nvSpPr>
+          <p:cNvPr id="14" name="Text 11"/>
+          <p:cNvSpPr/>
+          <p:nvPr/>
+        </p:nvSpPr>
+        <p:spPr>
+          <a:xfrm>
+            <a:off x="713232" y="4754880"/>
+            <a:ext cx="10287000" cy="365760"/>
+          </a:xfrm>
+          <a:prstGeom prst="rect">
+            <a:avLst/>
+          </a:prstGeom>
+          <a:noFill/>
+          <a:ln/>
+        </p:spPr>
+        <p:txBody>
+          <a:bodyPr wrap="square" lIns="0" tIns="0" rIns="0" bIns="0" rtlCol="0" anchor="ctr">
+            <a:normAutofit/>
+          </a:bodyPr>
+          <a:lstStyle/>
+          <a:p>
+            <a:pPr indent="0" marL="0">
+              <a:buNone/>
+            </a:pPr>
+            <a:r>
+              <a:rPr lang="en-US" sz="1200" b="1" dirty="0">
+                <a:solidFill>
+                  <a:srgbClr val="EE3D2C"/>
+                </a:solidFill>
+                <a:latin typeface="Noto Sans KR" pitchFamily="34" charset="0"/>
+                <a:ea typeface="Noto Sans KR" pitchFamily="34" charset="-122"/>
+                <a:cs typeface="Noto Sans KR" pitchFamily="34" charset="-120"/>
+              </a:rPr>
+              <a:t>주의: +2.25%p는 과거 시험의 실제 결과이고, +1.80%p는 이번 고객군에 대한 예상치입니다.</a:t>
+            </a:r>
+            <a:endParaRPr lang="en-US" sz="1200" dirty="0"/>
+          </a:p>
+        </p:txBody>
+      </p:sp>
+      <p:sp>
+        <p:nvSpPr>
           <p:cNvPr id="15" name="Text 12"/>
           <p:cNvSpPr/>
           <p:nvPr/>
         </p:nvSpPr>
         <p:spPr>
           <a:xfrm>
-            <a:off x="4672584" y="2761488"/>
-            <a:ext cx="2834640" cy="274320"/>
+            <a:off x="713232" y="5285232"/>
+            <a:ext cx="10287000" cy="365760"/>
           </a:xfrm>
           <a:prstGeom prst="rect">
             <a:avLst/>
@@ -3942,52 +4641,11 @@
           </a:bodyPr>
           <a:lstStyle/>
           <a:p>
-            <a:pPr algn="ctr" indent="0" marL="0">
-              <a:buNone/>
-            </a:pPr>
-            <a:r>
-              <a:rPr lang="en-US" sz="1200" b="1" dirty="0">
-                <a:solidFill>
-                  <a:srgbClr val="1F2530"/>
-                </a:solidFill>
-                <a:latin typeface="Noto Sans KR" pitchFamily="34" charset="0"/>
-                <a:ea typeface="Noto Sans KR" pitchFamily="34" charset="-122"/>
-                <a:cs typeface="Noto Sans KR" pitchFamily="34" charset="-120"/>
-              </a:rPr>
-              <a:t>담당자 승인</a:t>
-            </a:r>
-            <a:endParaRPr lang="en-US" sz="1200" dirty="0"/>
-          </a:p>
-        </p:txBody>
-      </p:sp>
-      <p:sp>
-        <p:nvSpPr>
-          <p:cNvPr id="16" name="Text 13"/>
-          <p:cNvSpPr/>
-          <p:nvPr/>
-        </p:nvSpPr>
-        <p:spPr>
-          <a:xfrm>
-            <a:off x="4672584" y="3072384"/>
-            <a:ext cx="2834640" cy="905256"/>
-          </a:xfrm>
-          <a:prstGeom prst="rect">
-            <a:avLst/>
-          </a:prstGeom>
-          <a:noFill/>
-          <a:ln/>
-        </p:spPr>
-        <p:txBody>
-          <a:bodyPr wrap="square" lIns="0" tIns="0" rIns="0" bIns="0" rtlCol="0" anchor="t">
-            <a:normAutofit/>
-          </a:bodyPr>
-          <a:lstStyle/>
-          <a:p>
-            <a:pPr algn="ctr" indent="0" marL="0">
-              <a:buNone/>
-            </a:pPr>
-            <a:r>
-              <a:rPr lang="en-US" sz="900" dirty="0">
+            <a:pPr indent="0" marL="0">
+              <a:buNone/>
+            </a:pPr>
+            <a:r>
+              <a:rPr lang="en-US" sz="1100" dirty="0">
                 <a:solidFill>
                   <a:srgbClr val="5B6573"/>
                 </a:solidFill>
@@ -3995,311 +4653,9 @@
                 <a:ea typeface="Noto Sans KR" pitchFamily="34" charset="-122"/>
                 <a:cs typeface="Noto Sans KR" pitchFamily="34" charset="-120"/>
               </a:rPr>
-              <a:t>로그인한 승인자 기록</a:t>
-            </a:r>
-            <a:endParaRPr lang="en-US" sz="900" dirty="0"/>
-          </a:p>
-          <a:p>
-            <a:pPr algn="ctr" indent="0" marL="0">
-              <a:buNone/>
-            </a:pPr>
-            <a:r>
-              <a:rPr lang="en-US" sz="900" dirty="0">
-                <a:solidFill>
-                  <a:srgbClr val="5B6573"/>
-                </a:solidFill>
-                <a:latin typeface="Noto Sans KR" pitchFamily="34" charset="0"/>
-                <a:ea typeface="Noto Sans KR" pitchFamily="34" charset="-122"/>
-                <a:cs typeface="Noto Sans KR" pitchFamily="34" charset="-120"/>
-              </a:rPr>
-              <a:t>(approved)</a:t>
-            </a:r>
-            <a:endParaRPr lang="en-US" sz="900" dirty="0"/>
-          </a:p>
-        </p:txBody>
-      </p:sp>
-      <p:sp>
-        <p:nvSpPr>
-          <p:cNvPr id="17" name="Shape 14"/>
-          <p:cNvSpPr/>
-          <p:nvPr/>
-        </p:nvSpPr>
-        <p:spPr>
-          <a:xfrm>
-            <a:off x="7744968" y="3355848"/>
-            <a:ext cx="438912" cy="0"/>
-          </a:xfrm>
-          <a:prstGeom prst="line">
-            <a:avLst/>
-          </a:prstGeom>
-          <a:noFill/>
-          <a:ln w="27940">
-            <a:solidFill>
-              <a:srgbClr val="DCE1E7"/>
-            </a:solidFill>
-            <a:prstDash val="solid"/>
-            <a:headEnd type="none"/>
-            <a:tailEnd type="triangle"/>
-          </a:ln>
-        </p:spPr>
-      </p:sp>
-      <p:sp>
-        <p:nvSpPr>
-          <p:cNvPr id="18" name="Shape 15"/>
-          <p:cNvSpPr/>
-          <p:nvPr/>
-        </p:nvSpPr>
-        <p:spPr>
-          <a:xfrm>
-            <a:off x="9601200" y="1828800"/>
-            <a:ext cx="566928" cy="566928"/>
-          </a:xfrm>
-          <a:prstGeom prst="ellipse">
-            <a:avLst/>
-          </a:prstGeom>
-          <a:solidFill>
-            <a:srgbClr val="EE3D2C"/>
-          </a:solidFill>
-          <a:ln w="12700">
-            <a:solidFill>
-              <a:srgbClr val="EE3D2C"/>
-            </a:solidFill>
-            <a:prstDash val="solid"/>
-          </a:ln>
-        </p:spPr>
-      </p:sp>
-      <p:sp>
-        <p:nvSpPr>
-          <p:cNvPr id="19" name="Text 16"/>
-          <p:cNvSpPr/>
-          <p:nvPr/>
-        </p:nvSpPr>
-        <p:spPr>
-          <a:xfrm>
-            <a:off x="9601200" y="1828800"/>
-            <a:ext cx="566928" cy="566928"/>
-          </a:xfrm>
-          <a:prstGeom prst="rect">
-            <a:avLst/>
-          </a:prstGeom>
-          <a:noFill/>
-          <a:ln/>
-        </p:spPr>
-        <p:txBody>
-          <a:bodyPr wrap="square" lIns="0" tIns="0" rIns="0" bIns="0" rtlCol="0" anchor="ctr">
-            <a:normAutofit/>
-          </a:bodyPr>
-          <a:lstStyle/>
-          <a:p>
-            <a:pPr algn="ctr" indent="0" marL="0">
-              <a:buNone/>
-            </a:pPr>
-            <a:r>
-              <a:rPr lang="en-US" sz="1600" b="1" dirty="0">
-                <a:solidFill>
-                  <a:srgbClr val="FFFFFF"/>
-                </a:solidFill>
-                <a:latin typeface="Noto Sans KR" pitchFamily="34" charset="0"/>
-                <a:ea typeface="Noto Sans KR" pitchFamily="34" charset="-122"/>
-                <a:cs typeface="Noto Sans KR" pitchFamily="34" charset="-120"/>
-              </a:rPr>
-              <a:t>3</a:t>
-            </a:r>
-            <a:endParaRPr lang="en-US" sz="1600" dirty="0"/>
-          </a:p>
-        </p:txBody>
-      </p:sp>
-      <p:sp>
-        <p:nvSpPr>
-          <p:cNvPr id="20" name="Shape 17"/>
-          <p:cNvSpPr/>
-          <p:nvPr/>
-        </p:nvSpPr>
-        <p:spPr>
-          <a:xfrm>
-            <a:off x="8321040" y="2651760"/>
-            <a:ext cx="3127248" cy="1417320"/>
-          </a:xfrm>
-          <a:prstGeom prst="roundRect">
-            <a:avLst>
-              <a:gd name="adj" fmla="val 5161"/>
-            </a:avLst>
-          </a:prstGeom>
-          <a:solidFill>
-            <a:srgbClr val="FFFFFF"/>
-          </a:solidFill>
-          <a:ln w="17780">
-            <a:solidFill>
-              <a:srgbClr val="EE3D2C"/>
-            </a:solidFill>
-            <a:prstDash val="solid"/>
-          </a:ln>
-        </p:spPr>
-      </p:sp>
-      <p:sp>
-        <p:nvSpPr>
-          <p:cNvPr id="21" name="Text 18"/>
-          <p:cNvSpPr/>
-          <p:nvPr/>
-        </p:nvSpPr>
-        <p:spPr>
-          <a:xfrm>
-            <a:off x="8467344" y="2761488"/>
-            <a:ext cx="2834640" cy="274320"/>
-          </a:xfrm>
-          <a:prstGeom prst="rect">
-            <a:avLst/>
-          </a:prstGeom>
-          <a:noFill/>
-          <a:ln/>
-        </p:spPr>
-        <p:txBody>
-          <a:bodyPr wrap="square" lIns="0" tIns="0" rIns="0" bIns="0" rtlCol="0" anchor="ctr">
-            <a:normAutofit/>
-          </a:bodyPr>
-          <a:lstStyle/>
-          <a:p>
-            <a:pPr algn="ctr" indent="0" marL="0">
-              <a:buNone/>
-            </a:pPr>
-            <a:r>
-              <a:rPr lang="en-US" sz="1200" b="1" dirty="0">
-                <a:solidFill>
-                  <a:srgbClr val="1F2530"/>
-                </a:solidFill>
-                <a:latin typeface="Noto Sans KR" pitchFamily="34" charset="0"/>
-                <a:ea typeface="Noto Sans KR" pitchFamily="34" charset="-122"/>
-                <a:cs typeface="Noto Sans KR" pitchFamily="34" charset="-120"/>
-              </a:rPr>
-              <a:t>최종 결정 기록</a:t>
-            </a:r>
-            <a:endParaRPr lang="en-US" sz="1200" dirty="0"/>
-          </a:p>
-        </p:txBody>
-      </p:sp>
-      <p:sp>
-        <p:nvSpPr>
-          <p:cNvPr id="22" name="Text 19"/>
-          <p:cNvSpPr/>
-          <p:nvPr/>
-        </p:nvSpPr>
-        <p:spPr>
-          <a:xfrm>
-            <a:off x="8467344" y="3072384"/>
-            <a:ext cx="2834640" cy="905256"/>
-          </a:xfrm>
-          <a:prstGeom prst="rect">
-            <a:avLst/>
-          </a:prstGeom>
-          <a:noFill/>
-          <a:ln/>
-        </p:spPr>
-        <p:txBody>
-          <a:bodyPr wrap="square" lIns="0" tIns="0" rIns="0" bIns="0" rtlCol="0" anchor="t">
-            <a:normAutofit/>
-          </a:bodyPr>
-          <a:lstStyle/>
-          <a:p>
-            <a:pPr algn="ctr" indent="0" marL="0">
-              <a:buNone/>
-            </a:pPr>
-            <a:r>
-              <a:rPr lang="en-US" sz="900" dirty="0">
-                <a:solidFill>
-                  <a:srgbClr val="5B6573"/>
-                </a:solidFill>
-                <a:latin typeface="Noto Sans KR" pitchFamily="34" charset="0"/>
-                <a:ea typeface="Noto Sans KR" pitchFamily="34" charset="-122"/>
-                <a:cs typeface="Noto Sans KR" pitchFamily="34" charset="-120"/>
-              </a:rPr>
-              <a:t>승인자와 시각 저장</a:t>
-            </a:r>
-            <a:endParaRPr lang="en-US" sz="900" dirty="0"/>
-          </a:p>
-          <a:p>
-            <a:pPr algn="ctr" indent="0" marL="0">
-              <a:buNone/>
-            </a:pPr>
-            <a:r>
-              <a:rPr lang="en-US" sz="900" dirty="0">
-                <a:solidFill>
-                  <a:srgbClr val="5B6573"/>
-                </a:solidFill>
-                <a:latin typeface="Noto Sans KR" pitchFamily="34" charset="0"/>
-                <a:ea typeface="Noto Sans KR" pitchFamily="34" charset="-122"/>
-                <a:cs typeface="Noto Sans KR" pitchFamily="34" charset="-120"/>
-              </a:rPr>
-              <a:t>(committed)</a:t>
-            </a:r>
-            <a:endParaRPr lang="en-US" sz="900" dirty="0"/>
-          </a:p>
-        </p:txBody>
-      </p:sp>
-      <p:sp>
-        <p:nvSpPr>
-          <p:cNvPr id="23" name="Shape 20"/>
-          <p:cNvSpPr/>
-          <p:nvPr/>
-        </p:nvSpPr>
-        <p:spPr>
-          <a:xfrm>
-            <a:off x="914400" y="4663440"/>
-            <a:ext cx="10287000" cy="777240"/>
-          </a:xfrm>
-          <a:prstGeom prst="roundRect">
-            <a:avLst>
-              <a:gd name="adj" fmla="val 9412"/>
-            </a:avLst>
-          </a:prstGeom>
-          <a:solidFill>
-            <a:srgbClr val="FCEDEA"/>
-          </a:solidFill>
-          <a:ln w="12700">
-            <a:solidFill>
-              <a:srgbClr val="F1BDB7"/>
-            </a:solidFill>
-            <a:prstDash val="solid"/>
-          </a:ln>
-        </p:spPr>
-      </p:sp>
-      <p:sp>
-        <p:nvSpPr>
-          <p:cNvPr id="24" name="Text 21"/>
-          <p:cNvSpPr/>
-          <p:nvPr/>
-        </p:nvSpPr>
-        <p:spPr>
-          <a:xfrm>
-            <a:off x="1188720" y="4663440"/>
-            <a:ext cx="9738360" cy="777240"/>
-          </a:xfrm>
-          <a:prstGeom prst="rect">
-            <a:avLst/>
-          </a:prstGeom>
-          <a:noFill/>
-          <a:ln/>
-        </p:spPr>
-        <p:txBody>
-          <a:bodyPr wrap="square" lIns="0" tIns="0" rIns="0" bIns="0" rtlCol="0" anchor="ctr">
-            <a:normAutofit/>
-          </a:bodyPr>
-          <a:lstStyle/>
-          <a:p>
-            <a:pPr algn="ctr" indent="0" marL="0">
-              <a:buNone/>
-            </a:pPr>
-            <a:r>
-              <a:rPr lang="en-US" sz="1400" b="1" dirty="0">
-                <a:solidFill>
-                  <a:srgbClr val="EE3D2C"/>
-                </a:solidFill>
-                <a:latin typeface="Noto Sans KR" pitchFamily="34" charset="0"/>
-                <a:ea typeface="Noto Sans KR" pitchFamily="34" charset="-122"/>
-                <a:cs typeface="Noto Sans KR" pitchFamily="34" charset="-120"/>
-              </a:rPr>
-              <a:t>담당자 승인을 건너뛴 최종 기록은 서버에서 거부 · 모든 과정은 같은 결정 번호에 보관</a:t>
-            </a:r>
-            <a:endParaRPr lang="en-US" sz="1400" dirty="0"/>
+              <a:t>대시보드의 $0.03/$0.05는 라이브 데모에서 검증한 AI 예산 임계값이며 연간 비용 상한이 아닙니다.</a:t>
+            </a:r>
+            <a:endParaRPr lang="en-US" sz="1100" dirty="0"/>
           </a:p>
         </p:txBody>
       </p:sp>
@@ -4411,7 +4767,7 @@
                 <a:ea typeface="Noto Sans KR" pitchFamily="34" charset="-122"/>
                 <a:cs typeface="Noto Sans KR" pitchFamily="34" charset="-120"/>
               </a:rPr>
-              <a:t>부록 C</a:t>
+              <a:t>부록 B</a:t>
             </a:r>
             <a:endParaRPr lang="en-US" sz="900" dirty="0"/>
           </a:p>
@@ -4475,7 +4831,7 @@
                 <a:ea typeface="Noto Sans KR" pitchFamily="34" charset="-122"/>
                 <a:cs typeface="Noto Sans KR" pitchFamily="34" charset="-120"/>
               </a:rPr>
-              <a:t>어떤 데이터를 읽고 무엇을 기록하는가</a:t>
+              <a:t>AI 초안과 사람의 승인을 분리합니다</a:t>
             </a:r>
             <a:endParaRPr lang="en-US" sz="2800" dirty="0"/>
           </a:p>
@@ -4516,6 +4872,919 @@
                 <a:ea typeface="Noto Sans KR" pitchFamily="34" charset="-122"/>
                 <a:cs typeface="Noto Sans KR" pitchFamily="34" charset="-120"/>
               </a:rPr>
+              <a:t>AI는 시험안을 작성할 뿐이며, 담당자 승인 없이는 최종 결정으로 기록할 수 없습니다.</a:t>
+            </a:r>
+            <a:endParaRPr lang="en-US" sz="1200" dirty="0"/>
+          </a:p>
+        </p:txBody>
+      </p:sp>
+      <p:sp>
+        <p:nvSpPr>
+          <p:cNvPr id="6" name="Shape 3"/>
+          <p:cNvSpPr/>
+          <p:nvPr/>
+        </p:nvSpPr>
+        <p:spPr>
+          <a:xfrm>
+            <a:off x="2011680" y="1828800"/>
+            <a:ext cx="566928" cy="566928"/>
+          </a:xfrm>
+          <a:prstGeom prst="ellipse">
+            <a:avLst/>
+          </a:prstGeom>
+          <a:solidFill>
+            <a:srgbClr val="FF8F5B"/>
+          </a:solidFill>
+          <a:ln w="12700">
+            <a:solidFill>
+              <a:srgbClr val="FF8F5B"/>
+            </a:solidFill>
+            <a:prstDash val="solid"/>
+          </a:ln>
+        </p:spPr>
+      </p:sp>
+      <p:sp>
+        <p:nvSpPr>
+          <p:cNvPr id="7" name="Text 4"/>
+          <p:cNvSpPr/>
+          <p:nvPr/>
+        </p:nvSpPr>
+        <p:spPr>
+          <a:xfrm>
+            <a:off x="2011680" y="1828800"/>
+            <a:ext cx="566928" cy="566928"/>
+          </a:xfrm>
+          <a:prstGeom prst="rect">
+            <a:avLst/>
+          </a:prstGeom>
+          <a:noFill/>
+          <a:ln/>
+        </p:spPr>
+        <p:txBody>
+          <a:bodyPr wrap="square" lIns="0" tIns="0" rIns="0" bIns="0" rtlCol="0" anchor="ctr">
+            <a:normAutofit/>
+          </a:bodyPr>
+          <a:lstStyle/>
+          <a:p>
+            <a:pPr algn="ctr" indent="0" marL="0">
+              <a:buNone/>
+            </a:pPr>
+            <a:r>
+              <a:rPr lang="en-US" sz="1600" b="1" dirty="0">
+                <a:solidFill>
+                  <a:srgbClr val="FFFFFF"/>
+                </a:solidFill>
+                <a:latin typeface="Noto Sans KR" pitchFamily="34" charset="0"/>
+                <a:ea typeface="Noto Sans KR" pitchFamily="34" charset="-122"/>
+                <a:cs typeface="Noto Sans KR" pitchFamily="34" charset="-120"/>
+              </a:rPr>
+              <a:t>1</a:t>
+            </a:r>
+            <a:endParaRPr lang="en-US" sz="1600" dirty="0"/>
+          </a:p>
+        </p:txBody>
+      </p:sp>
+      <p:sp>
+        <p:nvSpPr>
+          <p:cNvPr id="8" name="Shape 5"/>
+          <p:cNvSpPr/>
+          <p:nvPr/>
+        </p:nvSpPr>
+        <p:spPr>
+          <a:xfrm>
+            <a:off x="731520" y="2651760"/>
+            <a:ext cx="3127248" cy="1417320"/>
+          </a:xfrm>
+          <a:prstGeom prst="roundRect">
+            <a:avLst>
+              <a:gd name="adj" fmla="val 5161"/>
+            </a:avLst>
+          </a:prstGeom>
+          <a:solidFill>
+            <a:srgbClr val="FFFFFF"/>
+          </a:solidFill>
+          <a:ln w="17780">
+            <a:solidFill>
+              <a:srgbClr val="FF8F5B"/>
+            </a:solidFill>
+            <a:prstDash val="solid"/>
+          </a:ln>
+        </p:spPr>
+      </p:sp>
+      <p:sp>
+        <p:nvSpPr>
+          <p:cNvPr id="9" name="Text 6"/>
+          <p:cNvSpPr/>
+          <p:nvPr/>
+        </p:nvSpPr>
+        <p:spPr>
+          <a:xfrm>
+            <a:off x="877824" y="2761488"/>
+            <a:ext cx="2834640" cy="274320"/>
+          </a:xfrm>
+          <a:prstGeom prst="rect">
+            <a:avLst/>
+          </a:prstGeom>
+          <a:noFill/>
+          <a:ln/>
+        </p:spPr>
+        <p:txBody>
+          <a:bodyPr wrap="square" lIns="0" tIns="0" rIns="0" bIns="0" rtlCol="0" anchor="ctr">
+            <a:normAutofit/>
+          </a:bodyPr>
+          <a:lstStyle/>
+          <a:p>
+            <a:pPr algn="ctr" indent="0" marL="0">
+              <a:buNone/>
+            </a:pPr>
+            <a:r>
+              <a:rPr lang="en-US" sz="1200" b="1" dirty="0">
+                <a:solidFill>
+                  <a:srgbClr val="1F2530"/>
+                </a:solidFill>
+                <a:latin typeface="Noto Sans KR" pitchFamily="34" charset="0"/>
+                <a:ea typeface="Noto Sans KR" pitchFamily="34" charset="-122"/>
+                <a:cs typeface="Noto Sans KR" pitchFamily="34" charset="-120"/>
+              </a:rPr>
+              <a:t>시험안 작성</a:t>
+            </a:r>
+            <a:endParaRPr lang="en-US" sz="1200" dirty="0"/>
+          </a:p>
+        </p:txBody>
+      </p:sp>
+      <p:sp>
+        <p:nvSpPr>
+          <p:cNvPr id="10" name="Text 7"/>
+          <p:cNvSpPr/>
+          <p:nvPr/>
+        </p:nvSpPr>
+        <p:spPr>
+          <a:xfrm>
+            <a:off x="877824" y="3072384"/>
+            <a:ext cx="2834640" cy="905256"/>
+          </a:xfrm>
+          <a:prstGeom prst="rect">
+            <a:avLst/>
+          </a:prstGeom>
+          <a:noFill/>
+          <a:ln/>
+        </p:spPr>
+        <p:txBody>
+          <a:bodyPr wrap="square" lIns="0" tIns="0" rIns="0" bIns="0" rtlCol="0" anchor="t">
+            <a:normAutofit/>
+          </a:bodyPr>
+          <a:lstStyle/>
+          <a:p>
+            <a:pPr algn="ctr" indent="0" marL="0">
+              <a:buNone/>
+            </a:pPr>
+            <a:r>
+              <a:rPr lang="en-US" sz="900" dirty="0">
+                <a:solidFill>
+                  <a:srgbClr val="5B6573"/>
+                </a:solidFill>
+                <a:latin typeface="Noto Sans KR" pitchFamily="34" charset="0"/>
+                <a:ea typeface="Noto Sans KR" pitchFamily="34" charset="-122"/>
+                <a:cs typeface="Noto Sans KR" pitchFamily="34" charset="-120"/>
+              </a:rPr>
+              <a:t>AI 초안 + 사용한 근거</a:t>
+            </a:r>
+            <a:endParaRPr lang="en-US" sz="900" dirty="0"/>
+          </a:p>
+          <a:p>
+            <a:pPr algn="ctr" indent="0" marL="0">
+              <a:buNone/>
+            </a:pPr>
+            <a:r>
+              <a:rPr lang="en-US" sz="900" dirty="0">
+                <a:solidFill>
+                  <a:srgbClr val="5B6573"/>
+                </a:solidFill>
+                <a:latin typeface="Noto Sans KR" pitchFamily="34" charset="0"/>
+                <a:ea typeface="Noto Sans KR" pitchFamily="34" charset="-122"/>
+                <a:cs typeface="Noto Sans KR" pitchFamily="34" charset="-120"/>
+              </a:rPr>
+              <a:t>(proposed)</a:t>
+            </a:r>
+            <a:endParaRPr lang="en-US" sz="900" dirty="0"/>
+          </a:p>
+        </p:txBody>
+      </p:sp>
+      <p:sp>
+        <p:nvSpPr>
+          <p:cNvPr id="11" name="Shape 8"/>
+          <p:cNvSpPr/>
+          <p:nvPr/>
+        </p:nvSpPr>
+        <p:spPr>
+          <a:xfrm>
+            <a:off x="3950208" y="3355848"/>
+            <a:ext cx="438912" cy="0"/>
+          </a:xfrm>
+          <a:prstGeom prst="line">
+            <a:avLst/>
+          </a:prstGeom>
+          <a:noFill/>
+          <a:ln w="27940">
+            <a:solidFill>
+              <a:srgbClr val="DCE1E7"/>
+            </a:solidFill>
+            <a:prstDash val="solid"/>
+            <a:headEnd type="none"/>
+            <a:tailEnd type="triangle"/>
+          </a:ln>
+        </p:spPr>
+      </p:sp>
+      <p:sp>
+        <p:nvSpPr>
+          <p:cNvPr id="12" name="Shape 9"/>
+          <p:cNvSpPr/>
+          <p:nvPr/>
+        </p:nvSpPr>
+        <p:spPr>
+          <a:xfrm>
+            <a:off x="5806440" y="1828800"/>
+            <a:ext cx="566928" cy="566928"/>
+          </a:xfrm>
+          <a:prstGeom prst="ellipse">
+            <a:avLst/>
+          </a:prstGeom>
+          <a:solidFill>
+            <a:srgbClr val="2F9E6F"/>
+          </a:solidFill>
+          <a:ln w="12700">
+            <a:solidFill>
+              <a:srgbClr val="2F9E6F"/>
+            </a:solidFill>
+            <a:prstDash val="solid"/>
+          </a:ln>
+        </p:spPr>
+      </p:sp>
+      <p:sp>
+        <p:nvSpPr>
+          <p:cNvPr id="13" name="Text 10"/>
+          <p:cNvSpPr/>
+          <p:nvPr/>
+        </p:nvSpPr>
+        <p:spPr>
+          <a:xfrm>
+            <a:off x="5806440" y="1828800"/>
+            <a:ext cx="566928" cy="566928"/>
+          </a:xfrm>
+          <a:prstGeom prst="rect">
+            <a:avLst/>
+          </a:prstGeom>
+          <a:noFill/>
+          <a:ln/>
+        </p:spPr>
+        <p:txBody>
+          <a:bodyPr wrap="square" lIns="0" tIns="0" rIns="0" bIns="0" rtlCol="0" anchor="ctr">
+            <a:normAutofit/>
+          </a:bodyPr>
+          <a:lstStyle/>
+          <a:p>
+            <a:pPr algn="ctr" indent="0" marL="0">
+              <a:buNone/>
+            </a:pPr>
+            <a:r>
+              <a:rPr lang="en-US" sz="1600" b="1" dirty="0">
+                <a:solidFill>
+                  <a:srgbClr val="FFFFFF"/>
+                </a:solidFill>
+                <a:latin typeface="Noto Sans KR" pitchFamily="34" charset="0"/>
+                <a:ea typeface="Noto Sans KR" pitchFamily="34" charset="-122"/>
+                <a:cs typeface="Noto Sans KR" pitchFamily="34" charset="-120"/>
+              </a:rPr>
+              <a:t>2</a:t>
+            </a:r>
+            <a:endParaRPr lang="en-US" sz="1600" dirty="0"/>
+          </a:p>
+        </p:txBody>
+      </p:sp>
+      <p:sp>
+        <p:nvSpPr>
+          <p:cNvPr id="14" name="Shape 11"/>
+          <p:cNvSpPr/>
+          <p:nvPr/>
+        </p:nvSpPr>
+        <p:spPr>
+          <a:xfrm>
+            <a:off x="4526280" y="2651760"/>
+            <a:ext cx="3127248" cy="1417320"/>
+          </a:xfrm>
+          <a:prstGeom prst="roundRect">
+            <a:avLst>
+              <a:gd name="adj" fmla="val 5161"/>
+            </a:avLst>
+          </a:prstGeom>
+          <a:solidFill>
+            <a:srgbClr val="FFFFFF"/>
+          </a:solidFill>
+          <a:ln w="17780">
+            <a:solidFill>
+              <a:srgbClr val="2F9E6F"/>
+            </a:solidFill>
+            <a:prstDash val="solid"/>
+          </a:ln>
+        </p:spPr>
+      </p:sp>
+      <p:sp>
+        <p:nvSpPr>
+          <p:cNvPr id="15" name="Text 12"/>
+          <p:cNvSpPr/>
+          <p:nvPr/>
+        </p:nvSpPr>
+        <p:spPr>
+          <a:xfrm>
+            <a:off x="4672584" y="2761488"/>
+            <a:ext cx="2834640" cy="274320"/>
+          </a:xfrm>
+          <a:prstGeom prst="rect">
+            <a:avLst/>
+          </a:prstGeom>
+          <a:noFill/>
+          <a:ln/>
+        </p:spPr>
+        <p:txBody>
+          <a:bodyPr wrap="square" lIns="0" tIns="0" rIns="0" bIns="0" rtlCol="0" anchor="ctr">
+            <a:normAutofit/>
+          </a:bodyPr>
+          <a:lstStyle/>
+          <a:p>
+            <a:pPr algn="ctr" indent="0" marL="0">
+              <a:buNone/>
+            </a:pPr>
+            <a:r>
+              <a:rPr lang="en-US" sz="1200" b="1" dirty="0">
+                <a:solidFill>
+                  <a:srgbClr val="1F2530"/>
+                </a:solidFill>
+                <a:latin typeface="Noto Sans KR" pitchFamily="34" charset="0"/>
+                <a:ea typeface="Noto Sans KR" pitchFamily="34" charset="-122"/>
+                <a:cs typeface="Noto Sans KR" pitchFamily="34" charset="-120"/>
+              </a:rPr>
+              <a:t>담당자 승인</a:t>
+            </a:r>
+            <a:endParaRPr lang="en-US" sz="1200" dirty="0"/>
+          </a:p>
+        </p:txBody>
+      </p:sp>
+      <p:sp>
+        <p:nvSpPr>
+          <p:cNvPr id="16" name="Text 13"/>
+          <p:cNvSpPr/>
+          <p:nvPr/>
+        </p:nvSpPr>
+        <p:spPr>
+          <a:xfrm>
+            <a:off x="4672584" y="3072384"/>
+            <a:ext cx="2834640" cy="905256"/>
+          </a:xfrm>
+          <a:prstGeom prst="rect">
+            <a:avLst/>
+          </a:prstGeom>
+          <a:noFill/>
+          <a:ln/>
+        </p:spPr>
+        <p:txBody>
+          <a:bodyPr wrap="square" lIns="0" tIns="0" rIns="0" bIns="0" rtlCol="0" anchor="t">
+            <a:normAutofit/>
+          </a:bodyPr>
+          <a:lstStyle/>
+          <a:p>
+            <a:pPr algn="ctr" indent="0" marL="0">
+              <a:buNone/>
+            </a:pPr>
+            <a:r>
+              <a:rPr lang="en-US" sz="900" dirty="0">
+                <a:solidFill>
+                  <a:srgbClr val="5B6573"/>
+                </a:solidFill>
+                <a:latin typeface="Noto Sans KR" pitchFamily="34" charset="0"/>
+                <a:ea typeface="Noto Sans KR" pitchFamily="34" charset="-122"/>
+                <a:cs typeface="Noto Sans KR" pitchFamily="34" charset="-120"/>
+              </a:rPr>
+              <a:t>로그인한 승인자 기록</a:t>
+            </a:r>
+            <a:endParaRPr lang="en-US" sz="900" dirty="0"/>
+          </a:p>
+          <a:p>
+            <a:pPr algn="ctr" indent="0" marL="0">
+              <a:buNone/>
+            </a:pPr>
+            <a:r>
+              <a:rPr lang="en-US" sz="900" dirty="0">
+                <a:solidFill>
+                  <a:srgbClr val="5B6573"/>
+                </a:solidFill>
+                <a:latin typeface="Noto Sans KR" pitchFamily="34" charset="0"/>
+                <a:ea typeface="Noto Sans KR" pitchFamily="34" charset="-122"/>
+                <a:cs typeface="Noto Sans KR" pitchFamily="34" charset="-120"/>
+              </a:rPr>
+              <a:t>(approved)</a:t>
+            </a:r>
+            <a:endParaRPr lang="en-US" sz="900" dirty="0"/>
+          </a:p>
+        </p:txBody>
+      </p:sp>
+      <p:sp>
+        <p:nvSpPr>
+          <p:cNvPr id="17" name="Shape 14"/>
+          <p:cNvSpPr/>
+          <p:nvPr/>
+        </p:nvSpPr>
+        <p:spPr>
+          <a:xfrm>
+            <a:off x="7744968" y="3355848"/>
+            <a:ext cx="438912" cy="0"/>
+          </a:xfrm>
+          <a:prstGeom prst="line">
+            <a:avLst/>
+          </a:prstGeom>
+          <a:noFill/>
+          <a:ln w="27940">
+            <a:solidFill>
+              <a:srgbClr val="DCE1E7"/>
+            </a:solidFill>
+            <a:prstDash val="solid"/>
+            <a:headEnd type="none"/>
+            <a:tailEnd type="triangle"/>
+          </a:ln>
+        </p:spPr>
+      </p:sp>
+      <p:sp>
+        <p:nvSpPr>
+          <p:cNvPr id="18" name="Shape 15"/>
+          <p:cNvSpPr/>
+          <p:nvPr/>
+        </p:nvSpPr>
+        <p:spPr>
+          <a:xfrm>
+            <a:off x="9601200" y="1828800"/>
+            <a:ext cx="566928" cy="566928"/>
+          </a:xfrm>
+          <a:prstGeom prst="ellipse">
+            <a:avLst/>
+          </a:prstGeom>
+          <a:solidFill>
+            <a:srgbClr val="EE3D2C"/>
+          </a:solidFill>
+          <a:ln w="12700">
+            <a:solidFill>
+              <a:srgbClr val="EE3D2C"/>
+            </a:solidFill>
+            <a:prstDash val="solid"/>
+          </a:ln>
+        </p:spPr>
+      </p:sp>
+      <p:sp>
+        <p:nvSpPr>
+          <p:cNvPr id="19" name="Text 16"/>
+          <p:cNvSpPr/>
+          <p:nvPr/>
+        </p:nvSpPr>
+        <p:spPr>
+          <a:xfrm>
+            <a:off x="9601200" y="1828800"/>
+            <a:ext cx="566928" cy="566928"/>
+          </a:xfrm>
+          <a:prstGeom prst="rect">
+            <a:avLst/>
+          </a:prstGeom>
+          <a:noFill/>
+          <a:ln/>
+        </p:spPr>
+        <p:txBody>
+          <a:bodyPr wrap="square" lIns="0" tIns="0" rIns="0" bIns="0" rtlCol="0" anchor="ctr">
+            <a:normAutofit/>
+          </a:bodyPr>
+          <a:lstStyle/>
+          <a:p>
+            <a:pPr algn="ctr" indent="0" marL="0">
+              <a:buNone/>
+            </a:pPr>
+            <a:r>
+              <a:rPr lang="en-US" sz="1600" b="1" dirty="0">
+                <a:solidFill>
+                  <a:srgbClr val="FFFFFF"/>
+                </a:solidFill>
+                <a:latin typeface="Noto Sans KR" pitchFamily="34" charset="0"/>
+                <a:ea typeface="Noto Sans KR" pitchFamily="34" charset="-122"/>
+                <a:cs typeface="Noto Sans KR" pitchFamily="34" charset="-120"/>
+              </a:rPr>
+              <a:t>3</a:t>
+            </a:r>
+            <a:endParaRPr lang="en-US" sz="1600" dirty="0"/>
+          </a:p>
+        </p:txBody>
+      </p:sp>
+      <p:sp>
+        <p:nvSpPr>
+          <p:cNvPr id="20" name="Shape 17"/>
+          <p:cNvSpPr/>
+          <p:nvPr/>
+        </p:nvSpPr>
+        <p:spPr>
+          <a:xfrm>
+            <a:off x="8321040" y="2651760"/>
+            <a:ext cx="3127248" cy="1417320"/>
+          </a:xfrm>
+          <a:prstGeom prst="roundRect">
+            <a:avLst>
+              <a:gd name="adj" fmla="val 5161"/>
+            </a:avLst>
+          </a:prstGeom>
+          <a:solidFill>
+            <a:srgbClr val="FFFFFF"/>
+          </a:solidFill>
+          <a:ln w="17780">
+            <a:solidFill>
+              <a:srgbClr val="EE3D2C"/>
+            </a:solidFill>
+            <a:prstDash val="solid"/>
+          </a:ln>
+        </p:spPr>
+      </p:sp>
+      <p:sp>
+        <p:nvSpPr>
+          <p:cNvPr id="21" name="Text 18"/>
+          <p:cNvSpPr/>
+          <p:nvPr/>
+        </p:nvSpPr>
+        <p:spPr>
+          <a:xfrm>
+            <a:off x="8467344" y="2761488"/>
+            <a:ext cx="2834640" cy="274320"/>
+          </a:xfrm>
+          <a:prstGeom prst="rect">
+            <a:avLst/>
+          </a:prstGeom>
+          <a:noFill/>
+          <a:ln/>
+        </p:spPr>
+        <p:txBody>
+          <a:bodyPr wrap="square" lIns="0" tIns="0" rIns="0" bIns="0" rtlCol="0" anchor="ctr">
+            <a:normAutofit/>
+          </a:bodyPr>
+          <a:lstStyle/>
+          <a:p>
+            <a:pPr algn="ctr" indent="0" marL="0">
+              <a:buNone/>
+            </a:pPr>
+            <a:r>
+              <a:rPr lang="en-US" sz="1200" b="1" dirty="0">
+                <a:solidFill>
+                  <a:srgbClr val="1F2530"/>
+                </a:solidFill>
+                <a:latin typeface="Noto Sans KR" pitchFamily="34" charset="0"/>
+                <a:ea typeface="Noto Sans KR" pitchFamily="34" charset="-122"/>
+                <a:cs typeface="Noto Sans KR" pitchFamily="34" charset="-120"/>
+              </a:rPr>
+              <a:t>최종 결정 기록</a:t>
+            </a:r>
+            <a:endParaRPr lang="en-US" sz="1200" dirty="0"/>
+          </a:p>
+        </p:txBody>
+      </p:sp>
+      <p:sp>
+        <p:nvSpPr>
+          <p:cNvPr id="22" name="Text 19"/>
+          <p:cNvSpPr/>
+          <p:nvPr/>
+        </p:nvSpPr>
+        <p:spPr>
+          <a:xfrm>
+            <a:off x="8467344" y="3072384"/>
+            <a:ext cx="2834640" cy="905256"/>
+          </a:xfrm>
+          <a:prstGeom prst="rect">
+            <a:avLst/>
+          </a:prstGeom>
+          <a:noFill/>
+          <a:ln/>
+        </p:spPr>
+        <p:txBody>
+          <a:bodyPr wrap="square" lIns="0" tIns="0" rIns="0" bIns="0" rtlCol="0" anchor="t">
+            <a:normAutofit/>
+          </a:bodyPr>
+          <a:lstStyle/>
+          <a:p>
+            <a:pPr algn="ctr" indent="0" marL="0">
+              <a:buNone/>
+            </a:pPr>
+            <a:r>
+              <a:rPr lang="en-US" sz="900" dirty="0">
+                <a:solidFill>
+                  <a:srgbClr val="5B6573"/>
+                </a:solidFill>
+                <a:latin typeface="Noto Sans KR" pitchFamily="34" charset="0"/>
+                <a:ea typeface="Noto Sans KR" pitchFamily="34" charset="-122"/>
+                <a:cs typeface="Noto Sans KR" pitchFamily="34" charset="-120"/>
+              </a:rPr>
+              <a:t>승인자와 시각 저장</a:t>
+            </a:r>
+            <a:endParaRPr lang="en-US" sz="900" dirty="0"/>
+          </a:p>
+          <a:p>
+            <a:pPr algn="ctr" indent="0" marL="0">
+              <a:buNone/>
+            </a:pPr>
+            <a:r>
+              <a:rPr lang="en-US" sz="900" dirty="0">
+                <a:solidFill>
+                  <a:srgbClr val="5B6573"/>
+                </a:solidFill>
+                <a:latin typeface="Noto Sans KR" pitchFamily="34" charset="0"/>
+                <a:ea typeface="Noto Sans KR" pitchFamily="34" charset="-122"/>
+                <a:cs typeface="Noto Sans KR" pitchFamily="34" charset="-120"/>
+              </a:rPr>
+              <a:t>(committed)</a:t>
+            </a:r>
+            <a:endParaRPr lang="en-US" sz="900" dirty="0"/>
+          </a:p>
+        </p:txBody>
+      </p:sp>
+      <p:sp>
+        <p:nvSpPr>
+          <p:cNvPr id="23" name="Shape 20"/>
+          <p:cNvSpPr/>
+          <p:nvPr/>
+        </p:nvSpPr>
+        <p:spPr>
+          <a:xfrm>
+            <a:off x="914400" y="4663440"/>
+            <a:ext cx="10287000" cy="777240"/>
+          </a:xfrm>
+          <a:prstGeom prst="roundRect">
+            <a:avLst>
+              <a:gd name="adj" fmla="val 9412"/>
+            </a:avLst>
+          </a:prstGeom>
+          <a:solidFill>
+            <a:srgbClr val="FCEDEA"/>
+          </a:solidFill>
+          <a:ln w="12700">
+            <a:solidFill>
+              <a:srgbClr val="F1BDB7"/>
+            </a:solidFill>
+            <a:prstDash val="solid"/>
+          </a:ln>
+        </p:spPr>
+      </p:sp>
+      <p:sp>
+        <p:nvSpPr>
+          <p:cNvPr id="24" name="Text 21"/>
+          <p:cNvSpPr/>
+          <p:nvPr/>
+        </p:nvSpPr>
+        <p:spPr>
+          <a:xfrm>
+            <a:off x="1188720" y="4663440"/>
+            <a:ext cx="9738360" cy="777240"/>
+          </a:xfrm>
+          <a:prstGeom prst="rect">
+            <a:avLst/>
+          </a:prstGeom>
+          <a:noFill/>
+          <a:ln/>
+        </p:spPr>
+        <p:txBody>
+          <a:bodyPr wrap="square" lIns="0" tIns="0" rIns="0" bIns="0" rtlCol="0" anchor="ctr">
+            <a:normAutofit/>
+          </a:bodyPr>
+          <a:lstStyle/>
+          <a:p>
+            <a:pPr algn="ctr" indent="0" marL="0">
+              <a:buNone/>
+            </a:pPr>
+            <a:r>
+              <a:rPr lang="en-US" sz="1400" b="1" dirty="0">
+                <a:solidFill>
+                  <a:srgbClr val="EE3D2C"/>
+                </a:solidFill>
+                <a:latin typeface="Noto Sans KR" pitchFamily="34" charset="0"/>
+                <a:ea typeface="Noto Sans KR" pitchFamily="34" charset="-122"/>
+                <a:cs typeface="Noto Sans KR" pitchFamily="34" charset="-120"/>
+              </a:rPr>
+              <a:t>담당자 승인을 건너뛴 최종 기록은 서버에서 거부 · 모든 과정은 같은 결정 번호에 보관</a:t>
+            </a:r>
+            <a:endParaRPr lang="en-US" sz="1400" dirty="0"/>
+          </a:p>
+        </p:txBody>
+      </p:sp>
+      <p:sp>
+        <p:nvSpPr>
+          <p:cNvPr id="25" name="Slide Number Placeholder 0"/>
+          <p:cNvSpPr>
+            <a:spLocks noGrp="1"/>
+          </p:cNvSpPr>
+          <p:nvPr>
+            <p:ph type="sldNum" sz="quarter" idx="4294967295"/>
+          </p:nvPr>
+        </p:nvSpPr>
+        <p:spPr>
+          <a:xfrm>
+            <a:off x="11750040" y="6565392"/>
+            <a:ext cx="164592" cy="164592"/>
+          </a:xfrm>
+          <a:prstGeom prst="rect">
+            <a:avLst/>
+          </a:prstGeom>
+          <a:extLst>
+            <a:ext uri="{C572A759-6A51-4108-AA02-DFA0A04FC94B}">
+              <ma14:wrappingTextBoxFlag xmlns:ma14="http://schemas.microsoft.com/office/mac/drawingml/2011/main" val="0"/>
+            </a:ext>
+          </a:extLst>
+        </p:spPr>
+        <p:txBody>
+          <a:bodyPr lIns="0" tIns="0" rIns="0" bIns="0"/>
+          <a:lstStyle>
+            <a:lvl1pPr>
+              <a:defRPr sz="750">
+                <a:solidFill>
+                  <a:srgbClr val="5B6573"/>
+                </a:solidFill>
+                <a:latin typeface="Noto Sans KR"/>
+                <a:ea typeface="Noto Sans KR"/>
+                <a:cs typeface="Noto Sans KR"/>
+              </a:defRPr>
+            </a:lvl1pPr>
+          </a:lstStyle>
+          <a:p>
+            <a:pPr algn="l"/>
+            <a:fld id="{F7021451-1387-4CA6-816F-3879F97B5CBC}" type="slidenum">
+              <a:rPr b="0" lang="en-US"/>
+              <a:t>12</a:t>
+            </a:fld>
+            <a:endParaRPr lang="en-US"/>
+          </a:p>
+        </p:txBody>
+      </p:sp>
+    </p:spTree>
+  </p:cSld>
+  <p:clrMapOvr>
+    <a:masterClrMapping/>
+  </p:clrMapOvr>
+</p:sld>
+</file>
+
+<file path=ppt/slides/slide13.xml><?xml version="1.0" encoding="utf-8"?>
+<p:sld xmlns:a="http://schemas.openxmlformats.org/drawingml/2006/main" xmlns:r="http://schemas.openxmlformats.org/officeDocument/2006/relationships" xmlns:p="http://schemas.openxmlformats.org/presentationml/2006/main">
+  <p:cSld name="Slide 13">
+    <p:spTree>
+      <p:nvGrpSpPr>
+        <p:cNvPr id="1" name=""/>
+        <p:cNvGrpSpPr/>
+        <p:nvPr/>
+      </p:nvGrpSpPr>
+      <p:grpSpPr>
+        <a:xfrm>
+          <a:off x="0" y="0"/>
+          <a:ext cx="0" cy="0"/>
+          <a:chOff x="0" y="0"/>
+          <a:chExt cx="0" cy="0"/>
+        </a:xfrm>
+      </p:grpSpPr>
+      <p:sp>
+        <p:nvSpPr>
+          <p:cNvPr id="2" name="Text 0"/>
+          <p:cNvSpPr/>
+          <p:nvPr/>
+        </p:nvSpPr>
+        <p:spPr>
+          <a:xfrm>
+            <a:off x="566928" y="347472"/>
+            <a:ext cx="4114800" cy="274320"/>
+          </a:xfrm>
+          <a:prstGeom prst="rect">
+            <a:avLst/>
+          </a:prstGeom>
+          <a:noFill/>
+          <a:ln/>
+        </p:spPr>
+        <p:txBody>
+          <a:bodyPr wrap="square" lIns="0" tIns="0" rIns="0" bIns="0" rtlCol="0" anchor="ctr">
+            <a:normAutofit/>
+          </a:bodyPr>
+          <a:lstStyle/>
+          <a:p>
+            <a:pPr indent="0" marL="0">
+              <a:buNone/>
+            </a:pPr>
+            <a:r>
+              <a:rPr lang="en-US" sz="900" b="1" spc="180" kern="0" dirty="0">
+                <a:solidFill>
+                  <a:srgbClr val="EE3D2C"/>
+                </a:solidFill>
+                <a:latin typeface="Noto Sans KR" pitchFamily="34" charset="0"/>
+                <a:ea typeface="Noto Sans KR" pitchFamily="34" charset="-122"/>
+                <a:cs typeface="Noto Sans KR" pitchFamily="34" charset="-120"/>
+              </a:rPr>
+              <a:t>부록 C</a:t>
+            </a:r>
+            <a:endParaRPr lang="en-US" sz="900" dirty="0"/>
+          </a:p>
+        </p:txBody>
+      </p:sp>
+      <p:pic>
+        <p:nvPicPr>
+          <p:cNvPr id="3" name="Image 0" descr="Nimbus customer logo">    </p:cNvPr>
+          <p:cNvPicPr>
+            <a:picLocks noChangeAspect="1"/>
+          </p:cNvPicPr>
+          <p:nvPr/>
+        </p:nvPicPr>
+        <p:blipFill>
+          <a:blip r:embed="rId1"/>
+          <a:srcRect l="0" r="0" t="0" b="0"/>
+          <a:stretch/>
+        </p:blipFill>
+        <p:spPr>
+          <a:xfrm>
+            <a:off x="9985248" y="374904"/>
+            <a:ext cx="1426464" cy="804672"/>
+          </a:xfrm>
+          <a:prstGeom prst="rect">
+            <a:avLst/>
+          </a:prstGeom>
+        </p:spPr>
+      </p:pic>
+      <p:sp>
+        <p:nvSpPr>
+          <p:cNvPr id="4" name="Text 1"/>
+          <p:cNvSpPr/>
+          <p:nvPr/>
+        </p:nvSpPr>
+        <p:spPr>
+          <a:xfrm>
+            <a:off x="566928" y="658368"/>
+            <a:ext cx="9326880" cy="658368"/>
+          </a:xfrm>
+          <a:prstGeom prst="rect">
+            <a:avLst/>
+          </a:prstGeom>
+          <a:noFill/>
+          <a:ln/>
+        </p:spPr>
+        <p:txBody>
+          <a:bodyPr wrap="square" lIns="0" tIns="0" rIns="0" bIns="0" rtlCol="0" anchor="t">
+            <a:normAutofit/>
+          </a:bodyPr>
+          <a:lstStyle/>
+          <a:p>
+            <a:pPr indent="0" marL="0">
+              <a:buNone/>
+            </a:pPr>
+            <a:r>
+              <a:rPr lang="en-US" sz="2800" b="1" dirty="0">
+                <a:solidFill>
+                  <a:srgbClr val="1F2530"/>
+                </a:solidFill>
+                <a:latin typeface="Noto Sans KR" pitchFamily="34" charset="0"/>
+                <a:ea typeface="Noto Sans KR" pitchFamily="34" charset="-122"/>
+                <a:cs typeface="Noto Sans KR" pitchFamily="34" charset="-120"/>
+              </a:rPr>
+              <a:t>어떤 데이터를 읽고 무엇을 기록하는가</a:t>
+            </a:r>
+            <a:endParaRPr lang="en-US" sz="2800" dirty="0"/>
+          </a:p>
+        </p:txBody>
+      </p:sp>
+      <p:sp>
+        <p:nvSpPr>
+          <p:cNvPr id="5" name="Text 2"/>
+          <p:cNvSpPr/>
+          <p:nvPr/>
+        </p:nvSpPr>
+        <p:spPr>
+          <a:xfrm>
+            <a:off x="585216" y="1353312"/>
+            <a:ext cx="10698480" cy="384048"/>
+          </a:xfrm>
+          <a:prstGeom prst="rect">
+            <a:avLst/>
+          </a:prstGeom>
+          <a:noFill/>
+          <a:ln/>
+        </p:spPr>
+        <p:txBody>
+          <a:bodyPr wrap="square" lIns="0" tIns="0" rIns="0" bIns="0" rtlCol="0" anchor="t">
+            <a:normAutofit/>
+          </a:bodyPr>
+          <a:lstStyle/>
+          <a:p>
+            <a:pPr indent="0" marL="0">
+              <a:buNone/>
+            </a:pPr>
+            <a:r>
+              <a:rPr lang="en-US" sz="1200" dirty="0">
+                <a:solidFill>
+                  <a:srgbClr val="5B6573"/>
+                </a:solidFill>
+                <a:latin typeface="Noto Sans KR" pitchFamily="34" charset="0"/>
+                <a:ea typeface="Noto Sans KR" pitchFamily="34" charset="-122"/>
+                <a:cs typeface="Noto Sans KR" pitchFamily="34" charset="-120"/>
+              </a:rPr>
               <a:t>고객과 과거 시험 데이터는 읽기만 하고, 앱은 승인된 결정만 별도 공간에 기록합니다.</a:t>
             </a:r>
             <a:endParaRPr lang="en-US" sz="1200" dirty="0"/>
@@ -4524,7 +5793,7 @@
       </p:sp>
       <p:graphicFrame>
         <p:nvGraphicFramePr>
-          <p:cNvPr id="13" name="Table 0"/>
+          <p:cNvPr id="14" name="Table 0"/>
           <p:cNvGraphicFramePr>
             <a:graphicFrameLocks noGrp="1"/>
           </p:cNvGraphicFramePr>
@@ -6007,7 +7276,7 @@
             <a:pPr algn="l"/>
             <a:fld id="{F7021451-1387-4CA6-816F-3879F97B5CBC}" type="slidenum">
               <a:rPr b="0" lang="en-US"/>
-              <a:t>12</a:t>
+              <a:t>13</a:t>
             </a:fld>
             <a:endParaRPr lang="en-US"/>
           </a:p>
@@ -6021,9 +7290,9 @@
 </p:sld>
 </file>
 
-<file path=ppt/slides/slide13.xml><?xml version="1.0" encoding="utf-8"?>
+<file path=ppt/slides/slide14.xml><?xml version="1.0" encoding="utf-8"?>
 <p:sld xmlns:a="http://schemas.openxmlformats.org/drawingml/2006/main" xmlns:r="http://schemas.openxmlformats.org/officeDocument/2006/relationships" xmlns:p="http://schemas.openxmlformats.org/presentationml/2006/main">
-  <p:cSld name="Slide 13">
+  <p:cSld name="Slide 14">
     <p:spTree>
       <p:nvGrpSpPr>
         <p:cNvPr id="1" name=""/>
@@ -6186,7 +7455,7 @@
       </p:sp>
       <p:graphicFrame>
         <p:nvGraphicFramePr>
-          <p:cNvPr id="14" name="Table 0"/>
+          <p:cNvPr id="15" name="Table 0"/>
           <p:cNvGraphicFramePr>
             <a:graphicFrameLocks noGrp="1"/>
           </p:cNvGraphicFramePr>
@@ -7534,7 +8803,7 @@
             <a:pPr algn="l"/>
             <a:fld id="{F7021451-1387-4CA6-816F-3879F97B5CBC}" type="slidenum">
               <a:rPr b="0" lang="en-US"/>
-              <a:t>13</a:t>
+              <a:t>14</a:t>
             </a:fld>
             <a:endParaRPr lang="en-US"/>
           </a:p>
@@ -7548,9 +8817,9 @@
 </p:sld>
 </file>
 
-<file path=ppt/slides/slide14.xml><?xml version="1.0" encoding="utf-8"?>
+<file path=ppt/slides/slide15.xml><?xml version="1.0" encoding="utf-8"?>
 <p:sld xmlns:a="http://schemas.openxmlformats.org/drawingml/2006/main" xmlns:r="http://schemas.openxmlformats.org/officeDocument/2006/relationships" xmlns:p="http://schemas.openxmlformats.org/presentationml/2006/main">
-  <p:cSld name="Slide 14">
+  <p:cSld name="Slide 15">
     <p:spTree>
       <p:nvGrpSpPr>
         <p:cNvPr id="1" name=""/>
@@ -8278,7 +9547,2083 @@
             <a:pPr algn="l"/>
             <a:fld id="{F7021451-1387-4CA6-816F-3879F97B5CBC}" type="slidenum">
               <a:rPr b="0" lang="en-US"/>
-              <a:t>14</a:t>
+              <a:t>15</a:t>
+            </a:fld>
+            <a:endParaRPr lang="en-US"/>
+          </a:p>
+        </p:txBody>
+      </p:sp>
+    </p:spTree>
+  </p:cSld>
+  <p:clrMapOvr>
+    <a:masterClrMapping/>
+  </p:clrMapOvr>
+</p:sld>
+</file>
+
+<file path=ppt/slides/slide16.xml><?xml version="1.0" encoding="utf-8"?>
+<p:sld xmlns:a="http://schemas.openxmlformats.org/drawingml/2006/main" xmlns:r="http://schemas.openxmlformats.org/officeDocument/2006/relationships" xmlns:p="http://schemas.openxmlformats.org/presentationml/2006/main">
+  <p:cSld name="Slide 16">
+    <p:spTree>
+      <p:nvGrpSpPr>
+        <p:cNvPr id="1" name=""/>
+        <p:cNvGrpSpPr/>
+        <p:nvPr/>
+      </p:nvGrpSpPr>
+      <p:grpSpPr>
+        <a:xfrm>
+          <a:off x="0" y="0"/>
+          <a:ext cx="0" cy="0"/>
+          <a:chOff x="0" y="0"/>
+          <a:chExt cx="0" cy="0"/>
+        </a:xfrm>
+      </p:grpSpPr>
+      <p:sp>
+        <p:nvSpPr>
+          <p:cNvPr id="2" name="Text 0"/>
+          <p:cNvSpPr/>
+          <p:nvPr/>
+        </p:nvSpPr>
+        <p:spPr>
+          <a:xfrm>
+            <a:off x="566928" y="347472"/>
+            <a:ext cx="4114800" cy="274320"/>
+          </a:xfrm>
+          <a:prstGeom prst="rect">
+            <a:avLst/>
+          </a:prstGeom>
+          <a:noFill/>
+          <a:ln/>
+        </p:spPr>
+        <p:txBody>
+          <a:bodyPr wrap="square" lIns="0" tIns="0" rIns="0" bIns="0" rtlCol="0" anchor="ctr">
+            <a:normAutofit/>
+          </a:bodyPr>
+          <a:lstStyle/>
+          <a:p>
+            <a:pPr indent="0" marL="0">
+              <a:buNone/>
+            </a:pPr>
+            <a:r>
+              <a:rPr lang="en-US" sz="900" b="1" spc="180" kern="0" dirty="0">
+                <a:solidFill>
+                  <a:srgbClr val="EE3D2C"/>
+                </a:solidFill>
+                <a:latin typeface="Noto Sans KR" pitchFamily="34" charset="0"/>
+                <a:ea typeface="Noto Sans KR" pitchFamily="34" charset="-122"/>
+                <a:cs typeface="Noto Sans KR" pitchFamily="34" charset="-120"/>
+              </a:rPr>
+              <a:t>부록 F</a:t>
+            </a:r>
+            <a:endParaRPr lang="en-US" sz="900" dirty="0"/>
+          </a:p>
+        </p:txBody>
+      </p:sp>
+      <p:pic>
+        <p:nvPicPr>
+          <p:cNvPr id="3" name="Image 0" descr="Nimbus customer logo">    </p:cNvPr>
+          <p:cNvPicPr>
+            <a:picLocks noChangeAspect="1"/>
+          </p:cNvPicPr>
+          <p:nvPr/>
+        </p:nvPicPr>
+        <p:blipFill>
+          <a:blip r:embed="rId1"/>
+          <a:srcRect l="0" r="0" t="0" b="0"/>
+          <a:stretch/>
+        </p:blipFill>
+        <p:spPr>
+          <a:xfrm>
+            <a:off x="9985248" y="374904"/>
+            <a:ext cx="1426464" cy="804672"/>
+          </a:xfrm>
+          <a:prstGeom prst="rect">
+            <a:avLst/>
+          </a:prstGeom>
+        </p:spPr>
+      </p:pic>
+      <p:sp>
+        <p:nvSpPr>
+          <p:cNvPr id="4" name="Text 1"/>
+          <p:cNvSpPr/>
+          <p:nvPr/>
+        </p:nvSpPr>
+        <p:spPr>
+          <a:xfrm>
+            <a:off x="566928" y="658368"/>
+            <a:ext cx="9326880" cy="658368"/>
+          </a:xfrm>
+          <a:prstGeom prst="rect">
+            <a:avLst/>
+          </a:prstGeom>
+          <a:noFill/>
+          <a:ln/>
+        </p:spPr>
+        <p:txBody>
+          <a:bodyPr wrap="square" lIns="0" tIns="0" rIns="0" bIns="0" rtlCol="0" anchor="t">
+            <a:normAutofit/>
+          </a:bodyPr>
+          <a:lstStyle/>
+          <a:p>
+            <a:pPr indent="0" marL="0">
+              <a:buNone/>
+            </a:pPr>
+            <a:r>
+              <a:rPr lang="en-US" sz="2800" b="1" dirty="0">
+                <a:solidFill>
+                  <a:srgbClr val="1F2530"/>
+                </a:solidFill>
+                <a:latin typeface="Noto Sans KR" pitchFamily="34" charset="0"/>
+                <a:ea typeface="Noto Sans KR" pitchFamily="34" charset="-122"/>
+                <a:cs typeface="Noto Sans KR" pitchFamily="34" charset="-120"/>
+              </a:rPr>
+              <a:t>Why Databricks — 주장과 증거</a:t>
+            </a:r>
+            <a:endParaRPr lang="en-US" sz="2800" dirty="0"/>
+          </a:p>
+        </p:txBody>
+      </p:sp>
+      <p:sp>
+        <p:nvSpPr>
+          <p:cNvPr id="5" name="Text 2"/>
+          <p:cNvSpPr/>
+          <p:nvPr/>
+        </p:nvSpPr>
+        <p:spPr>
+          <a:xfrm>
+            <a:off x="585216" y="1353312"/>
+            <a:ext cx="10698480" cy="384048"/>
+          </a:xfrm>
+          <a:prstGeom prst="rect">
+            <a:avLst/>
+          </a:prstGeom>
+          <a:noFill/>
+          <a:ln/>
+        </p:spPr>
+        <p:txBody>
+          <a:bodyPr wrap="square" lIns="0" tIns="0" rIns="0" bIns="0" rtlCol="0" anchor="t">
+            <a:normAutofit/>
+          </a:bodyPr>
+          <a:lstStyle/>
+          <a:p>
+            <a:pPr indent="0" marL="0">
+              <a:buNone/>
+            </a:pPr>
+            <a:r>
+              <a:rPr lang="en-US" sz="1200" dirty="0">
+                <a:solidFill>
+                  <a:srgbClr val="5B6573"/>
+                </a:solidFill>
+                <a:latin typeface="Noto Sans KR" pitchFamily="34" charset="0"/>
+                <a:ea typeface="Noto Sans KR" pitchFamily="34" charset="-122"/>
+                <a:cs typeface="Noto Sans KR" pitchFamily="34" charset="-120"/>
+              </a:rPr>
+              <a:t>각 비즈니스 주장에 프로젝트 증거와 공식 제품 책임 범위를 연결합니다.</a:t>
+            </a:r>
+            <a:endParaRPr lang="en-US" sz="1200" dirty="0"/>
+          </a:p>
+        </p:txBody>
+      </p:sp>
+      <p:graphicFrame>
+        <p:nvGraphicFramePr>
+          <p:cNvPr id="17" name="Table 0"/>
+          <p:cNvGraphicFramePr>
+            <a:graphicFrameLocks noGrp="1"/>
+          </p:cNvGraphicFramePr>
+          <p:nvPr>
+            <p:extLst>
+              <p:ext uri="{D42A27DB-BD31-4B8C-83A1-F6EECF244321}">
+                <p14:modId xmlns:p14="http://schemas.microsoft.com/office/powerpoint/2010/main" val="1579011935"/>
+              </p:ext>
+            </p:extLst>
+          </p:nvPr>
+        </p:nvGraphicFramePr>
+        <p:xfrm>
+          <a:off x="621792" y="1664208"/>
+          <a:ext cx="10936224" cy="3218688"/>
+        </p:xfrm>
+        <a:graphic>
+          <a:graphicData uri="http://schemas.openxmlformats.org/drawingml/2006/table">
+            <a:tbl>
+              <a:tblPr/>
+              <a:tblGrid>
+                <a:gridCol w="1920240"/>
+                <a:gridCol w="2971800"/>
+                <a:gridCol w="6044184"/>
+              </a:tblGrid>
+              <a:tr h="457200">
+                <a:tc>
+                  <a:txBody>
+                    <a:bodyPr/>
+                    <a:lstStyle/>
+                    <a:p>
+                      <a:pPr indent="0" marL="0">
+                        <a:buNone/>
+                      </a:pPr>
+                      <a:r>
+                        <a:rPr lang="en-US" sz="1050" b="1" dirty="0">
+                          <a:solidFill>
+                            <a:srgbClr val="1F2530"/>
+                          </a:solidFill>
+                          <a:latin typeface="Noto Sans KR" pitchFamily="34" charset="0"/>
+                          <a:ea typeface="Noto Sans KR" pitchFamily="34" charset="-122"/>
+                          <a:cs typeface="Noto Sans KR" pitchFamily="34" charset="-120"/>
+                        </a:rPr>
+                        <a:t>주장</a:t>
+                      </a:r>
+                      <a:endParaRPr lang="en-US" sz="1050" dirty="0">
+                        <a:latin typeface="Noto Sans KR" charset="0"/>
+                        <a:ea typeface="Noto Sans KR" charset="0"/>
+                        <a:cs typeface="Noto Sans KR" charset="0"/>
+                      </a:endParaRPr>
+                    </a:p>
+                  </a:txBody>
+                  <a:tcPr marL="91440" marR="91440" marT="91440" marB="91440" anchor="mid">
+                    <a:lnL w="12700" cap="flat" cmpd="sng" algn="ctr">
+                      <a:solidFill>
+                        <a:srgbClr val="DCE1E7"/>
+                      </a:solidFill>
+                      <a:prstDash val="solid"/>
+                      <a:round/>
+                      <a:headEnd type="none" w="med" len="med"/>
+                      <a:tailEnd type="none" w="med" len="med"/>
+                    </a:lnL>
+                    <a:lnR w="12700" cap="flat" cmpd="sng" algn="ctr">
+                      <a:solidFill>
+                        <a:srgbClr val="DCE1E7"/>
+                      </a:solidFill>
+                      <a:prstDash val="solid"/>
+                      <a:round/>
+                      <a:headEnd type="none" w="med" len="med"/>
+                      <a:tailEnd type="none" w="med" len="med"/>
+                    </a:lnR>
+                    <a:lnT w="12700" cap="flat" cmpd="sng" algn="ctr">
+                      <a:solidFill>
+                        <a:srgbClr val="DCE1E7"/>
+                      </a:solidFill>
+                      <a:prstDash val="solid"/>
+                      <a:round/>
+                      <a:headEnd type="none" w="med" len="med"/>
+                      <a:tailEnd type="none" w="med" len="med"/>
+                    </a:lnT>
+                    <a:lnB w="12700" cap="flat" cmpd="sng" algn="ctr">
+                      <a:solidFill>
+                        <a:srgbClr val="DCE1E7"/>
+                      </a:solidFill>
+                      <a:prstDash val="solid"/>
+                      <a:round/>
+                      <a:headEnd type="none" w="med" len="med"/>
+                      <a:tailEnd type="none" w="med" len="med"/>
+                    </a:lnB>
+                    <a:solidFill>
+                      <a:srgbClr val="FFFFFF"/>
+                    </a:solidFill>
+                  </a:tcPr>
+                </a:tc>
+                <a:tc>
+                  <a:txBody>
+                    <a:bodyPr/>
+                    <a:lstStyle/>
+                    <a:p>
+                      <a:pPr indent="0" marL="0">
+                        <a:buNone/>
+                      </a:pPr>
+                      <a:r>
+                        <a:rPr lang="en-US" sz="1050" b="1" dirty="0">
+                          <a:solidFill>
+                            <a:srgbClr val="1F2530"/>
+                          </a:solidFill>
+                          <a:latin typeface="Noto Sans KR" pitchFamily="34" charset="0"/>
+                          <a:ea typeface="Noto Sans KR" pitchFamily="34" charset="-122"/>
+                          <a:cs typeface="Noto Sans KR" pitchFamily="34" charset="-120"/>
+                        </a:rPr>
+                        <a:t>Databricks 기능</a:t>
+                      </a:r>
+                      <a:endParaRPr lang="en-US" sz="1050" dirty="0">
+                        <a:latin typeface="Noto Sans KR" charset="0"/>
+                        <a:ea typeface="Noto Sans KR" charset="0"/>
+                        <a:cs typeface="Noto Sans KR" charset="0"/>
+                      </a:endParaRPr>
+                    </a:p>
+                  </a:txBody>
+                  <a:tcPr marL="91440" marR="91440" marT="91440" marB="91440" anchor="mid">
+                    <a:lnL w="12700" cap="flat" cmpd="sng" algn="ctr">
+                      <a:solidFill>
+                        <a:srgbClr val="DCE1E7"/>
+                      </a:solidFill>
+                      <a:prstDash val="solid"/>
+                      <a:round/>
+                      <a:headEnd type="none" w="med" len="med"/>
+                      <a:tailEnd type="none" w="med" len="med"/>
+                    </a:lnL>
+                    <a:lnR w="12700" cap="flat" cmpd="sng" algn="ctr">
+                      <a:solidFill>
+                        <a:srgbClr val="DCE1E7"/>
+                      </a:solidFill>
+                      <a:prstDash val="solid"/>
+                      <a:round/>
+                      <a:headEnd type="none" w="med" len="med"/>
+                      <a:tailEnd type="none" w="med" len="med"/>
+                    </a:lnR>
+                    <a:lnT w="12700" cap="flat" cmpd="sng" algn="ctr">
+                      <a:solidFill>
+                        <a:srgbClr val="DCE1E7"/>
+                      </a:solidFill>
+                      <a:prstDash val="solid"/>
+                      <a:round/>
+                      <a:headEnd type="none" w="med" len="med"/>
+                      <a:tailEnd type="none" w="med" len="med"/>
+                    </a:lnT>
+                    <a:lnB w="12700" cap="flat" cmpd="sng" algn="ctr">
+                      <a:solidFill>
+                        <a:srgbClr val="DCE1E7"/>
+                      </a:solidFill>
+                      <a:prstDash val="solid"/>
+                      <a:round/>
+                      <a:headEnd type="none" w="med" len="med"/>
+                      <a:tailEnd type="none" w="med" len="med"/>
+                    </a:lnB>
+                    <a:solidFill>
+                      <a:srgbClr val="FFFFFF"/>
+                    </a:solidFill>
+                  </a:tcPr>
+                </a:tc>
+                <a:tc>
+                  <a:txBody>
+                    <a:bodyPr/>
+                    <a:lstStyle/>
+                    <a:p>
+                      <a:pPr indent="0" marL="0">
+                        <a:buNone/>
+                      </a:pPr>
+                      <a:r>
+                        <a:rPr lang="en-US" sz="1050" b="1" dirty="0">
+                          <a:solidFill>
+                            <a:srgbClr val="1F2530"/>
+                          </a:solidFill>
+                          <a:latin typeface="Noto Sans KR" pitchFamily="34" charset="0"/>
+                          <a:ea typeface="Noto Sans KR" pitchFamily="34" charset="-122"/>
+                          <a:cs typeface="Noto Sans KR" pitchFamily="34" charset="-120"/>
+                        </a:rPr>
+                        <a:t>프로젝트 증거</a:t>
+                      </a:r>
+                      <a:endParaRPr lang="en-US" sz="1050" dirty="0">
+                        <a:latin typeface="Noto Sans KR" charset="0"/>
+                        <a:ea typeface="Noto Sans KR" charset="0"/>
+                        <a:cs typeface="Noto Sans KR" charset="0"/>
+                      </a:endParaRPr>
+                    </a:p>
+                  </a:txBody>
+                  <a:tcPr marL="91440" marR="91440" marT="91440" marB="91440" anchor="mid">
+                    <a:lnL w="12700" cap="flat" cmpd="sng" algn="ctr">
+                      <a:solidFill>
+                        <a:srgbClr val="DCE1E7"/>
+                      </a:solidFill>
+                      <a:prstDash val="solid"/>
+                      <a:round/>
+                      <a:headEnd type="none" w="med" len="med"/>
+                      <a:tailEnd type="none" w="med" len="med"/>
+                    </a:lnL>
+                    <a:lnR w="12700" cap="flat" cmpd="sng" algn="ctr">
+                      <a:solidFill>
+                        <a:srgbClr val="DCE1E7"/>
+                      </a:solidFill>
+                      <a:prstDash val="solid"/>
+                      <a:round/>
+                      <a:headEnd type="none" w="med" len="med"/>
+                      <a:tailEnd type="none" w="med" len="med"/>
+                    </a:lnR>
+                    <a:lnT w="12700" cap="flat" cmpd="sng" algn="ctr">
+                      <a:solidFill>
+                        <a:srgbClr val="DCE1E7"/>
+                      </a:solidFill>
+                      <a:prstDash val="solid"/>
+                      <a:round/>
+                      <a:headEnd type="none" w="med" len="med"/>
+                      <a:tailEnd type="none" w="med" len="med"/>
+                    </a:lnT>
+                    <a:lnB w="12700" cap="flat" cmpd="sng" algn="ctr">
+                      <a:solidFill>
+                        <a:srgbClr val="DCE1E7"/>
+                      </a:solidFill>
+                      <a:prstDash val="solid"/>
+                      <a:round/>
+                      <a:headEnd type="none" w="med" len="med"/>
+                      <a:tailEnd type="none" w="med" len="med"/>
+                    </a:lnB>
+                    <a:solidFill>
+                      <a:srgbClr val="FFFFFF"/>
+                    </a:solidFill>
+                  </a:tcPr>
+                </a:tc>
+              </a:tr>
+              <a:tr h="457200">
+                <a:tc>
+                  <a:txBody>
+                    <a:bodyPr/>
+                    <a:lstStyle/>
+                    <a:p>
+                      <a:pPr indent="0" marL="0">
+                        <a:buNone/>
+                      </a:pPr>
+                      <a:r>
+                        <a:rPr lang="en-US" sz="1050" dirty="0">
+                          <a:solidFill>
+                            <a:srgbClr val="1F2530"/>
+                          </a:solidFill>
+                          <a:latin typeface="Noto Sans KR" pitchFamily="34" charset="0"/>
+                          <a:ea typeface="Noto Sans KR" pitchFamily="34" charset="-122"/>
+                          <a:cs typeface="Noto Sans KR" pitchFamily="34" charset="-120"/>
+                        </a:rPr>
+                        <a:t>하나의 지표 정의</a:t>
+                      </a:r>
+                      <a:endParaRPr lang="en-US" sz="1050" dirty="0">
+                        <a:latin typeface="Noto Sans KR" charset="0"/>
+                        <a:ea typeface="Noto Sans KR" charset="0"/>
+                        <a:cs typeface="Noto Sans KR" charset="0"/>
+                      </a:endParaRPr>
+                    </a:p>
+                  </a:txBody>
+                  <a:tcPr marL="91440" marR="91440" marT="91440" marB="91440" anchor="mid">
+                    <a:lnL w="12700" cap="flat" cmpd="sng" algn="ctr">
+                      <a:solidFill>
+                        <a:srgbClr val="DCE1E7"/>
+                      </a:solidFill>
+                      <a:prstDash val="solid"/>
+                      <a:round/>
+                      <a:headEnd type="none" w="med" len="med"/>
+                      <a:tailEnd type="none" w="med" len="med"/>
+                    </a:lnL>
+                    <a:lnR w="12700" cap="flat" cmpd="sng" algn="ctr">
+                      <a:solidFill>
+                        <a:srgbClr val="DCE1E7"/>
+                      </a:solidFill>
+                      <a:prstDash val="solid"/>
+                      <a:round/>
+                      <a:headEnd type="none" w="med" len="med"/>
+                      <a:tailEnd type="none" w="med" len="med"/>
+                    </a:lnR>
+                    <a:lnT w="12700" cap="flat" cmpd="sng" algn="ctr">
+                      <a:solidFill>
+                        <a:srgbClr val="DCE1E7"/>
+                      </a:solidFill>
+                      <a:prstDash val="solid"/>
+                      <a:round/>
+                      <a:headEnd type="none" w="med" len="med"/>
+                      <a:tailEnd type="none" w="med" len="med"/>
+                    </a:lnT>
+                    <a:lnB w="12700" cap="flat" cmpd="sng" algn="ctr">
+                      <a:solidFill>
+                        <a:srgbClr val="DCE1E7"/>
+                      </a:solidFill>
+                      <a:prstDash val="solid"/>
+                      <a:round/>
+                      <a:headEnd type="none" w="med" len="med"/>
+                      <a:tailEnd type="none" w="med" len="med"/>
+                    </a:lnB>
+                    <a:solidFill>
+                      <a:srgbClr val="FFFFFF"/>
+                    </a:solidFill>
+                  </a:tcPr>
+                </a:tc>
+                <a:tc>
+                  <a:txBody>
+                    <a:bodyPr/>
+                    <a:lstStyle/>
+                    <a:p>
+                      <a:pPr indent="0" marL="0">
+                        <a:buNone/>
+                      </a:pPr>
+                      <a:r>
+                        <a:rPr lang="en-US" sz="1050" dirty="0">
+                          <a:solidFill>
+                            <a:srgbClr val="1F2530"/>
+                          </a:solidFill>
+                          <a:latin typeface="Noto Sans KR" pitchFamily="34" charset="0"/>
+                          <a:ea typeface="Noto Sans KR" pitchFamily="34" charset="-122"/>
+                          <a:cs typeface="Noto Sans KR" pitchFamily="34" charset="-120"/>
+                        </a:rPr>
+                        <a:t>Unity Catalog Metric View</a:t>
+                      </a:r>
+                      <a:endParaRPr lang="en-US" sz="1050" dirty="0">
+                        <a:latin typeface="Noto Sans KR" charset="0"/>
+                        <a:ea typeface="Noto Sans KR" charset="0"/>
+                        <a:cs typeface="Noto Sans KR" charset="0"/>
+                      </a:endParaRPr>
+                    </a:p>
+                  </a:txBody>
+                  <a:tcPr marL="91440" marR="91440" marT="91440" marB="91440" anchor="mid">
+                    <a:lnL w="12700" cap="flat" cmpd="sng" algn="ctr">
+                      <a:solidFill>
+                        <a:srgbClr val="DCE1E7"/>
+                      </a:solidFill>
+                      <a:prstDash val="solid"/>
+                      <a:round/>
+                      <a:headEnd type="none" w="med" len="med"/>
+                      <a:tailEnd type="none" w="med" len="med"/>
+                    </a:lnL>
+                    <a:lnR w="12700" cap="flat" cmpd="sng" algn="ctr">
+                      <a:solidFill>
+                        <a:srgbClr val="DCE1E7"/>
+                      </a:solidFill>
+                      <a:prstDash val="solid"/>
+                      <a:round/>
+                      <a:headEnd type="none" w="med" len="med"/>
+                      <a:tailEnd type="none" w="med" len="med"/>
+                    </a:lnR>
+                    <a:lnT w="12700" cap="flat" cmpd="sng" algn="ctr">
+                      <a:solidFill>
+                        <a:srgbClr val="DCE1E7"/>
+                      </a:solidFill>
+                      <a:prstDash val="solid"/>
+                      <a:round/>
+                      <a:headEnd type="none" w="med" len="med"/>
+                      <a:tailEnd type="none" w="med" len="med"/>
+                    </a:lnT>
+                    <a:lnB w="12700" cap="flat" cmpd="sng" algn="ctr">
+                      <a:solidFill>
+                        <a:srgbClr val="DCE1E7"/>
+                      </a:solidFill>
+                      <a:prstDash val="solid"/>
+                      <a:round/>
+                      <a:headEnd type="none" w="med" len="med"/>
+                      <a:tailEnd type="none" w="med" len="med"/>
+                    </a:lnB>
+                    <a:solidFill>
+                      <a:srgbClr val="FFFFFF"/>
+                    </a:solidFill>
+                  </a:tcPr>
+                </a:tc>
+                <a:tc>
+                  <a:txBody>
+                    <a:bodyPr/>
+                    <a:lstStyle/>
+                    <a:p>
+                      <a:pPr indent="0" marL="0">
+                        <a:buNone/>
+                      </a:pPr>
+                      <a:r>
+                        <a:rPr lang="en-US" sz="1050" dirty="0">
+                          <a:solidFill>
+                            <a:srgbClr val="1F2530"/>
+                          </a:solidFill>
+                          <a:latin typeface="Noto Sans KR" pitchFamily="34" charset="0"/>
+                          <a:ea typeface="Noto Sans KR" pitchFamily="34" charset="-122"/>
+                          <a:cs typeface="Noto Sans KR" pitchFamily="34" charset="-120"/>
+                        </a:rPr>
+                        <a:t>대시보드·Genie·앱이 같은 전환율 정의 사용</a:t>
+                      </a:r>
+                      <a:endParaRPr lang="en-US" sz="1050" dirty="0">
+                        <a:latin typeface="Noto Sans KR" charset="0"/>
+                        <a:ea typeface="Noto Sans KR" charset="0"/>
+                        <a:cs typeface="Noto Sans KR" charset="0"/>
+                      </a:endParaRPr>
+                    </a:p>
+                  </a:txBody>
+                  <a:tcPr marL="91440" marR="91440" marT="91440" marB="91440" anchor="mid">
+                    <a:lnL w="12700" cap="flat" cmpd="sng" algn="ctr">
+                      <a:solidFill>
+                        <a:srgbClr val="DCE1E7"/>
+                      </a:solidFill>
+                      <a:prstDash val="solid"/>
+                      <a:round/>
+                      <a:headEnd type="none" w="med" len="med"/>
+                      <a:tailEnd type="none" w="med" len="med"/>
+                    </a:lnL>
+                    <a:lnR w="12700" cap="flat" cmpd="sng" algn="ctr">
+                      <a:solidFill>
+                        <a:srgbClr val="DCE1E7"/>
+                      </a:solidFill>
+                      <a:prstDash val="solid"/>
+                      <a:round/>
+                      <a:headEnd type="none" w="med" len="med"/>
+                      <a:tailEnd type="none" w="med" len="med"/>
+                    </a:lnR>
+                    <a:lnT w="12700" cap="flat" cmpd="sng" algn="ctr">
+                      <a:solidFill>
+                        <a:srgbClr val="DCE1E7"/>
+                      </a:solidFill>
+                      <a:prstDash val="solid"/>
+                      <a:round/>
+                      <a:headEnd type="none" w="med" len="med"/>
+                      <a:tailEnd type="none" w="med" len="med"/>
+                    </a:lnT>
+                    <a:lnB w="12700" cap="flat" cmpd="sng" algn="ctr">
+                      <a:solidFill>
+                        <a:srgbClr val="DCE1E7"/>
+                      </a:solidFill>
+                      <a:prstDash val="solid"/>
+                      <a:round/>
+                      <a:headEnd type="none" w="med" len="med"/>
+                      <a:tailEnd type="none" w="med" len="med"/>
+                    </a:lnB>
+                    <a:solidFill>
+                      <a:srgbClr val="FFFFFF"/>
+                    </a:solidFill>
+                  </a:tcPr>
+                </a:tc>
+              </a:tr>
+              <a:tr h="457200">
+                <a:tc>
+                  <a:txBody>
+                    <a:bodyPr/>
+                    <a:lstStyle/>
+                    <a:p>
+                      <a:pPr indent="0" marL="0">
+                        <a:buNone/>
+                      </a:pPr>
+                      <a:r>
+                        <a:rPr lang="en-US" sz="1050" dirty="0">
+                          <a:solidFill>
+                            <a:srgbClr val="1F2530"/>
+                          </a:solidFill>
+                          <a:latin typeface="Noto Sans KR" pitchFamily="34" charset="0"/>
+                          <a:ea typeface="Noto Sans KR" pitchFamily="34" charset="-122"/>
+                          <a:cs typeface="Noto Sans KR" pitchFamily="34" charset="-120"/>
+                        </a:rPr>
+                        <a:t>최신 상태 반영</a:t>
+                      </a:r>
+                      <a:endParaRPr lang="en-US" sz="1050" dirty="0">
+                        <a:latin typeface="Noto Sans KR" charset="0"/>
+                        <a:ea typeface="Noto Sans KR" charset="0"/>
+                        <a:cs typeface="Noto Sans KR" charset="0"/>
+                      </a:endParaRPr>
+                    </a:p>
+                  </a:txBody>
+                  <a:tcPr marL="91440" marR="91440" marT="91440" marB="91440" anchor="mid">
+                    <a:lnL w="12700" cap="flat" cmpd="sng" algn="ctr">
+                      <a:solidFill>
+                        <a:srgbClr val="DCE1E7"/>
+                      </a:solidFill>
+                      <a:prstDash val="solid"/>
+                      <a:round/>
+                      <a:headEnd type="none" w="med" len="med"/>
+                      <a:tailEnd type="none" w="med" len="med"/>
+                    </a:lnL>
+                    <a:lnR w="12700" cap="flat" cmpd="sng" algn="ctr">
+                      <a:solidFill>
+                        <a:srgbClr val="DCE1E7"/>
+                      </a:solidFill>
+                      <a:prstDash val="solid"/>
+                      <a:round/>
+                      <a:headEnd type="none" w="med" len="med"/>
+                      <a:tailEnd type="none" w="med" len="med"/>
+                    </a:lnR>
+                    <a:lnT w="12700" cap="flat" cmpd="sng" algn="ctr">
+                      <a:solidFill>
+                        <a:srgbClr val="DCE1E7"/>
+                      </a:solidFill>
+                      <a:prstDash val="solid"/>
+                      <a:round/>
+                      <a:headEnd type="none" w="med" len="med"/>
+                      <a:tailEnd type="none" w="med" len="med"/>
+                    </a:lnT>
+                    <a:lnB w="12700" cap="flat" cmpd="sng" algn="ctr">
+                      <a:solidFill>
+                        <a:srgbClr val="DCE1E7"/>
+                      </a:solidFill>
+                      <a:prstDash val="solid"/>
+                      <a:round/>
+                      <a:headEnd type="none" w="med" len="med"/>
+                      <a:tailEnd type="none" w="med" len="med"/>
+                    </a:lnB>
+                    <a:solidFill>
+                      <a:srgbClr val="FFFFFF"/>
+                    </a:solidFill>
+                  </a:tcPr>
+                </a:tc>
+                <a:tc>
+                  <a:txBody>
+                    <a:bodyPr/>
+                    <a:lstStyle/>
+                    <a:p>
+                      <a:pPr indent="0" marL="0">
+                        <a:buNone/>
+                      </a:pPr>
+                      <a:r>
+                        <a:rPr lang="en-US" sz="1050" dirty="0">
+                          <a:solidFill>
+                            <a:srgbClr val="1F2530"/>
+                          </a:solidFill>
+                          <a:latin typeface="Noto Sans KR" pitchFamily="34" charset="0"/>
+                          <a:ea typeface="Noto Sans KR" pitchFamily="34" charset="-122"/>
+                          <a:cs typeface="Noto Sans KR" pitchFamily="34" charset="-120"/>
+                        </a:rPr>
+                        <a:t>Lakeflow + Lakebase</a:t>
+                      </a:r>
+                      <a:endParaRPr lang="en-US" sz="1050" dirty="0">
+                        <a:latin typeface="Noto Sans KR" charset="0"/>
+                        <a:ea typeface="Noto Sans KR" charset="0"/>
+                        <a:cs typeface="Noto Sans KR" charset="0"/>
+                      </a:endParaRPr>
+                    </a:p>
+                  </a:txBody>
+                  <a:tcPr marL="91440" marR="91440" marT="91440" marB="91440" anchor="mid">
+                    <a:lnL w="12700" cap="flat" cmpd="sng" algn="ctr">
+                      <a:solidFill>
+                        <a:srgbClr val="DCE1E7"/>
+                      </a:solidFill>
+                      <a:prstDash val="solid"/>
+                      <a:round/>
+                      <a:headEnd type="none" w="med" len="med"/>
+                      <a:tailEnd type="none" w="med" len="med"/>
+                    </a:lnL>
+                    <a:lnR w="12700" cap="flat" cmpd="sng" algn="ctr">
+                      <a:solidFill>
+                        <a:srgbClr val="DCE1E7"/>
+                      </a:solidFill>
+                      <a:prstDash val="solid"/>
+                      <a:round/>
+                      <a:headEnd type="none" w="med" len="med"/>
+                      <a:tailEnd type="none" w="med" len="med"/>
+                    </a:lnR>
+                    <a:lnT w="12700" cap="flat" cmpd="sng" algn="ctr">
+                      <a:solidFill>
+                        <a:srgbClr val="DCE1E7"/>
+                      </a:solidFill>
+                      <a:prstDash val="solid"/>
+                      <a:round/>
+                      <a:headEnd type="none" w="med" len="med"/>
+                      <a:tailEnd type="none" w="med" len="med"/>
+                    </a:lnT>
+                    <a:lnB w="12700" cap="flat" cmpd="sng" algn="ctr">
+                      <a:solidFill>
+                        <a:srgbClr val="DCE1E7"/>
+                      </a:solidFill>
+                      <a:prstDash val="solid"/>
+                      <a:round/>
+                      <a:headEnd type="none" w="med" len="med"/>
+                      <a:tailEnd type="none" w="med" len="med"/>
+                    </a:lnB>
+                    <a:solidFill>
+                      <a:srgbClr val="FFFFFF"/>
+                    </a:solidFill>
+                  </a:tcPr>
+                </a:tc>
+                <a:tc>
+                  <a:txBody>
+                    <a:bodyPr/>
+                    <a:lstStyle/>
+                    <a:p>
+                      <a:pPr indent="0" marL="0">
+                        <a:buNone/>
+                      </a:pPr>
+                      <a:r>
+                        <a:rPr lang="en-US" sz="1050" dirty="0">
+                          <a:solidFill>
+                            <a:srgbClr val="1F2530"/>
+                          </a:solidFill>
+                          <a:latin typeface="Noto Sans KR" pitchFamily="34" charset="0"/>
+                          <a:ea typeface="Noto Sans KR" pitchFamily="34" charset="-122"/>
+                          <a:cs typeface="Noto Sans KR" pitchFamily="34" charset="-120"/>
+                        </a:rPr>
+                        <a:t>동기화된 고객 상태와 앱 최신 화면</a:t>
+                      </a:r>
+                      <a:endParaRPr lang="en-US" sz="1050" dirty="0">
+                        <a:latin typeface="Noto Sans KR" charset="0"/>
+                        <a:ea typeface="Noto Sans KR" charset="0"/>
+                        <a:cs typeface="Noto Sans KR" charset="0"/>
+                      </a:endParaRPr>
+                    </a:p>
+                  </a:txBody>
+                  <a:tcPr marL="91440" marR="91440" marT="91440" marB="91440" anchor="mid">
+                    <a:lnL w="12700" cap="flat" cmpd="sng" algn="ctr">
+                      <a:solidFill>
+                        <a:srgbClr val="DCE1E7"/>
+                      </a:solidFill>
+                      <a:prstDash val="solid"/>
+                      <a:round/>
+                      <a:headEnd type="none" w="med" len="med"/>
+                      <a:tailEnd type="none" w="med" len="med"/>
+                    </a:lnL>
+                    <a:lnR w="12700" cap="flat" cmpd="sng" algn="ctr">
+                      <a:solidFill>
+                        <a:srgbClr val="DCE1E7"/>
+                      </a:solidFill>
+                      <a:prstDash val="solid"/>
+                      <a:round/>
+                      <a:headEnd type="none" w="med" len="med"/>
+                      <a:tailEnd type="none" w="med" len="med"/>
+                    </a:lnR>
+                    <a:lnT w="12700" cap="flat" cmpd="sng" algn="ctr">
+                      <a:solidFill>
+                        <a:srgbClr val="DCE1E7"/>
+                      </a:solidFill>
+                      <a:prstDash val="solid"/>
+                      <a:round/>
+                      <a:headEnd type="none" w="med" len="med"/>
+                      <a:tailEnd type="none" w="med" len="med"/>
+                    </a:lnT>
+                    <a:lnB w="12700" cap="flat" cmpd="sng" algn="ctr">
+                      <a:solidFill>
+                        <a:srgbClr val="DCE1E7"/>
+                      </a:solidFill>
+                      <a:prstDash val="solid"/>
+                      <a:round/>
+                      <a:headEnd type="none" w="med" len="med"/>
+                      <a:tailEnd type="none" w="med" len="med"/>
+                    </a:lnB>
+                    <a:solidFill>
+                      <a:srgbClr val="FFFFFF"/>
+                    </a:solidFill>
+                  </a:tcPr>
+                </a:tc>
+              </a:tr>
+              <a:tr h="457200">
+                <a:tc>
+                  <a:txBody>
+                    <a:bodyPr/>
+                    <a:lstStyle/>
+                    <a:p>
+                      <a:pPr indent="0" marL="0">
+                        <a:buNone/>
+                      </a:pPr>
+                      <a:r>
+                        <a:rPr lang="en-US" sz="1050" dirty="0">
+                          <a:solidFill>
+                            <a:srgbClr val="1F2530"/>
+                          </a:solidFill>
+                          <a:latin typeface="Noto Sans KR" pitchFamily="34" charset="0"/>
+                          <a:ea typeface="Noto Sans KR" pitchFamily="34" charset="-122"/>
+                          <a:cs typeface="Noto Sans KR" pitchFamily="34" charset="-120"/>
+                        </a:rPr>
+                        <a:t>자연어 분석</a:t>
+                      </a:r>
+                      <a:endParaRPr lang="en-US" sz="1050" dirty="0">
+                        <a:latin typeface="Noto Sans KR" charset="0"/>
+                        <a:ea typeface="Noto Sans KR" charset="0"/>
+                        <a:cs typeface="Noto Sans KR" charset="0"/>
+                      </a:endParaRPr>
+                    </a:p>
+                  </a:txBody>
+                  <a:tcPr marL="91440" marR="91440" marT="91440" marB="91440" anchor="mid">
+                    <a:lnL w="12700" cap="flat" cmpd="sng" algn="ctr">
+                      <a:solidFill>
+                        <a:srgbClr val="DCE1E7"/>
+                      </a:solidFill>
+                      <a:prstDash val="solid"/>
+                      <a:round/>
+                      <a:headEnd type="none" w="med" len="med"/>
+                      <a:tailEnd type="none" w="med" len="med"/>
+                    </a:lnL>
+                    <a:lnR w="12700" cap="flat" cmpd="sng" algn="ctr">
+                      <a:solidFill>
+                        <a:srgbClr val="DCE1E7"/>
+                      </a:solidFill>
+                      <a:prstDash val="solid"/>
+                      <a:round/>
+                      <a:headEnd type="none" w="med" len="med"/>
+                      <a:tailEnd type="none" w="med" len="med"/>
+                    </a:lnR>
+                    <a:lnT w="12700" cap="flat" cmpd="sng" algn="ctr">
+                      <a:solidFill>
+                        <a:srgbClr val="DCE1E7"/>
+                      </a:solidFill>
+                      <a:prstDash val="solid"/>
+                      <a:round/>
+                      <a:headEnd type="none" w="med" len="med"/>
+                      <a:tailEnd type="none" w="med" len="med"/>
+                    </a:lnT>
+                    <a:lnB w="12700" cap="flat" cmpd="sng" algn="ctr">
+                      <a:solidFill>
+                        <a:srgbClr val="DCE1E7"/>
+                      </a:solidFill>
+                      <a:prstDash val="solid"/>
+                      <a:round/>
+                      <a:headEnd type="none" w="med" len="med"/>
+                      <a:tailEnd type="none" w="med" len="med"/>
+                    </a:lnB>
+                    <a:solidFill>
+                      <a:srgbClr val="FFFFFF"/>
+                    </a:solidFill>
+                  </a:tcPr>
+                </a:tc>
+                <a:tc>
+                  <a:txBody>
+                    <a:bodyPr/>
+                    <a:lstStyle/>
+                    <a:p>
+                      <a:pPr indent="0" marL="0">
+                        <a:buNone/>
+                      </a:pPr>
+                      <a:r>
+                        <a:rPr lang="en-US" sz="1050" dirty="0">
+                          <a:solidFill>
+                            <a:srgbClr val="1F2530"/>
+                          </a:solidFill>
+                          <a:latin typeface="Noto Sans KR" pitchFamily="34" charset="0"/>
+                          <a:ea typeface="Noto Sans KR" pitchFamily="34" charset="-122"/>
+                          <a:cs typeface="Noto Sans KR" pitchFamily="34" charset="-120"/>
+                        </a:rPr>
+                        <a:t>AI/BI Genie</a:t>
+                      </a:r>
+                      <a:endParaRPr lang="en-US" sz="1050" dirty="0">
+                        <a:latin typeface="Noto Sans KR" charset="0"/>
+                        <a:ea typeface="Noto Sans KR" charset="0"/>
+                        <a:cs typeface="Noto Sans KR" charset="0"/>
+                      </a:endParaRPr>
+                    </a:p>
+                  </a:txBody>
+                  <a:tcPr marL="91440" marR="91440" marT="91440" marB="91440" anchor="mid">
+                    <a:lnL w="12700" cap="flat" cmpd="sng" algn="ctr">
+                      <a:solidFill>
+                        <a:srgbClr val="DCE1E7"/>
+                      </a:solidFill>
+                      <a:prstDash val="solid"/>
+                      <a:round/>
+                      <a:headEnd type="none" w="med" len="med"/>
+                      <a:tailEnd type="none" w="med" len="med"/>
+                    </a:lnL>
+                    <a:lnR w="12700" cap="flat" cmpd="sng" algn="ctr">
+                      <a:solidFill>
+                        <a:srgbClr val="DCE1E7"/>
+                      </a:solidFill>
+                      <a:prstDash val="solid"/>
+                      <a:round/>
+                      <a:headEnd type="none" w="med" len="med"/>
+                      <a:tailEnd type="none" w="med" len="med"/>
+                    </a:lnR>
+                    <a:lnT w="12700" cap="flat" cmpd="sng" algn="ctr">
+                      <a:solidFill>
+                        <a:srgbClr val="DCE1E7"/>
+                      </a:solidFill>
+                      <a:prstDash val="solid"/>
+                      <a:round/>
+                      <a:headEnd type="none" w="med" len="med"/>
+                      <a:tailEnd type="none" w="med" len="med"/>
+                    </a:lnT>
+                    <a:lnB w="12700" cap="flat" cmpd="sng" algn="ctr">
+                      <a:solidFill>
+                        <a:srgbClr val="DCE1E7"/>
+                      </a:solidFill>
+                      <a:prstDash val="solid"/>
+                      <a:round/>
+                      <a:headEnd type="none" w="med" len="med"/>
+                      <a:tailEnd type="none" w="med" len="med"/>
+                    </a:lnB>
+                    <a:solidFill>
+                      <a:srgbClr val="FFFFFF"/>
+                    </a:solidFill>
+                  </a:tcPr>
+                </a:tc>
+                <a:tc>
+                  <a:txBody>
+                    <a:bodyPr/>
+                    <a:lstStyle/>
+                    <a:p>
+                      <a:pPr indent="0" marL="0">
+                        <a:buNone/>
+                      </a:pPr>
+                      <a:r>
+                        <a:rPr lang="en-US" sz="1050" dirty="0">
+                          <a:solidFill>
+                            <a:srgbClr val="1F2530"/>
+                          </a:solidFill>
+                          <a:latin typeface="Noto Sans KR" pitchFamily="34" charset="0"/>
+                          <a:ea typeface="Noto Sans KR" pitchFamily="34" charset="-122"/>
+                          <a:cs typeface="Noto Sans KR" pitchFamily="34" charset="-120"/>
+                        </a:rPr>
+                        <a:t>자연어 질문과 데이터 기반 답변</a:t>
+                      </a:r>
+                      <a:endParaRPr lang="en-US" sz="1050" dirty="0">
+                        <a:latin typeface="Noto Sans KR" charset="0"/>
+                        <a:ea typeface="Noto Sans KR" charset="0"/>
+                        <a:cs typeface="Noto Sans KR" charset="0"/>
+                      </a:endParaRPr>
+                    </a:p>
+                  </a:txBody>
+                  <a:tcPr marL="91440" marR="91440" marT="91440" marB="91440" anchor="mid">
+                    <a:lnL w="12700" cap="flat" cmpd="sng" algn="ctr">
+                      <a:solidFill>
+                        <a:srgbClr val="DCE1E7"/>
+                      </a:solidFill>
+                      <a:prstDash val="solid"/>
+                      <a:round/>
+                      <a:headEnd type="none" w="med" len="med"/>
+                      <a:tailEnd type="none" w="med" len="med"/>
+                    </a:lnL>
+                    <a:lnR w="12700" cap="flat" cmpd="sng" algn="ctr">
+                      <a:solidFill>
+                        <a:srgbClr val="DCE1E7"/>
+                      </a:solidFill>
+                      <a:prstDash val="solid"/>
+                      <a:round/>
+                      <a:headEnd type="none" w="med" len="med"/>
+                      <a:tailEnd type="none" w="med" len="med"/>
+                    </a:lnR>
+                    <a:lnT w="12700" cap="flat" cmpd="sng" algn="ctr">
+                      <a:solidFill>
+                        <a:srgbClr val="DCE1E7"/>
+                      </a:solidFill>
+                      <a:prstDash val="solid"/>
+                      <a:round/>
+                      <a:headEnd type="none" w="med" len="med"/>
+                      <a:tailEnd type="none" w="med" len="med"/>
+                    </a:lnT>
+                    <a:lnB w="12700" cap="flat" cmpd="sng" algn="ctr">
+                      <a:solidFill>
+                        <a:srgbClr val="DCE1E7"/>
+                      </a:solidFill>
+                      <a:prstDash val="solid"/>
+                      <a:round/>
+                      <a:headEnd type="none" w="med" len="med"/>
+                      <a:tailEnd type="none" w="med" len="med"/>
+                    </a:lnB>
+                    <a:solidFill>
+                      <a:srgbClr val="FFFFFF"/>
+                    </a:solidFill>
+                  </a:tcPr>
+                </a:tc>
+              </a:tr>
+              <a:tr h="457200">
+                <a:tc>
+                  <a:txBody>
+                    <a:bodyPr/>
+                    <a:lstStyle/>
+                    <a:p>
+                      <a:pPr indent="0" marL="0">
+                        <a:buNone/>
+                      </a:pPr>
+                      <a:r>
+                        <a:rPr lang="en-US" sz="1050" dirty="0">
+                          <a:solidFill>
+                            <a:srgbClr val="1F2530"/>
+                          </a:solidFill>
+                          <a:latin typeface="Noto Sans KR" pitchFamily="34" charset="0"/>
+                          <a:ea typeface="Noto Sans KR" pitchFamily="34" charset="-122"/>
+                          <a:cs typeface="Noto Sans KR" pitchFamily="34" charset="-120"/>
+                        </a:rPr>
+                        <a:t>사람 중심 실행</a:t>
+                      </a:r>
+                      <a:endParaRPr lang="en-US" sz="1050" dirty="0">
+                        <a:latin typeface="Noto Sans KR" charset="0"/>
+                        <a:ea typeface="Noto Sans KR" charset="0"/>
+                        <a:cs typeface="Noto Sans KR" charset="0"/>
+                      </a:endParaRPr>
+                    </a:p>
+                  </a:txBody>
+                  <a:tcPr marL="91440" marR="91440" marT="91440" marB="91440" anchor="mid">
+                    <a:lnL w="12700" cap="flat" cmpd="sng" algn="ctr">
+                      <a:solidFill>
+                        <a:srgbClr val="DCE1E7"/>
+                      </a:solidFill>
+                      <a:prstDash val="solid"/>
+                      <a:round/>
+                      <a:headEnd type="none" w="med" len="med"/>
+                      <a:tailEnd type="none" w="med" len="med"/>
+                    </a:lnL>
+                    <a:lnR w="12700" cap="flat" cmpd="sng" algn="ctr">
+                      <a:solidFill>
+                        <a:srgbClr val="DCE1E7"/>
+                      </a:solidFill>
+                      <a:prstDash val="solid"/>
+                      <a:round/>
+                      <a:headEnd type="none" w="med" len="med"/>
+                      <a:tailEnd type="none" w="med" len="med"/>
+                    </a:lnR>
+                    <a:lnT w="12700" cap="flat" cmpd="sng" algn="ctr">
+                      <a:solidFill>
+                        <a:srgbClr val="DCE1E7"/>
+                      </a:solidFill>
+                      <a:prstDash val="solid"/>
+                      <a:round/>
+                      <a:headEnd type="none" w="med" len="med"/>
+                      <a:tailEnd type="none" w="med" len="med"/>
+                    </a:lnT>
+                    <a:lnB w="12700" cap="flat" cmpd="sng" algn="ctr">
+                      <a:solidFill>
+                        <a:srgbClr val="DCE1E7"/>
+                      </a:solidFill>
+                      <a:prstDash val="solid"/>
+                      <a:round/>
+                      <a:headEnd type="none" w="med" len="med"/>
+                      <a:tailEnd type="none" w="med" len="med"/>
+                    </a:lnB>
+                    <a:solidFill>
+                      <a:srgbClr val="FFFFFF"/>
+                    </a:solidFill>
+                  </a:tcPr>
+                </a:tc>
+                <a:tc>
+                  <a:txBody>
+                    <a:bodyPr/>
+                    <a:lstStyle/>
+                    <a:p>
+                      <a:pPr indent="0" marL="0">
+                        <a:buNone/>
+                      </a:pPr>
+                      <a:r>
+                        <a:rPr lang="en-US" sz="1050" dirty="0">
+                          <a:solidFill>
+                            <a:srgbClr val="1F2530"/>
+                          </a:solidFill>
+                          <a:latin typeface="Noto Sans KR" pitchFamily="34" charset="0"/>
+                          <a:ea typeface="Noto Sans KR" pitchFamily="34" charset="-122"/>
+                          <a:cs typeface="Noto Sans KR" pitchFamily="34" charset="-120"/>
+                        </a:rPr>
+                        <a:t>Databricks Apps + Lakebase</a:t>
+                      </a:r>
+                      <a:endParaRPr lang="en-US" sz="1050" dirty="0">
+                        <a:latin typeface="Noto Sans KR" charset="0"/>
+                        <a:ea typeface="Noto Sans KR" charset="0"/>
+                        <a:cs typeface="Noto Sans KR" charset="0"/>
+                      </a:endParaRPr>
+                    </a:p>
+                  </a:txBody>
+                  <a:tcPr marL="91440" marR="91440" marT="91440" marB="91440" anchor="mid">
+                    <a:lnL w="12700" cap="flat" cmpd="sng" algn="ctr">
+                      <a:solidFill>
+                        <a:srgbClr val="DCE1E7"/>
+                      </a:solidFill>
+                      <a:prstDash val="solid"/>
+                      <a:round/>
+                      <a:headEnd type="none" w="med" len="med"/>
+                      <a:tailEnd type="none" w="med" len="med"/>
+                    </a:lnL>
+                    <a:lnR w="12700" cap="flat" cmpd="sng" algn="ctr">
+                      <a:solidFill>
+                        <a:srgbClr val="DCE1E7"/>
+                      </a:solidFill>
+                      <a:prstDash val="solid"/>
+                      <a:round/>
+                      <a:headEnd type="none" w="med" len="med"/>
+                      <a:tailEnd type="none" w="med" len="med"/>
+                    </a:lnR>
+                    <a:lnT w="12700" cap="flat" cmpd="sng" algn="ctr">
+                      <a:solidFill>
+                        <a:srgbClr val="DCE1E7"/>
+                      </a:solidFill>
+                      <a:prstDash val="solid"/>
+                      <a:round/>
+                      <a:headEnd type="none" w="med" len="med"/>
+                      <a:tailEnd type="none" w="med" len="med"/>
+                    </a:lnT>
+                    <a:lnB w="12700" cap="flat" cmpd="sng" algn="ctr">
+                      <a:solidFill>
+                        <a:srgbClr val="DCE1E7"/>
+                      </a:solidFill>
+                      <a:prstDash val="solid"/>
+                      <a:round/>
+                      <a:headEnd type="none" w="med" len="med"/>
+                      <a:tailEnd type="none" w="med" len="med"/>
+                    </a:lnB>
+                    <a:solidFill>
+                      <a:srgbClr val="FFFFFF"/>
+                    </a:solidFill>
+                  </a:tcPr>
+                </a:tc>
+                <a:tc>
+                  <a:txBody>
+                    <a:bodyPr/>
+                    <a:lstStyle/>
+                    <a:p>
+                      <a:pPr indent="0" marL="0">
+                        <a:buNone/>
+                      </a:pPr>
+                      <a:r>
+                        <a:rPr lang="en-US" sz="1050" dirty="0">
+                          <a:solidFill>
+                            <a:srgbClr val="1F2530"/>
+                          </a:solidFill>
+                          <a:latin typeface="Noto Sans KR" pitchFamily="34" charset="0"/>
+                          <a:ea typeface="Noto Sans KR" pitchFamily="34" charset="-122"/>
+                          <a:cs typeface="Noto Sans KR" pitchFamily="34" charset="-120"/>
+                        </a:rPr>
+                        <a:t>시험안 → 담당자 승인 → 결정 기록</a:t>
+                      </a:r>
+                      <a:endParaRPr lang="en-US" sz="1050" dirty="0">
+                        <a:latin typeface="Noto Sans KR" charset="0"/>
+                        <a:ea typeface="Noto Sans KR" charset="0"/>
+                        <a:cs typeface="Noto Sans KR" charset="0"/>
+                      </a:endParaRPr>
+                    </a:p>
+                  </a:txBody>
+                  <a:tcPr marL="91440" marR="91440" marT="91440" marB="91440" anchor="mid">
+                    <a:lnL w="12700" cap="flat" cmpd="sng" algn="ctr">
+                      <a:solidFill>
+                        <a:srgbClr val="DCE1E7"/>
+                      </a:solidFill>
+                      <a:prstDash val="solid"/>
+                      <a:round/>
+                      <a:headEnd type="none" w="med" len="med"/>
+                      <a:tailEnd type="none" w="med" len="med"/>
+                    </a:lnL>
+                    <a:lnR w="12700" cap="flat" cmpd="sng" algn="ctr">
+                      <a:solidFill>
+                        <a:srgbClr val="DCE1E7"/>
+                      </a:solidFill>
+                      <a:prstDash val="solid"/>
+                      <a:round/>
+                      <a:headEnd type="none" w="med" len="med"/>
+                      <a:tailEnd type="none" w="med" len="med"/>
+                    </a:lnR>
+                    <a:lnT w="12700" cap="flat" cmpd="sng" algn="ctr">
+                      <a:solidFill>
+                        <a:srgbClr val="DCE1E7"/>
+                      </a:solidFill>
+                      <a:prstDash val="solid"/>
+                      <a:round/>
+                      <a:headEnd type="none" w="med" len="med"/>
+                      <a:tailEnd type="none" w="med" len="med"/>
+                    </a:lnT>
+                    <a:lnB w="12700" cap="flat" cmpd="sng" algn="ctr">
+                      <a:solidFill>
+                        <a:srgbClr val="DCE1E7"/>
+                      </a:solidFill>
+                      <a:prstDash val="solid"/>
+                      <a:round/>
+                      <a:headEnd type="none" w="med" len="med"/>
+                      <a:tailEnd type="none" w="med" len="med"/>
+                    </a:lnB>
+                    <a:solidFill>
+                      <a:srgbClr val="FFFFFF"/>
+                    </a:solidFill>
+                  </a:tcPr>
+                </a:tc>
+              </a:tr>
+              <a:tr h="457200">
+                <a:tc>
+                  <a:txBody>
+                    <a:bodyPr/>
+                    <a:lstStyle/>
+                    <a:p>
+                      <a:pPr indent="0" marL="0">
+                        <a:buNone/>
+                      </a:pPr>
+                      <a:r>
+                        <a:rPr lang="en-US" sz="1050" dirty="0">
+                          <a:solidFill>
+                            <a:srgbClr val="1F2530"/>
+                          </a:solidFill>
+                          <a:latin typeface="Noto Sans KR" pitchFamily="34" charset="0"/>
+                          <a:ea typeface="Noto Sans KR" pitchFamily="34" charset="-122"/>
+                          <a:cs typeface="Noto Sans KR" pitchFamily="34" charset="-120"/>
+                        </a:rPr>
+                        <a:t>AI 비용 통제</a:t>
+                      </a:r>
+                      <a:endParaRPr lang="en-US" sz="1050" dirty="0">
+                        <a:latin typeface="Noto Sans KR" charset="0"/>
+                        <a:ea typeface="Noto Sans KR" charset="0"/>
+                        <a:cs typeface="Noto Sans KR" charset="0"/>
+                      </a:endParaRPr>
+                    </a:p>
+                  </a:txBody>
+                  <a:tcPr marL="91440" marR="91440" marT="91440" marB="91440" anchor="mid">
+                    <a:lnL w="12700" cap="flat" cmpd="sng" algn="ctr">
+                      <a:solidFill>
+                        <a:srgbClr val="DCE1E7"/>
+                      </a:solidFill>
+                      <a:prstDash val="solid"/>
+                      <a:round/>
+                      <a:headEnd type="none" w="med" len="med"/>
+                      <a:tailEnd type="none" w="med" len="med"/>
+                    </a:lnL>
+                    <a:lnR w="12700" cap="flat" cmpd="sng" algn="ctr">
+                      <a:solidFill>
+                        <a:srgbClr val="DCE1E7"/>
+                      </a:solidFill>
+                      <a:prstDash val="solid"/>
+                      <a:round/>
+                      <a:headEnd type="none" w="med" len="med"/>
+                      <a:tailEnd type="none" w="med" len="med"/>
+                    </a:lnR>
+                    <a:lnT w="12700" cap="flat" cmpd="sng" algn="ctr">
+                      <a:solidFill>
+                        <a:srgbClr val="DCE1E7"/>
+                      </a:solidFill>
+                      <a:prstDash val="solid"/>
+                      <a:round/>
+                      <a:headEnd type="none" w="med" len="med"/>
+                      <a:tailEnd type="none" w="med" len="med"/>
+                    </a:lnT>
+                    <a:lnB w="12700" cap="flat" cmpd="sng" algn="ctr">
+                      <a:solidFill>
+                        <a:srgbClr val="DCE1E7"/>
+                      </a:solidFill>
+                      <a:prstDash val="solid"/>
+                      <a:round/>
+                      <a:headEnd type="none" w="med" len="med"/>
+                      <a:tailEnd type="none" w="med" len="med"/>
+                    </a:lnB>
+                    <a:solidFill>
+                      <a:srgbClr val="FFFFFF"/>
+                    </a:solidFill>
+                  </a:tcPr>
+                </a:tc>
+                <a:tc>
+                  <a:txBody>
+                    <a:bodyPr/>
+                    <a:lstStyle/>
+                    <a:p>
+                      <a:pPr indent="0" marL="0">
+                        <a:buNone/>
+                      </a:pPr>
+                      <a:r>
+                        <a:rPr lang="en-US" sz="1050" dirty="0">
+                          <a:solidFill>
+                            <a:srgbClr val="1F2530"/>
+                          </a:solidFill>
+                          <a:latin typeface="Noto Sans KR" pitchFamily="34" charset="0"/>
+                          <a:ea typeface="Noto Sans KR" pitchFamily="34" charset="-122"/>
+                          <a:cs typeface="Noto Sans KR" pitchFamily="34" charset="-120"/>
+                        </a:rPr>
+                        <a:t>Unity AI Gateway</a:t>
+                      </a:r>
+                      <a:endParaRPr lang="en-US" sz="1050" dirty="0">
+                        <a:latin typeface="Noto Sans KR" charset="0"/>
+                        <a:ea typeface="Noto Sans KR" charset="0"/>
+                        <a:cs typeface="Noto Sans KR" charset="0"/>
+                      </a:endParaRPr>
+                    </a:p>
+                  </a:txBody>
+                  <a:tcPr marL="91440" marR="91440" marT="91440" marB="91440" anchor="mid">
+                    <a:lnL w="12700" cap="flat" cmpd="sng" algn="ctr">
+                      <a:solidFill>
+                        <a:srgbClr val="DCE1E7"/>
+                      </a:solidFill>
+                      <a:prstDash val="solid"/>
+                      <a:round/>
+                      <a:headEnd type="none" w="med" len="med"/>
+                      <a:tailEnd type="none" w="med" len="med"/>
+                    </a:lnL>
+                    <a:lnR w="12700" cap="flat" cmpd="sng" algn="ctr">
+                      <a:solidFill>
+                        <a:srgbClr val="DCE1E7"/>
+                      </a:solidFill>
+                      <a:prstDash val="solid"/>
+                      <a:round/>
+                      <a:headEnd type="none" w="med" len="med"/>
+                      <a:tailEnd type="none" w="med" len="med"/>
+                    </a:lnR>
+                    <a:lnT w="12700" cap="flat" cmpd="sng" algn="ctr">
+                      <a:solidFill>
+                        <a:srgbClr val="DCE1E7"/>
+                      </a:solidFill>
+                      <a:prstDash val="solid"/>
+                      <a:round/>
+                      <a:headEnd type="none" w="med" len="med"/>
+                      <a:tailEnd type="none" w="med" len="med"/>
+                    </a:lnT>
+                    <a:lnB w="12700" cap="flat" cmpd="sng" algn="ctr">
+                      <a:solidFill>
+                        <a:srgbClr val="DCE1E7"/>
+                      </a:solidFill>
+                      <a:prstDash val="solid"/>
+                      <a:round/>
+                      <a:headEnd type="none" w="med" len="med"/>
+                      <a:tailEnd type="none" w="med" len="med"/>
+                    </a:lnB>
+                    <a:solidFill>
+                      <a:srgbClr val="FFFFFF"/>
+                    </a:solidFill>
+                  </a:tcPr>
+                </a:tc>
+                <a:tc>
+                  <a:txBody>
+                    <a:bodyPr/>
+                    <a:lstStyle/>
+                    <a:p>
+                      <a:pPr indent="0" marL="0">
+                        <a:buNone/>
+                      </a:pPr>
+                      <a:r>
+                        <a:rPr lang="en-US" sz="1050" dirty="0">
+                          <a:solidFill>
+                            <a:srgbClr val="1F2530"/>
+                          </a:solidFill>
+                          <a:latin typeface="Noto Sans KR" pitchFamily="34" charset="0"/>
+                          <a:ea typeface="Noto Sans KR" pitchFamily="34" charset="-122"/>
+                          <a:cs typeface="Noto Sans KR" pitchFamily="34" charset="-120"/>
+                        </a:rPr>
+                        <a:t>요청자·사용량·비용·차단 3건 증거</a:t>
+                      </a:r>
+                      <a:endParaRPr lang="en-US" sz="1050" dirty="0">
+                        <a:latin typeface="Noto Sans KR" charset="0"/>
+                        <a:ea typeface="Noto Sans KR" charset="0"/>
+                        <a:cs typeface="Noto Sans KR" charset="0"/>
+                      </a:endParaRPr>
+                    </a:p>
+                  </a:txBody>
+                  <a:tcPr marL="91440" marR="91440" marT="91440" marB="91440" anchor="mid">
+                    <a:lnL w="12700" cap="flat" cmpd="sng" algn="ctr">
+                      <a:solidFill>
+                        <a:srgbClr val="DCE1E7"/>
+                      </a:solidFill>
+                      <a:prstDash val="solid"/>
+                      <a:round/>
+                      <a:headEnd type="none" w="med" len="med"/>
+                      <a:tailEnd type="none" w="med" len="med"/>
+                    </a:lnL>
+                    <a:lnR w="12700" cap="flat" cmpd="sng" algn="ctr">
+                      <a:solidFill>
+                        <a:srgbClr val="DCE1E7"/>
+                      </a:solidFill>
+                      <a:prstDash val="solid"/>
+                      <a:round/>
+                      <a:headEnd type="none" w="med" len="med"/>
+                      <a:tailEnd type="none" w="med" len="med"/>
+                    </a:lnR>
+                    <a:lnT w="12700" cap="flat" cmpd="sng" algn="ctr">
+                      <a:solidFill>
+                        <a:srgbClr val="DCE1E7"/>
+                      </a:solidFill>
+                      <a:prstDash val="solid"/>
+                      <a:round/>
+                      <a:headEnd type="none" w="med" len="med"/>
+                      <a:tailEnd type="none" w="med" len="med"/>
+                    </a:lnT>
+                    <a:lnB w="12700" cap="flat" cmpd="sng" algn="ctr">
+                      <a:solidFill>
+                        <a:srgbClr val="DCE1E7"/>
+                      </a:solidFill>
+                      <a:prstDash val="solid"/>
+                      <a:round/>
+                      <a:headEnd type="none" w="med" len="med"/>
+                      <a:tailEnd type="none" w="med" len="med"/>
+                    </a:lnB>
+                    <a:solidFill>
+                      <a:srgbClr val="FFFFFF"/>
+                    </a:solidFill>
+                  </a:tcPr>
+                </a:tc>
+              </a:tr>
+              <a:tr h="457200">
+                <a:tc>
+                  <a:txBody>
+                    <a:bodyPr/>
+                    <a:lstStyle/>
+                    <a:p>
+                      <a:pPr indent="0" marL="0">
+                        <a:buNone/>
+                      </a:pPr>
+                      <a:r>
+                        <a:rPr lang="en-US" sz="1050" dirty="0">
+                          <a:solidFill>
+                            <a:srgbClr val="1F2530"/>
+                          </a:solidFill>
+                          <a:latin typeface="Noto Sans KR" pitchFamily="34" charset="0"/>
+                          <a:ea typeface="Noto Sans KR" pitchFamily="34" charset="-122"/>
+                          <a:cs typeface="Noto Sans KR" pitchFamily="34" charset="-120"/>
+                        </a:rPr>
+                        <a:t>경제적인 운영</a:t>
+                      </a:r>
+                      <a:endParaRPr lang="en-US" sz="1050" dirty="0">
+                        <a:latin typeface="Noto Sans KR" charset="0"/>
+                        <a:ea typeface="Noto Sans KR" charset="0"/>
+                        <a:cs typeface="Noto Sans KR" charset="0"/>
+                      </a:endParaRPr>
+                    </a:p>
+                  </a:txBody>
+                  <a:tcPr marL="91440" marR="91440" marT="91440" marB="91440" anchor="mid">
+                    <a:lnL w="12700" cap="flat" cmpd="sng" algn="ctr">
+                      <a:solidFill>
+                        <a:srgbClr val="DCE1E7"/>
+                      </a:solidFill>
+                      <a:prstDash val="solid"/>
+                      <a:round/>
+                      <a:headEnd type="none" w="med" len="med"/>
+                      <a:tailEnd type="none" w="med" len="med"/>
+                    </a:lnL>
+                    <a:lnR w="12700" cap="flat" cmpd="sng" algn="ctr">
+                      <a:solidFill>
+                        <a:srgbClr val="DCE1E7"/>
+                      </a:solidFill>
+                      <a:prstDash val="solid"/>
+                      <a:round/>
+                      <a:headEnd type="none" w="med" len="med"/>
+                      <a:tailEnd type="none" w="med" len="med"/>
+                    </a:lnR>
+                    <a:lnT w="12700" cap="flat" cmpd="sng" algn="ctr">
+                      <a:solidFill>
+                        <a:srgbClr val="DCE1E7"/>
+                      </a:solidFill>
+                      <a:prstDash val="solid"/>
+                      <a:round/>
+                      <a:headEnd type="none" w="med" len="med"/>
+                      <a:tailEnd type="none" w="med" len="med"/>
+                    </a:lnT>
+                    <a:lnB w="12700" cap="flat" cmpd="sng" algn="ctr">
+                      <a:solidFill>
+                        <a:srgbClr val="DCE1E7"/>
+                      </a:solidFill>
+                      <a:prstDash val="solid"/>
+                      <a:round/>
+                      <a:headEnd type="none" w="med" len="med"/>
+                      <a:tailEnd type="none" w="med" len="med"/>
+                    </a:lnB>
+                    <a:solidFill>
+                      <a:srgbClr val="FFFFFF"/>
+                    </a:solidFill>
+                  </a:tcPr>
+                </a:tc>
+                <a:tc>
+                  <a:txBody>
+                    <a:bodyPr/>
+                    <a:lstStyle/>
+                    <a:p>
+                      <a:pPr indent="0" marL="0">
+                        <a:buNone/>
+                      </a:pPr>
+                      <a:r>
+                        <a:rPr lang="en-US" sz="1050" dirty="0">
+                          <a:solidFill>
+                            <a:srgbClr val="1F2530"/>
+                          </a:solidFill>
+                          <a:latin typeface="Noto Sans KR" pitchFamily="34" charset="0"/>
+                          <a:ea typeface="Noto Sans KR" pitchFamily="34" charset="-122"/>
+                          <a:cs typeface="Noto Sans KR" pitchFamily="34" charset="-120"/>
+                        </a:rPr>
+                        <a:t>관리형 서비스 + scale-to-zero</a:t>
+                      </a:r>
+                      <a:endParaRPr lang="en-US" sz="1050" dirty="0">
+                        <a:latin typeface="Noto Sans KR" charset="0"/>
+                        <a:ea typeface="Noto Sans KR" charset="0"/>
+                        <a:cs typeface="Noto Sans KR" charset="0"/>
+                      </a:endParaRPr>
+                    </a:p>
+                  </a:txBody>
+                  <a:tcPr marL="91440" marR="91440" marT="91440" marB="91440" anchor="mid">
+                    <a:lnL w="12700" cap="flat" cmpd="sng" algn="ctr">
+                      <a:solidFill>
+                        <a:srgbClr val="DCE1E7"/>
+                      </a:solidFill>
+                      <a:prstDash val="solid"/>
+                      <a:round/>
+                      <a:headEnd type="none" w="med" len="med"/>
+                      <a:tailEnd type="none" w="med" len="med"/>
+                    </a:lnL>
+                    <a:lnR w="12700" cap="flat" cmpd="sng" algn="ctr">
+                      <a:solidFill>
+                        <a:srgbClr val="DCE1E7"/>
+                      </a:solidFill>
+                      <a:prstDash val="solid"/>
+                      <a:round/>
+                      <a:headEnd type="none" w="med" len="med"/>
+                      <a:tailEnd type="none" w="med" len="med"/>
+                    </a:lnR>
+                    <a:lnT w="12700" cap="flat" cmpd="sng" algn="ctr">
+                      <a:solidFill>
+                        <a:srgbClr val="DCE1E7"/>
+                      </a:solidFill>
+                      <a:prstDash val="solid"/>
+                      <a:round/>
+                      <a:headEnd type="none" w="med" len="med"/>
+                      <a:tailEnd type="none" w="med" len="med"/>
+                    </a:lnT>
+                    <a:lnB w="12700" cap="flat" cmpd="sng" algn="ctr">
+                      <a:solidFill>
+                        <a:srgbClr val="DCE1E7"/>
+                      </a:solidFill>
+                      <a:prstDash val="solid"/>
+                      <a:round/>
+                      <a:headEnd type="none" w="med" len="med"/>
+                      <a:tailEnd type="none" w="med" len="med"/>
+                    </a:lnB>
+                    <a:solidFill>
+                      <a:srgbClr val="FFFFFF"/>
+                    </a:solidFill>
+                  </a:tcPr>
+                </a:tc>
+                <a:tc>
+                  <a:txBody>
+                    <a:bodyPr/>
+                    <a:lstStyle/>
+                    <a:p>
+                      <a:pPr indent="0" marL="0">
+                        <a:buNone/>
+                      </a:pPr>
+                      <a:r>
+                        <a:rPr lang="en-US" sz="1050" dirty="0">
+                          <a:solidFill>
+                            <a:srgbClr val="1F2530"/>
+                          </a:solidFill>
+                          <a:latin typeface="Noto Sans KR" pitchFamily="34" charset="0"/>
+                          <a:ea typeface="Noto Sans KR" pitchFamily="34" charset="-122"/>
+                          <a:cs typeface="Noto Sans KR" pitchFamily="34" charset="-120"/>
+                        </a:rPr>
+                        <a:t>Lakebase 유휴 시 축소 및 AI 예산 한도</a:t>
+                      </a:r>
+                      <a:endParaRPr lang="en-US" sz="1050" dirty="0">
+                        <a:latin typeface="Noto Sans KR" charset="0"/>
+                        <a:ea typeface="Noto Sans KR" charset="0"/>
+                        <a:cs typeface="Noto Sans KR" charset="0"/>
+                      </a:endParaRPr>
+                    </a:p>
+                  </a:txBody>
+                  <a:tcPr marL="91440" marR="91440" marT="91440" marB="91440" anchor="mid">
+                    <a:lnL w="12700" cap="flat" cmpd="sng" algn="ctr">
+                      <a:solidFill>
+                        <a:srgbClr val="DCE1E7"/>
+                      </a:solidFill>
+                      <a:prstDash val="solid"/>
+                      <a:round/>
+                      <a:headEnd type="none" w="med" len="med"/>
+                      <a:tailEnd type="none" w="med" len="med"/>
+                    </a:lnL>
+                    <a:lnR w="12700" cap="flat" cmpd="sng" algn="ctr">
+                      <a:solidFill>
+                        <a:srgbClr val="DCE1E7"/>
+                      </a:solidFill>
+                      <a:prstDash val="solid"/>
+                      <a:round/>
+                      <a:headEnd type="none" w="med" len="med"/>
+                      <a:tailEnd type="none" w="med" len="med"/>
+                    </a:lnR>
+                    <a:lnT w="12700" cap="flat" cmpd="sng" algn="ctr">
+                      <a:solidFill>
+                        <a:srgbClr val="DCE1E7"/>
+                      </a:solidFill>
+                      <a:prstDash val="solid"/>
+                      <a:round/>
+                      <a:headEnd type="none" w="med" len="med"/>
+                      <a:tailEnd type="none" w="med" len="med"/>
+                    </a:lnT>
+                    <a:lnB w="12700" cap="flat" cmpd="sng" algn="ctr">
+                      <a:solidFill>
+                        <a:srgbClr val="DCE1E7"/>
+                      </a:solidFill>
+                      <a:prstDash val="solid"/>
+                      <a:round/>
+                      <a:headEnd type="none" w="med" len="med"/>
+                      <a:tailEnd type="none" w="med" len="med"/>
+                    </a:lnB>
+                    <a:solidFill>
+                      <a:srgbClr val="FFFFFF"/>
+                    </a:solidFill>
+                  </a:tcPr>
+                </a:tc>
+              </a:tr>
+            </a:tbl>
+          </a:graphicData>
+        </a:graphic>
+      </p:graphicFrame>
+      <p:sp>
+        <p:nvSpPr>
+          <p:cNvPr id="7" name="Text 3"/>
+          <p:cNvSpPr/>
+          <p:nvPr/>
+        </p:nvSpPr>
+        <p:spPr>
+          <a:xfrm>
+            <a:off x="658368" y="5084064"/>
+            <a:ext cx="914400" cy="219456"/>
+          </a:xfrm>
+          <a:prstGeom prst="rect">
+            <a:avLst/>
+          </a:prstGeom>
+          <a:noFill/>
+          <a:ln/>
+        </p:spPr>
+        <p:txBody>
+          <a:bodyPr wrap="square" lIns="0" tIns="0" rIns="0" bIns="0" rtlCol="0" anchor="ctr">
+            <a:normAutofit/>
+          </a:bodyPr>
+          <a:lstStyle/>
+          <a:p>
+            <a:pPr indent="0" marL="0">
+              <a:buNone/>
+            </a:pPr>
+            <a:r>
+              <a:rPr lang="en-US" sz="900" b="1" dirty="0">
+                <a:solidFill>
+                  <a:srgbClr val="EE3D2C"/>
+                </a:solidFill>
+                <a:latin typeface="Noto Sans KR" pitchFamily="34" charset="0"/>
+                <a:ea typeface="Noto Sans KR" pitchFamily="34" charset="-122"/>
+                <a:cs typeface="Noto Sans KR" pitchFamily="34" charset="-120"/>
+              </a:rPr>
+              <a:t>공식 출처</a:t>
+            </a:r>
+            <a:endParaRPr lang="en-US" sz="900" dirty="0"/>
+          </a:p>
+        </p:txBody>
+      </p:sp>
+      <p:sp>
+        <p:nvSpPr>
+          <p:cNvPr id="8" name="Text 4">
+            <a:hlinkClick r:id="rId2" tooltip=""/>
+          </p:cNvPr>
+          <p:cNvSpPr/>
+          <p:nvPr/>
+        </p:nvSpPr>
+        <p:spPr>
+          <a:xfrm>
+            <a:off x="1627632" y="5047488"/>
+            <a:ext cx="1627632" cy="274320"/>
+          </a:xfrm>
+          <a:prstGeom prst="rect">
+            <a:avLst/>
+          </a:prstGeom>
+          <a:noFill/>
+          <a:ln/>
+        </p:spPr>
+        <p:txBody>
+          <a:bodyPr wrap="square" lIns="0" tIns="0" rIns="0" bIns="0" rtlCol="0" anchor="ctr">
+            <a:normAutofit/>
+          </a:bodyPr>
+          <a:lstStyle/>
+          <a:p>
+            <a:pPr algn="ctr" indent="0" marL="0">
+              <a:buNone/>
+            </a:pPr>
+            <a:r>
+              <a:rPr lang="en-US" sz="870" u="sng" dirty="0">
+                <a:solidFill>
+                  <a:srgbClr val="2272B4"/>
+                </a:solidFill>
+                <a:uFill>
+                  <a:solidFill>
+                    <a:srgbClr val="2272B4"/>
+                  </a:solidFill>
+                </a:uFill>
+                <a:latin typeface="Noto Sans KR" pitchFamily="34" charset="0"/>
+                <a:ea typeface="Noto Sans KR" pitchFamily="34" charset="-122"/>
+                <a:cs typeface="Noto Sans KR" pitchFamily="34" charset="-120"/>
+                <a:hlinkClick r:id="rId2" invalidUrl="" action="" tgtFrame="" tooltip="" history="1" highlightClick="0" endSnd="0">
+                  <a:extLst>
+                    <a:ext uri="{A12FA001-AC4F-418D-AE19-62706E023703}">
+                      <ahyp:hlinkClr xmlns:ahyp="http://schemas.microsoft.com/office/drawing/2018/hyperlinkcolor" val="tx"/>
+                    </a:ext>
+                  </a:extLst>
+                </a:hlinkClick>
+              </a:rPr>
+              <a:t>Unity Catalog</a:t>
+            </a:r>
+            <a:endParaRPr lang="en-US" sz="870" dirty="0"/>
+          </a:p>
+        </p:txBody>
+      </p:sp>
+      <p:sp>
+        <p:nvSpPr>
+          <p:cNvPr id="9" name="Text 5">
+            <a:hlinkClick r:id="rId3" tooltip=""/>
+          </p:cNvPr>
+          <p:cNvSpPr/>
+          <p:nvPr/>
+        </p:nvSpPr>
+        <p:spPr>
+          <a:xfrm>
+            <a:off x="3566160" y="5047488"/>
+            <a:ext cx="1627632" cy="274320"/>
+          </a:xfrm>
+          <a:prstGeom prst="rect">
+            <a:avLst/>
+          </a:prstGeom>
+          <a:noFill/>
+          <a:ln/>
+        </p:spPr>
+        <p:txBody>
+          <a:bodyPr wrap="square" lIns="0" tIns="0" rIns="0" bIns="0" rtlCol="0" anchor="ctr">
+            <a:normAutofit/>
+          </a:bodyPr>
+          <a:lstStyle/>
+          <a:p>
+            <a:pPr algn="ctr" indent="0" marL="0">
+              <a:buNone/>
+            </a:pPr>
+            <a:r>
+              <a:rPr lang="en-US" sz="870" u="sng" dirty="0">
+                <a:solidFill>
+                  <a:srgbClr val="2272B4"/>
+                </a:solidFill>
+                <a:uFill>
+                  <a:solidFill>
+                    <a:srgbClr val="2272B4"/>
+                  </a:solidFill>
+                </a:uFill>
+                <a:latin typeface="Noto Sans KR" pitchFamily="34" charset="0"/>
+                <a:ea typeface="Noto Sans KR" pitchFamily="34" charset="-122"/>
+                <a:cs typeface="Noto Sans KR" pitchFamily="34" charset="-120"/>
+                <a:hlinkClick r:id="rId3" invalidUrl="" action="" tgtFrame="" tooltip="" history="1" highlightClick="0" endSnd="0">
+                  <a:extLst>
+                    <a:ext uri="{A12FA001-AC4F-418D-AE19-62706E023703}">
+                      <ahyp:hlinkClr xmlns:ahyp="http://schemas.microsoft.com/office/drawing/2018/hyperlinkcolor" val="tx"/>
+                    </a:ext>
+                  </a:extLst>
+                </a:hlinkClick>
+              </a:rPr>
+              <a:t>Genie</a:t>
+            </a:r>
+            <a:endParaRPr lang="en-US" sz="870" dirty="0"/>
+          </a:p>
+        </p:txBody>
+      </p:sp>
+      <p:sp>
+        <p:nvSpPr>
+          <p:cNvPr id="10" name="Text 6">
+            <a:hlinkClick r:id="rId4" tooltip=""/>
+          </p:cNvPr>
+          <p:cNvSpPr/>
+          <p:nvPr/>
+        </p:nvSpPr>
+        <p:spPr>
+          <a:xfrm>
+            <a:off x="5504688" y="5047488"/>
+            <a:ext cx="1627632" cy="274320"/>
+          </a:xfrm>
+          <a:prstGeom prst="rect">
+            <a:avLst/>
+          </a:prstGeom>
+          <a:noFill/>
+          <a:ln/>
+        </p:spPr>
+        <p:txBody>
+          <a:bodyPr wrap="square" lIns="0" tIns="0" rIns="0" bIns="0" rtlCol="0" anchor="ctr">
+            <a:normAutofit/>
+          </a:bodyPr>
+          <a:lstStyle/>
+          <a:p>
+            <a:pPr algn="ctr" indent="0" marL="0">
+              <a:buNone/>
+            </a:pPr>
+            <a:r>
+              <a:rPr lang="en-US" sz="870" u="sng" dirty="0">
+                <a:solidFill>
+                  <a:srgbClr val="2272B4"/>
+                </a:solidFill>
+                <a:uFill>
+                  <a:solidFill>
+                    <a:srgbClr val="2272B4"/>
+                  </a:solidFill>
+                </a:uFill>
+                <a:latin typeface="Noto Sans KR" pitchFamily="34" charset="0"/>
+                <a:ea typeface="Noto Sans KR" pitchFamily="34" charset="-122"/>
+                <a:cs typeface="Noto Sans KR" pitchFamily="34" charset="-120"/>
+                <a:hlinkClick r:id="rId4" invalidUrl="" action="" tgtFrame="" tooltip="" history="1" highlightClick="0" endSnd="0">
+                  <a:extLst>
+                    <a:ext uri="{A12FA001-AC4F-418D-AE19-62706E023703}">
+                      <ahyp:hlinkClr xmlns:ahyp="http://schemas.microsoft.com/office/drawing/2018/hyperlinkcolor" val="tx"/>
+                    </a:ext>
+                  </a:extLst>
+                </a:hlinkClick>
+              </a:rPr>
+              <a:t>Databricks Apps</a:t>
+            </a:r>
+            <a:endParaRPr lang="en-US" sz="870" dirty="0"/>
+          </a:p>
+        </p:txBody>
+      </p:sp>
+      <p:sp>
+        <p:nvSpPr>
+          <p:cNvPr id="11" name="Text 7">
+            <a:hlinkClick r:id="rId5" tooltip=""/>
+          </p:cNvPr>
+          <p:cNvSpPr/>
+          <p:nvPr/>
+        </p:nvSpPr>
+        <p:spPr>
+          <a:xfrm>
+            <a:off x="7443216" y="5047488"/>
+            <a:ext cx="1627632" cy="274320"/>
+          </a:xfrm>
+          <a:prstGeom prst="rect">
+            <a:avLst/>
+          </a:prstGeom>
+          <a:noFill/>
+          <a:ln/>
+        </p:spPr>
+        <p:txBody>
+          <a:bodyPr wrap="square" lIns="0" tIns="0" rIns="0" bIns="0" rtlCol="0" anchor="ctr">
+            <a:normAutofit/>
+          </a:bodyPr>
+          <a:lstStyle/>
+          <a:p>
+            <a:pPr algn="ctr" indent="0" marL="0">
+              <a:buNone/>
+            </a:pPr>
+            <a:r>
+              <a:rPr lang="en-US" sz="870" u="sng" dirty="0">
+                <a:solidFill>
+                  <a:srgbClr val="2272B4"/>
+                </a:solidFill>
+                <a:uFill>
+                  <a:solidFill>
+                    <a:srgbClr val="2272B4"/>
+                  </a:solidFill>
+                </a:uFill>
+                <a:latin typeface="Noto Sans KR" pitchFamily="34" charset="0"/>
+                <a:ea typeface="Noto Sans KR" pitchFamily="34" charset="-122"/>
+                <a:cs typeface="Noto Sans KR" pitchFamily="34" charset="-120"/>
+                <a:hlinkClick r:id="rId5" invalidUrl="" action="" tgtFrame="" tooltip="" history="1" highlightClick="0" endSnd="0">
+                  <a:extLst>
+                    <a:ext uri="{A12FA001-AC4F-418D-AE19-62706E023703}">
+                      <ahyp:hlinkClr xmlns:ahyp="http://schemas.microsoft.com/office/drawing/2018/hyperlinkcolor" val="tx"/>
+                    </a:ext>
+                  </a:extLst>
+                </a:hlinkClick>
+              </a:rPr>
+              <a:t>Lakebase</a:t>
+            </a:r>
+            <a:endParaRPr lang="en-US" sz="870" dirty="0"/>
+          </a:p>
+        </p:txBody>
+      </p:sp>
+      <p:sp>
+        <p:nvSpPr>
+          <p:cNvPr id="12" name="Text 8">
+            <a:hlinkClick r:id="rId6" tooltip=""/>
+          </p:cNvPr>
+          <p:cNvSpPr/>
+          <p:nvPr/>
+        </p:nvSpPr>
+        <p:spPr>
+          <a:xfrm>
+            <a:off x="9381744" y="5047488"/>
+            <a:ext cx="1627632" cy="274320"/>
+          </a:xfrm>
+          <a:prstGeom prst="rect">
+            <a:avLst/>
+          </a:prstGeom>
+          <a:noFill/>
+          <a:ln/>
+        </p:spPr>
+        <p:txBody>
+          <a:bodyPr wrap="square" lIns="0" tIns="0" rIns="0" bIns="0" rtlCol="0" anchor="ctr">
+            <a:normAutofit/>
+          </a:bodyPr>
+          <a:lstStyle/>
+          <a:p>
+            <a:pPr algn="ctr" indent="0" marL="0">
+              <a:buNone/>
+            </a:pPr>
+            <a:r>
+              <a:rPr lang="en-US" sz="870" u="sng" dirty="0">
+                <a:solidFill>
+                  <a:srgbClr val="2272B4"/>
+                </a:solidFill>
+                <a:uFill>
+                  <a:solidFill>
+                    <a:srgbClr val="2272B4"/>
+                  </a:solidFill>
+                </a:uFill>
+                <a:latin typeface="Noto Sans KR" pitchFamily="34" charset="0"/>
+                <a:ea typeface="Noto Sans KR" pitchFamily="34" charset="-122"/>
+                <a:cs typeface="Noto Sans KR" pitchFamily="34" charset="-120"/>
+                <a:hlinkClick r:id="rId6" invalidUrl="" action="" tgtFrame="" tooltip="" history="1" highlightClick="0" endSnd="0">
+                  <a:extLst>
+                    <a:ext uri="{A12FA001-AC4F-418D-AE19-62706E023703}">
+                      <ahyp:hlinkClr xmlns:ahyp="http://schemas.microsoft.com/office/drawing/2018/hyperlinkcolor" val="tx"/>
+                    </a:ext>
+                  </a:extLst>
+                </a:hlinkClick>
+              </a:rPr>
+              <a:t>AI governance</a:t>
+            </a:r>
+            <a:endParaRPr lang="en-US" sz="870" dirty="0"/>
+          </a:p>
+        </p:txBody>
+      </p:sp>
+      <p:sp>
+        <p:nvSpPr>
+          <p:cNvPr id="13" name="Shape 9"/>
+          <p:cNvSpPr/>
+          <p:nvPr/>
+        </p:nvSpPr>
+        <p:spPr>
+          <a:xfrm>
+            <a:off x="804672" y="5504688"/>
+            <a:ext cx="10570464" cy="566928"/>
+          </a:xfrm>
+          <a:prstGeom prst="roundRect">
+            <a:avLst>
+              <a:gd name="adj" fmla="val 12903"/>
+            </a:avLst>
+          </a:prstGeom>
+          <a:solidFill>
+            <a:srgbClr val="EDF4FA"/>
+          </a:solidFill>
+          <a:ln w="12700">
+            <a:solidFill>
+              <a:srgbClr val="B8D2E5"/>
+            </a:solidFill>
+            <a:prstDash val="solid"/>
+          </a:ln>
+        </p:spPr>
+      </p:sp>
+      <p:sp>
+        <p:nvSpPr>
+          <p:cNvPr id="14" name="Text 10"/>
+          <p:cNvSpPr/>
+          <p:nvPr/>
+        </p:nvSpPr>
+        <p:spPr>
+          <a:xfrm>
+            <a:off x="1024128" y="5504688"/>
+            <a:ext cx="10131552" cy="566928"/>
+          </a:xfrm>
+          <a:prstGeom prst="rect">
+            <a:avLst/>
+          </a:prstGeom>
+          <a:noFill/>
+          <a:ln/>
+        </p:spPr>
+        <p:txBody>
+          <a:bodyPr wrap="square" lIns="0" tIns="0" rIns="0" bIns="0" rtlCol="0" anchor="ctr">
+            <a:normAutofit/>
+          </a:bodyPr>
+          <a:lstStyle/>
+          <a:p>
+            <a:pPr algn="ctr" indent="0" marL="0">
+              <a:buNone/>
+            </a:pPr>
+            <a:r>
+              <a:rPr lang="en-US" sz="1250" b="1" dirty="0">
+                <a:solidFill>
+                  <a:srgbClr val="2272B4"/>
+                </a:solidFill>
+                <a:latin typeface="Noto Sans KR" pitchFamily="34" charset="0"/>
+                <a:ea typeface="Noto Sans KR" pitchFamily="34" charset="-122"/>
+                <a:cs typeface="Noto Sans KR" pitchFamily="34" charset="-120"/>
+              </a:rPr>
+              <a:t>데이터·AI 자산 거버넌스는 Unity Catalog, AI 사용량·비용 통제는 Unity AI Gateway가 담당합니다.</a:t>
+            </a:r>
+            <a:endParaRPr lang="en-US" sz="1250" dirty="0"/>
+          </a:p>
+        </p:txBody>
+      </p:sp>
+      <p:sp>
+        <p:nvSpPr>
+          <p:cNvPr id="25" name="Slide Number Placeholder 0"/>
+          <p:cNvSpPr>
+            <a:spLocks noGrp="1"/>
+          </p:cNvSpPr>
+          <p:nvPr>
+            <p:ph type="sldNum" sz="quarter" idx="4294967295"/>
+          </p:nvPr>
+        </p:nvSpPr>
+        <p:spPr>
+          <a:xfrm>
+            <a:off x="11750040" y="6565392"/>
+            <a:ext cx="164592" cy="164592"/>
+          </a:xfrm>
+          <a:prstGeom prst="rect">
+            <a:avLst/>
+          </a:prstGeom>
+          <a:extLst>
+            <a:ext uri="{C572A759-6A51-4108-AA02-DFA0A04FC94B}">
+              <ma14:wrappingTextBoxFlag xmlns:ma14="http://schemas.microsoft.com/office/mac/drawingml/2011/main" val="0"/>
+            </a:ext>
+          </a:extLst>
+        </p:spPr>
+        <p:txBody>
+          <a:bodyPr lIns="0" tIns="0" rIns="0" bIns="0"/>
+          <a:lstStyle>
+            <a:lvl1pPr>
+              <a:defRPr sz="750">
+                <a:solidFill>
+                  <a:srgbClr val="5B6573"/>
+                </a:solidFill>
+                <a:latin typeface="Noto Sans KR"/>
+                <a:ea typeface="Noto Sans KR"/>
+                <a:cs typeface="Noto Sans KR"/>
+              </a:defRPr>
+            </a:lvl1pPr>
+          </a:lstStyle>
+          <a:p>
+            <a:pPr algn="l"/>
+            <a:fld id="{F7021451-1387-4CA6-816F-3879F97B5CBC}" type="slidenum">
+              <a:rPr b="0" lang="en-US"/>
+              <a:t>16</a:t>
             </a:fld>
             <a:endParaRPr lang="en-US"/>
           </a:p>
@@ -13079,6 +16424,1474 @@
 <file path=ppt/slides/slide7.xml><?xml version="1.0" encoding="utf-8"?>
 <p:sld xmlns:a="http://schemas.openxmlformats.org/drawingml/2006/main" xmlns:r="http://schemas.openxmlformats.org/officeDocument/2006/relationships" xmlns:p="http://schemas.openxmlformats.org/presentationml/2006/main">
   <p:cSld name="Slide 7">
+    <p:spTree>
+      <p:nvGrpSpPr>
+        <p:cNvPr id="1" name=""/>
+        <p:cNvGrpSpPr/>
+        <p:nvPr/>
+      </p:nvGrpSpPr>
+      <p:grpSpPr>
+        <a:xfrm>
+          <a:off x="0" y="0"/>
+          <a:ext cx="0" cy="0"/>
+          <a:chOff x="0" y="0"/>
+          <a:chExt cx="0" cy="0"/>
+        </a:xfrm>
+      </p:grpSpPr>
+      <p:sp>
+        <p:nvSpPr>
+          <p:cNvPr id="2" name="Text 0"/>
+          <p:cNvSpPr/>
+          <p:nvPr/>
+        </p:nvSpPr>
+        <p:spPr>
+          <a:xfrm>
+            <a:off x="566928" y="347472"/>
+            <a:ext cx="4114800" cy="274320"/>
+          </a:xfrm>
+          <a:prstGeom prst="rect">
+            <a:avLst/>
+          </a:prstGeom>
+          <a:noFill/>
+          <a:ln/>
+        </p:spPr>
+        <p:txBody>
+          <a:bodyPr wrap="square" lIns="0" tIns="0" rIns="0" bIns="0" rtlCol="0" anchor="ctr">
+            <a:normAutofit/>
+          </a:bodyPr>
+          <a:lstStyle/>
+          <a:p>
+            <a:pPr indent="0" marL="0">
+              <a:buNone/>
+            </a:pPr>
+            <a:r>
+              <a:rPr lang="en-US" sz="900" b="1" spc="180" kern="0" dirty="0">
+                <a:solidFill>
+                  <a:srgbClr val="EE3D2C"/>
+                </a:solidFill>
+                <a:latin typeface="Noto Sans KR" pitchFamily="34" charset="0"/>
+                <a:ea typeface="Noto Sans KR" pitchFamily="34" charset="-122"/>
+                <a:cs typeface="Noto Sans KR" pitchFamily="34" charset="-120"/>
+              </a:rPr>
+              <a:t>WHY DATABRICKS</a:t>
+            </a:r>
+            <a:endParaRPr lang="en-US" sz="900" dirty="0"/>
+          </a:p>
+        </p:txBody>
+      </p:sp>
+      <p:pic>
+        <p:nvPicPr>
+          <p:cNvPr id="3" name="Image 0" descr="Nimbus customer logo">    </p:cNvPr>
+          <p:cNvPicPr>
+            <a:picLocks noChangeAspect="1"/>
+          </p:cNvPicPr>
+          <p:nvPr/>
+        </p:nvPicPr>
+        <p:blipFill>
+          <a:blip r:embed="rId1"/>
+          <a:srcRect l="0" r="0" t="0" b="0"/>
+          <a:stretch/>
+        </p:blipFill>
+        <p:spPr>
+          <a:xfrm>
+            <a:off x="9985248" y="374904"/>
+            <a:ext cx="1426464" cy="804672"/>
+          </a:xfrm>
+          <a:prstGeom prst="rect">
+            <a:avLst/>
+          </a:prstGeom>
+        </p:spPr>
+      </p:pic>
+      <p:sp>
+        <p:nvSpPr>
+          <p:cNvPr id="4" name="Text 1"/>
+          <p:cNvSpPr/>
+          <p:nvPr/>
+        </p:nvSpPr>
+        <p:spPr>
+          <a:xfrm>
+            <a:off x="566928" y="658368"/>
+            <a:ext cx="9326880" cy="658368"/>
+          </a:xfrm>
+          <a:prstGeom prst="rect">
+            <a:avLst/>
+          </a:prstGeom>
+          <a:noFill/>
+          <a:ln/>
+        </p:spPr>
+        <p:txBody>
+          <a:bodyPr wrap="square" lIns="0" tIns="0" rIns="0" bIns="0" rtlCol="0" anchor="t">
+            <a:normAutofit/>
+          </a:bodyPr>
+          <a:lstStyle/>
+          <a:p>
+            <a:pPr indent="0" marL="0">
+              <a:buNone/>
+            </a:pPr>
+            <a:r>
+              <a:rPr lang="en-US" sz="2800" b="1" dirty="0">
+                <a:solidFill>
+                  <a:srgbClr val="1F2530"/>
+                </a:solidFill>
+                <a:latin typeface="Noto Sans KR" pitchFamily="34" charset="0"/>
+                <a:ea typeface="Noto Sans KR" pitchFamily="34" charset="-122"/>
+                <a:cs typeface="Noto Sans KR" pitchFamily="34" charset="-120"/>
+              </a:rPr>
+              <a:t>하나의 데이터·AI 플랫폼으로 더 빠르고 지속 가능하게 운영합니다</a:t>
+            </a:r>
+            <a:endParaRPr lang="en-US" sz="2800" dirty="0"/>
+          </a:p>
+        </p:txBody>
+      </p:sp>
+      <p:sp>
+        <p:nvSpPr>
+          <p:cNvPr id="5" name="Text 2"/>
+          <p:cNvSpPr/>
+          <p:nvPr/>
+        </p:nvSpPr>
+        <p:spPr>
+          <a:xfrm>
+            <a:off x="585216" y="1353312"/>
+            <a:ext cx="10698480" cy="384048"/>
+          </a:xfrm>
+          <a:prstGeom prst="rect">
+            <a:avLst/>
+          </a:prstGeom>
+          <a:noFill/>
+          <a:ln/>
+        </p:spPr>
+        <p:txBody>
+          <a:bodyPr wrap="square" lIns="0" tIns="0" rIns="0" bIns="0" rtlCol="0" anchor="t">
+            <a:normAutofit/>
+          </a:bodyPr>
+          <a:lstStyle/>
+          <a:p>
+            <a:pPr indent="0" marL="0">
+              <a:buNone/>
+            </a:pPr>
+            <a:r>
+              <a:rPr lang="en-US" sz="1200" dirty="0">
+                <a:solidFill>
+                  <a:srgbClr val="5B6573"/>
+                </a:solidFill>
+                <a:latin typeface="Noto Sans KR" pitchFamily="34" charset="0"/>
+                <a:ea typeface="Noto Sans KR" pitchFamily="34" charset="-122"/>
+                <a:cs typeface="Noto Sans KR" pitchFamily="34" charset="-120"/>
+              </a:rPr>
+              <a:t>One governed platform. One control plane for AI cost.</a:t>
+            </a:r>
+            <a:endParaRPr lang="en-US" sz="1200" dirty="0"/>
+          </a:p>
+        </p:txBody>
+      </p:sp>
+      <p:sp>
+        <p:nvSpPr>
+          <p:cNvPr id="6" name="Shape 3"/>
+          <p:cNvSpPr/>
+          <p:nvPr/>
+        </p:nvSpPr>
+        <p:spPr>
+          <a:xfrm>
+            <a:off x="530352" y="1856232"/>
+            <a:ext cx="2578608" cy="3200400"/>
+          </a:xfrm>
+          <a:prstGeom prst="roundRect">
+            <a:avLst>
+              <a:gd name="adj" fmla="val 2837"/>
+            </a:avLst>
+          </a:prstGeom>
+          <a:solidFill>
+            <a:srgbClr val="FFFFFF"/>
+          </a:solidFill>
+          <a:ln w="15240">
+            <a:solidFill>
+              <a:srgbClr val="2272B4"/>
+            </a:solidFill>
+            <a:prstDash val="solid"/>
+          </a:ln>
+        </p:spPr>
+      </p:sp>
+      <p:sp>
+        <p:nvSpPr>
+          <p:cNvPr id="7" name="Shape 4"/>
+          <p:cNvSpPr/>
+          <p:nvPr/>
+        </p:nvSpPr>
+        <p:spPr>
+          <a:xfrm>
+            <a:off x="694944" y="2029968"/>
+            <a:ext cx="438912" cy="438912"/>
+          </a:xfrm>
+          <a:prstGeom prst="ellipse">
+            <a:avLst/>
+          </a:prstGeom>
+          <a:solidFill>
+            <a:srgbClr val="2272B4"/>
+          </a:solidFill>
+          <a:ln w="12700">
+            <a:solidFill>
+              <a:srgbClr val="2272B4"/>
+            </a:solidFill>
+            <a:prstDash val="solid"/>
+          </a:ln>
+        </p:spPr>
+      </p:sp>
+      <p:sp>
+        <p:nvSpPr>
+          <p:cNvPr id="8" name="Text 5"/>
+          <p:cNvSpPr/>
+          <p:nvPr/>
+        </p:nvSpPr>
+        <p:spPr>
+          <a:xfrm>
+            <a:off x="694944" y="2029968"/>
+            <a:ext cx="438912" cy="438912"/>
+          </a:xfrm>
+          <a:prstGeom prst="rect">
+            <a:avLst/>
+          </a:prstGeom>
+          <a:noFill/>
+          <a:ln/>
+        </p:spPr>
+        <p:txBody>
+          <a:bodyPr wrap="square" lIns="0" tIns="0" rIns="0" bIns="0" rtlCol="0" anchor="ctr">
+            <a:normAutofit/>
+          </a:bodyPr>
+          <a:lstStyle/>
+          <a:p>
+            <a:pPr algn="ctr" indent="0" marL="0">
+              <a:buNone/>
+            </a:pPr>
+            <a:r>
+              <a:rPr lang="en-US" sz="900" b="1" dirty="0">
+                <a:solidFill>
+                  <a:srgbClr val="FFFFFF"/>
+                </a:solidFill>
+                <a:latin typeface="Noto Sans KR" pitchFamily="34" charset="0"/>
+                <a:ea typeface="Noto Sans KR" pitchFamily="34" charset="-122"/>
+                <a:cs typeface="Noto Sans KR" pitchFamily="34" charset="-120"/>
+              </a:rPr>
+              <a:t>01</a:t>
+            </a:r>
+            <a:endParaRPr lang="en-US" sz="900" dirty="0"/>
+          </a:p>
+        </p:txBody>
+      </p:sp>
+      <p:sp>
+        <p:nvSpPr>
+          <p:cNvPr id="9" name="Text 6"/>
+          <p:cNvSpPr/>
+          <p:nvPr/>
+        </p:nvSpPr>
+        <p:spPr>
+          <a:xfrm>
+            <a:off x="713232" y="2615184"/>
+            <a:ext cx="2212848" cy="512064"/>
+          </a:xfrm>
+          <a:prstGeom prst="rect">
+            <a:avLst/>
+          </a:prstGeom>
+          <a:noFill/>
+          <a:ln/>
+        </p:spPr>
+        <p:txBody>
+          <a:bodyPr wrap="square" lIns="0" tIns="0" rIns="0" bIns="0" rtlCol="0" anchor="t">
+            <a:normAutofit/>
+          </a:bodyPr>
+          <a:lstStyle/>
+          <a:p>
+            <a:pPr indent="0" marL="0">
+              <a:buNone/>
+            </a:pPr>
+            <a:r>
+              <a:rPr lang="en-US" sz="1500" b="1" dirty="0">
+                <a:solidFill>
+                  <a:srgbClr val="1F2530"/>
+                </a:solidFill>
+                <a:latin typeface="Noto Sans KR" pitchFamily="34" charset="0"/>
+                <a:ea typeface="Noto Sans KR" pitchFamily="34" charset="-122"/>
+                <a:cs typeface="Noto Sans KR" pitchFamily="34" charset="-120"/>
+              </a:rPr>
+              <a:t>문제를 빠르게 발견</a:t>
+            </a:r>
+            <a:endParaRPr lang="en-US" sz="1500" dirty="0"/>
+          </a:p>
+        </p:txBody>
+      </p:sp>
+      <p:sp>
+        <p:nvSpPr>
+          <p:cNvPr id="10" name="Text 7"/>
+          <p:cNvSpPr/>
+          <p:nvPr/>
+        </p:nvSpPr>
+        <p:spPr>
+          <a:xfrm>
+            <a:off x="713232" y="3246120"/>
+            <a:ext cx="2212848" cy="1143000"/>
+          </a:xfrm>
+          <a:prstGeom prst="rect">
+            <a:avLst/>
+          </a:prstGeom>
+          <a:noFill/>
+          <a:ln/>
+        </p:spPr>
+        <p:txBody>
+          <a:bodyPr wrap="square" lIns="0" tIns="0" rIns="0" bIns="0" rtlCol="0" anchor="t">
+            <a:normAutofit/>
+          </a:bodyPr>
+          <a:lstStyle/>
+          <a:p>
+            <a:pPr indent="0" marL="0">
+              <a:buNone/>
+            </a:pPr>
+            <a:r>
+              <a:rPr lang="en-US" sz="1020" dirty="0">
+                <a:solidFill>
+                  <a:srgbClr val="5B6573"/>
+                </a:solidFill>
+                <a:latin typeface="Noto Sans KR" pitchFamily="34" charset="0"/>
+                <a:ea typeface="Noto Sans KR" pitchFamily="34" charset="-122"/>
+                <a:cs typeface="Noto Sans KR" pitchFamily="34" charset="-120"/>
+              </a:rPr>
+              <a:t>• 최신 상태를 지속적으로 반영</a:t>
+            </a:r>
+            <a:endParaRPr lang="en-US" sz="1020" dirty="0"/>
+          </a:p>
+          <a:p>
+            <a:pPr indent="0" marL="0">
+              <a:buNone/>
+            </a:pPr>
+            <a:endParaRPr lang="en-US" sz="1020" dirty="0"/>
+          </a:p>
+          <a:p>
+            <a:pPr indent="0" marL="0">
+              <a:buNone/>
+            </a:pPr>
+            <a:r>
+              <a:rPr lang="en-US" sz="1020" dirty="0">
+                <a:solidFill>
+                  <a:srgbClr val="5B6573"/>
+                </a:solidFill>
+                <a:latin typeface="Noto Sans KR" pitchFamily="34" charset="0"/>
+                <a:ea typeface="Noto Sans KR" pitchFamily="34" charset="-122"/>
+                <a:cs typeface="Noto Sans KR" pitchFamily="34" charset="-120"/>
+              </a:rPr>
+              <a:t>• 결제 완료율 하락과 영향 고객 확인</a:t>
+            </a:r>
+            <a:endParaRPr lang="en-US" sz="1020" dirty="0"/>
+          </a:p>
+        </p:txBody>
+      </p:sp>
+      <p:sp>
+        <p:nvSpPr>
+          <p:cNvPr id="11" name="Shape 8"/>
+          <p:cNvSpPr/>
+          <p:nvPr/>
+        </p:nvSpPr>
+        <p:spPr>
+          <a:xfrm>
+            <a:off x="713232" y="4507992"/>
+            <a:ext cx="2212848" cy="0"/>
+          </a:xfrm>
+          <a:prstGeom prst="line">
+            <a:avLst/>
+          </a:prstGeom>
+          <a:noFill/>
+          <a:ln w="10160">
+            <a:solidFill>
+              <a:srgbClr val="DCE1E7"/>
+            </a:solidFill>
+            <a:prstDash val="solid"/>
+          </a:ln>
+        </p:spPr>
+      </p:sp>
+      <p:sp>
+        <p:nvSpPr>
+          <p:cNvPr id="12" name="Text 9"/>
+          <p:cNvSpPr/>
+          <p:nvPr/>
+        </p:nvSpPr>
+        <p:spPr>
+          <a:xfrm>
+            <a:off x="713232" y="4590288"/>
+            <a:ext cx="2212848" cy="274320"/>
+          </a:xfrm>
+          <a:prstGeom prst="rect">
+            <a:avLst/>
+          </a:prstGeom>
+          <a:noFill/>
+          <a:ln/>
+        </p:spPr>
+        <p:txBody>
+          <a:bodyPr wrap="square" lIns="0" tIns="0" rIns="0" bIns="0" rtlCol="0" anchor="ctr">
+            <a:normAutofit/>
+          </a:bodyPr>
+          <a:lstStyle/>
+          <a:p>
+            <a:pPr algn="ctr" indent="0" marL="0">
+              <a:buNone/>
+            </a:pPr>
+            <a:r>
+              <a:rPr lang="en-US" sz="820" b="1" dirty="0">
+                <a:solidFill>
+                  <a:srgbClr val="2272B4"/>
+                </a:solidFill>
+                <a:latin typeface="Noto Sans KR" pitchFamily="34" charset="0"/>
+                <a:ea typeface="Noto Sans KR" pitchFamily="34" charset="-122"/>
+                <a:cs typeface="Noto Sans KR" pitchFamily="34" charset="-120"/>
+              </a:rPr>
+              <a:t>Lakeflow · 공통 지표 · Lakebase 동기화</a:t>
+            </a:r>
+            <a:endParaRPr lang="en-US" sz="820" dirty="0"/>
+          </a:p>
+        </p:txBody>
+      </p:sp>
+      <p:sp>
+        <p:nvSpPr>
+          <p:cNvPr id="13" name="Shape 10"/>
+          <p:cNvSpPr/>
+          <p:nvPr/>
+        </p:nvSpPr>
+        <p:spPr>
+          <a:xfrm>
+            <a:off x="3136392" y="3438144"/>
+            <a:ext cx="246888" cy="0"/>
+          </a:xfrm>
+          <a:prstGeom prst="line">
+            <a:avLst/>
+          </a:prstGeom>
+          <a:noFill/>
+          <a:ln w="27940">
+            <a:solidFill>
+              <a:srgbClr val="DCE1E7"/>
+            </a:solidFill>
+            <a:prstDash val="solid"/>
+            <a:headEnd type="none"/>
+            <a:tailEnd type="triangle"/>
+          </a:ln>
+        </p:spPr>
+      </p:sp>
+      <p:sp>
+        <p:nvSpPr>
+          <p:cNvPr id="14" name="Shape 11"/>
+          <p:cNvSpPr/>
+          <p:nvPr/>
+        </p:nvSpPr>
+        <p:spPr>
+          <a:xfrm>
+            <a:off x="3429000" y="1856232"/>
+            <a:ext cx="2578608" cy="3200400"/>
+          </a:xfrm>
+          <a:prstGeom prst="roundRect">
+            <a:avLst>
+              <a:gd name="adj" fmla="val 2837"/>
+            </a:avLst>
+          </a:prstGeom>
+          <a:solidFill>
+            <a:srgbClr val="FFFFFF"/>
+          </a:solidFill>
+          <a:ln w="15240">
+            <a:solidFill>
+              <a:srgbClr val="40D1F5"/>
+            </a:solidFill>
+            <a:prstDash val="solid"/>
+          </a:ln>
+        </p:spPr>
+      </p:sp>
+      <p:sp>
+        <p:nvSpPr>
+          <p:cNvPr id="15" name="Shape 12"/>
+          <p:cNvSpPr/>
+          <p:nvPr/>
+        </p:nvSpPr>
+        <p:spPr>
+          <a:xfrm>
+            <a:off x="3593592" y="2029968"/>
+            <a:ext cx="438912" cy="438912"/>
+          </a:xfrm>
+          <a:prstGeom prst="ellipse">
+            <a:avLst/>
+          </a:prstGeom>
+          <a:solidFill>
+            <a:srgbClr val="40D1F5"/>
+          </a:solidFill>
+          <a:ln w="12700">
+            <a:solidFill>
+              <a:srgbClr val="40D1F5"/>
+            </a:solidFill>
+            <a:prstDash val="solid"/>
+          </a:ln>
+        </p:spPr>
+      </p:sp>
+      <p:sp>
+        <p:nvSpPr>
+          <p:cNvPr id="16" name="Text 13"/>
+          <p:cNvSpPr/>
+          <p:nvPr/>
+        </p:nvSpPr>
+        <p:spPr>
+          <a:xfrm>
+            <a:off x="3593592" y="2029968"/>
+            <a:ext cx="438912" cy="438912"/>
+          </a:xfrm>
+          <a:prstGeom prst="rect">
+            <a:avLst/>
+          </a:prstGeom>
+          <a:noFill/>
+          <a:ln/>
+        </p:spPr>
+        <p:txBody>
+          <a:bodyPr wrap="square" lIns="0" tIns="0" rIns="0" bIns="0" rtlCol="0" anchor="ctr">
+            <a:normAutofit/>
+          </a:bodyPr>
+          <a:lstStyle/>
+          <a:p>
+            <a:pPr algn="ctr" indent="0" marL="0">
+              <a:buNone/>
+            </a:pPr>
+            <a:r>
+              <a:rPr lang="en-US" sz="900" b="1" dirty="0">
+                <a:solidFill>
+                  <a:srgbClr val="FFFFFF"/>
+                </a:solidFill>
+                <a:latin typeface="Noto Sans KR" pitchFamily="34" charset="0"/>
+                <a:ea typeface="Noto Sans KR" pitchFamily="34" charset="-122"/>
+                <a:cs typeface="Noto Sans KR" pitchFamily="34" charset="-120"/>
+              </a:rPr>
+              <a:t>02</a:t>
+            </a:r>
+            <a:endParaRPr lang="en-US" sz="900" dirty="0"/>
+          </a:p>
+        </p:txBody>
+      </p:sp>
+      <p:sp>
+        <p:nvSpPr>
+          <p:cNvPr id="17" name="Text 14"/>
+          <p:cNvSpPr/>
+          <p:nvPr/>
+        </p:nvSpPr>
+        <p:spPr>
+          <a:xfrm>
+            <a:off x="3611880" y="2615184"/>
+            <a:ext cx="2212848" cy="512064"/>
+          </a:xfrm>
+          <a:prstGeom prst="rect">
+            <a:avLst/>
+          </a:prstGeom>
+          <a:noFill/>
+          <a:ln/>
+        </p:spPr>
+        <p:txBody>
+          <a:bodyPr wrap="square" lIns="0" tIns="0" rIns="0" bIns="0" rtlCol="0" anchor="t">
+            <a:normAutofit/>
+          </a:bodyPr>
+          <a:lstStyle/>
+          <a:p>
+            <a:pPr indent="0" marL="0">
+              <a:buNone/>
+            </a:pPr>
+            <a:r>
+              <a:rPr lang="en-US" sz="1500" b="1" dirty="0">
+                <a:solidFill>
+                  <a:srgbClr val="1F2530"/>
+                </a:solidFill>
+                <a:latin typeface="Noto Sans KR" pitchFamily="34" charset="0"/>
+                <a:ea typeface="Noto Sans KR" pitchFamily="34" charset="-122"/>
+                <a:cs typeface="Noto Sans KR" pitchFamily="34" charset="-120"/>
+              </a:rPr>
+              <a:t>자연어로 쉽게 분석</a:t>
+            </a:r>
+            <a:endParaRPr lang="en-US" sz="1500" dirty="0"/>
+          </a:p>
+        </p:txBody>
+      </p:sp>
+      <p:sp>
+        <p:nvSpPr>
+          <p:cNvPr id="18" name="Text 15"/>
+          <p:cNvSpPr/>
+          <p:nvPr/>
+        </p:nvSpPr>
+        <p:spPr>
+          <a:xfrm>
+            <a:off x="3611880" y="3246120"/>
+            <a:ext cx="2212848" cy="1143000"/>
+          </a:xfrm>
+          <a:prstGeom prst="rect">
+            <a:avLst/>
+          </a:prstGeom>
+          <a:noFill/>
+          <a:ln/>
+        </p:spPr>
+        <p:txBody>
+          <a:bodyPr wrap="square" lIns="0" tIns="0" rIns="0" bIns="0" rtlCol="0" anchor="t">
+            <a:normAutofit/>
+          </a:bodyPr>
+          <a:lstStyle/>
+          <a:p>
+            <a:pPr indent="0" marL="0">
+              <a:buNone/>
+            </a:pPr>
+            <a:r>
+              <a:rPr lang="en-US" sz="1020" dirty="0">
+                <a:solidFill>
+                  <a:srgbClr val="5B6573"/>
+                </a:solidFill>
+                <a:latin typeface="Noto Sans KR" pitchFamily="34" charset="0"/>
+                <a:ea typeface="Noto Sans KR" pitchFamily="34" charset="-122"/>
+                <a:cs typeface="Noto Sans KR" pitchFamily="34" charset="-120"/>
+              </a:rPr>
+              <a:t>• “어떤 고객의 결제 완료율이</a:t>
+            </a:r>
+            <a:endParaRPr lang="en-US" sz="1020" dirty="0"/>
+          </a:p>
+          <a:p>
+            <a:pPr indent="0" marL="0">
+              <a:buNone/>
+            </a:pPr>
+            <a:r>
+              <a:rPr lang="en-US" sz="1020" dirty="0">
+                <a:solidFill>
+                  <a:srgbClr val="5B6573"/>
+                </a:solidFill>
+                <a:latin typeface="Noto Sans KR" pitchFamily="34" charset="0"/>
+                <a:ea typeface="Noto Sans KR" pitchFamily="34" charset="-122"/>
+                <a:cs typeface="Noto Sans KR" pitchFamily="34" charset="-120"/>
+              </a:rPr>
+              <a:t>왜 떨어졌는가?”라고 질문</a:t>
+            </a:r>
+            <a:endParaRPr lang="en-US" sz="1020" dirty="0"/>
+          </a:p>
+          <a:p>
+            <a:pPr indent="0" marL="0">
+              <a:buNone/>
+            </a:pPr>
+            <a:endParaRPr lang="en-US" sz="1020" dirty="0"/>
+          </a:p>
+          <a:p>
+            <a:pPr indent="0" marL="0">
+              <a:buNone/>
+            </a:pPr>
+            <a:r>
+              <a:rPr lang="en-US" sz="1020" dirty="0">
+                <a:solidFill>
+                  <a:srgbClr val="5B6573"/>
+                </a:solidFill>
+                <a:latin typeface="Noto Sans KR" pitchFamily="34" charset="0"/>
+                <a:ea typeface="Noto Sans KR" pitchFamily="34" charset="-122"/>
+                <a:cs typeface="Noto Sans KR" pitchFamily="34" charset="-120"/>
+              </a:rPr>
+              <a:t>• 대시보드와 Genie가 같은 정의로 답변</a:t>
+            </a:r>
+            <a:endParaRPr lang="en-US" sz="1020" dirty="0"/>
+          </a:p>
+        </p:txBody>
+      </p:sp>
+      <p:sp>
+        <p:nvSpPr>
+          <p:cNvPr id="19" name="Shape 16"/>
+          <p:cNvSpPr/>
+          <p:nvPr/>
+        </p:nvSpPr>
+        <p:spPr>
+          <a:xfrm>
+            <a:off x="3611880" y="4507992"/>
+            <a:ext cx="2212848" cy="0"/>
+          </a:xfrm>
+          <a:prstGeom prst="line">
+            <a:avLst/>
+          </a:prstGeom>
+          <a:noFill/>
+          <a:ln w="10160">
+            <a:solidFill>
+              <a:srgbClr val="DCE1E7"/>
+            </a:solidFill>
+            <a:prstDash val="solid"/>
+          </a:ln>
+        </p:spPr>
+      </p:sp>
+      <p:sp>
+        <p:nvSpPr>
+          <p:cNvPr id="20" name="Text 17"/>
+          <p:cNvSpPr/>
+          <p:nvPr/>
+        </p:nvSpPr>
+        <p:spPr>
+          <a:xfrm>
+            <a:off x="3611880" y="4590288"/>
+            <a:ext cx="2212848" cy="274320"/>
+          </a:xfrm>
+          <a:prstGeom prst="rect">
+            <a:avLst/>
+          </a:prstGeom>
+          <a:noFill/>
+          <a:ln/>
+        </p:spPr>
+        <p:txBody>
+          <a:bodyPr wrap="square" lIns="0" tIns="0" rIns="0" bIns="0" rtlCol="0" anchor="ctr">
+            <a:normAutofit/>
+          </a:bodyPr>
+          <a:lstStyle/>
+          <a:p>
+            <a:pPr algn="ctr" indent="0" marL="0">
+              <a:buNone/>
+            </a:pPr>
+            <a:r>
+              <a:rPr lang="en-US" sz="820" b="1" dirty="0">
+                <a:solidFill>
+                  <a:srgbClr val="40D1F5"/>
+                </a:solidFill>
+                <a:latin typeface="Noto Sans KR" pitchFamily="34" charset="0"/>
+                <a:ea typeface="Noto Sans KR" pitchFamily="34" charset="-122"/>
+                <a:cs typeface="Noto Sans KR" pitchFamily="34" charset="-120"/>
+              </a:rPr>
+              <a:t>AI/BI · Genie · Metric View</a:t>
+            </a:r>
+            <a:endParaRPr lang="en-US" sz="820" dirty="0"/>
+          </a:p>
+        </p:txBody>
+      </p:sp>
+      <p:sp>
+        <p:nvSpPr>
+          <p:cNvPr id="21" name="Shape 18"/>
+          <p:cNvSpPr/>
+          <p:nvPr/>
+        </p:nvSpPr>
+        <p:spPr>
+          <a:xfrm>
+            <a:off x="6035040" y="3438144"/>
+            <a:ext cx="246888" cy="0"/>
+          </a:xfrm>
+          <a:prstGeom prst="line">
+            <a:avLst/>
+          </a:prstGeom>
+          <a:noFill/>
+          <a:ln w="27940">
+            <a:solidFill>
+              <a:srgbClr val="DCE1E7"/>
+            </a:solidFill>
+            <a:prstDash val="solid"/>
+            <a:headEnd type="none"/>
+            <a:tailEnd type="triangle"/>
+          </a:ln>
+        </p:spPr>
+      </p:sp>
+      <p:sp>
+        <p:nvSpPr>
+          <p:cNvPr id="22" name="Shape 19"/>
+          <p:cNvSpPr/>
+          <p:nvPr/>
+        </p:nvSpPr>
+        <p:spPr>
+          <a:xfrm>
+            <a:off x="6327648" y="1856232"/>
+            <a:ext cx="2578608" cy="3200400"/>
+          </a:xfrm>
+          <a:prstGeom prst="roundRect">
+            <a:avLst>
+              <a:gd name="adj" fmla="val 2837"/>
+            </a:avLst>
+          </a:prstGeom>
+          <a:solidFill>
+            <a:srgbClr val="FFFFFF"/>
+          </a:solidFill>
+          <a:ln w="15240">
+            <a:solidFill>
+              <a:srgbClr val="FF8F5B"/>
+            </a:solidFill>
+            <a:prstDash val="solid"/>
+          </a:ln>
+        </p:spPr>
+      </p:sp>
+      <p:sp>
+        <p:nvSpPr>
+          <p:cNvPr id="23" name="Shape 20"/>
+          <p:cNvSpPr/>
+          <p:nvPr/>
+        </p:nvSpPr>
+        <p:spPr>
+          <a:xfrm>
+            <a:off x="6492240" y="2029968"/>
+            <a:ext cx="438912" cy="438912"/>
+          </a:xfrm>
+          <a:prstGeom prst="ellipse">
+            <a:avLst/>
+          </a:prstGeom>
+          <a:solidFill>
+            <a:srgbClr val="FF8F5B"/>
+          </a:solidFill>
+          <a:ln w="12700">
+            <a:solidFill>
+              <a:srgbClr val="FF8F5B"/>
+            </a:solidFill>
+            <a:prstDash val="solid"/>
+          </a:ln>
+        </p:spPr>
+      </p:sp>
+      <p:sp>
+        <p:nvSpPr>
+          <p:cNvPr id="24" name="Text 21"/>
+          <p:cNvSpPr/>
+          <p:nvPr/>
+        </p:nvSpPr>
+        <p:spPr>
+          <a:xfrm>
+            <a:off x="6492240" y="2029968"/>
+            <a:ext cx="438912" cy="438912"/>
+          </a:xfrm>
+          <a:prstGeom prst="rect">
+            <a:avLst/>
+          </a:prstGeom>
+          <a:noFill/>
+          <a:ln/>
+        </p:spPr>
+        <p:txBody>
+          <a:bodyPr wrap="square" lIns="0" tIns="0" rIns="0" bIns="0" rtlCol="0" anchor="ctr">
+            <a:normAutofit/>
+          </a:bodyPr>
+          <a:lstStyle/>
+          <a:p>
+            <a:pPr algn="ctr" indent="0" marL="0">
+              <a:buNone/>
+            </a:pPr>
+            <a:r>
+              <a:rPr lang="en-US" sz="900" b="1" dirty="0">
+                <a:solidFill>
+                  <a:srgbClr val="FFFFFF"/>
+                </a:solidFill>
+                <a:latin typeface="Noto Sans KR" pitchFamily="34" charset="0"/>
+                <a:ea typeface="Noto Sans KR" pitchFamily="34" charset="-122"/>
+                <a:cs typeface="Noto Sans KR" pitchFamily="34" charset="-120"/>
+              </a:rPr>
+              <a:t>03</a:t>
+            </a:r>
+            <a:endParaRPr lang="en-US" sz="900" dirty="0"/>
+          </a:p>
+        </p:txBody>
+      </p:sp>
+      <p:sp>
+        <p:nvSpPr>
+          <p:cNvPr id="25" name="Text 22"/>
+          <p:cNvSpPr/>
+          <p:nvPr/>
+        </p:nvSpPr>
+        <p:spPr>
+          <a:xfrm>
+            <a:off x="6510528" y="2615184"/>
+            <a:ext cx="2212848" cy="512064"/>
+          </a:xfrm>
+          <a:prstGeom prst="rect">
+            <a:avLst/>
+          </a:prstGeom>
+          <a:noFill/>
+          <a:ln/>
+        </p:spPr>
+        <p:txBody>
+          <a:bodyPr wrap="square" lIns="0" tIns="0" rIns="0" bIns="0" rtlCol="0" anchor="t">
+            <a:normAutofit/>
+          </a:bodyPr>
+          <a:lstStyle/>
+          <a:p>
+            <a:pPr indent="0" marL="0">
+              <a:buNone/>
+            </a:pPr>
+            <a:r>
+              <a:rPr lang="en-US" sz="1500" b="1" dirty="0">
+                <a:solidFill>
+                  <a:srgbClr val="1F2530"/>
+                </a:solidFill>
+                <a:latin typeface="Noto Sans KR" pitchFamily="34" charset="0"/>
+                <a:ea typeface="Noto Sans KR" pitchFamily="34" charset="-122"/>
+                <a:cs typeface="Noto Sans KR" pitchFamily="34" charset="-120"/>
+              </a:rPr>
+              <a:t>적은 운영 부담으로 실행</a:t>
+            </a:r>
+            <a:endParaRPr lang="en-US" sz="1500" dirty="0"/>
+          </a:p>
+        </p:txBody>
+      </p:sp>
+      <p:sp>
+        <p:nvSpPr>
+          <p:cNvPr id="26" name="Text 23"/>
+          <p:cNvSpPr/>
+          <p:nvPr/>
+        </p:nvSpPr>
+        <p:spPr>
+          <a:xfrm>
+            <a:off x="6510528" y="3246120"/>
+            <a:ext cx="2212848" cy="1143000"/>
+          </a:xfrm>
+          <a:prstGeom prst="rect">
+            <a:avLst/>
+          </a:prstGeom>
+          <a:noFill/>
+          <a:ln/>
+        </p:spPr>
+        <p:txBody>
+          <a:bodyPr wrap="square" lIns="0" tIns="0" rIns="0" bIns="0" rtlCol="0" anchor="t">
+            <a:normAutofit/>
+          </a:bodyPr>
+          <a:lstStyle/>
+          <a:p>
+            <a:pPr indent="0" marL="0">
+              <a:buNone/>
+            </a:pPr>
+            <a:r>
+              <a:rPr lang="en-US" sz="1020" dirty="0">
+                <a:solidFill>
+                  <a:srgbClr val="5B6573"/>
+                </a:solidFill>
+                <a:latin typeface="Noto Sans KR" pitchFamily="34" charset="0"/>
+                <a:ea typeface="Noto Sans KR" pitchFamily="34" charset="-122"/>
+                <a:cs typeface="Noto Sans KR" pitchFamily="34" charset="-120"/>
+              </a:rPr>
+              <a:t>• 과거 사례 → AI 시험안 → 담당자 승인</a:t>
+            </a:r>
+            <a:endParaRPr lang="en-US" sz="1020" dirty="0"/>
+          </a:p>
+          <a:p>
+            <a:pPr indent="0" marL="0">
+              <a:buNone/>
+            </a:pPr>
+            <a:endParaRPr lang="en-US" sz="1020" dirty="0"/>
+          </a:p>
+          <a:p>
+            <a:pPr indent="0" marL="0">
+              <a:buNone/>
+            </a:pPr>
+            <a:r>
+              <a:rPr lang="en-US" sz="1020" dirty="0">
+                <a:solidFill>
+                  <a:srgbClr val="5B6573"/>
+                </a:solidFill>
+                <a:latin typeface="Noto Sans KR" pitchFamily="34" charset="0"/>
+                <a:ea typeface="Noto Sans KR" pitchFamily="34" charset="-122"/>
+                <a:cs typeface="Noto Sans KR" pitchFamily="34" charset="-120"/>
+              </a:rPr>
+              <a:t>• 관리형 서비스와 유휴 시 축소</a:t>
+            </a:r>
+            <a:endParaRPr lang="en-US" sz="1020" dirty="0"/>
+          </a:p>
+        </p:txBody>
+      </p:sp>
+      <p:sp>
+        <p:nvSpPr>
+          <p:cNvPr id="27" name="Shape 24"/>
+          <p:cNvSpPr/>
+          <p:nvPr/>
+        </p:nvSpPr>
+        <p:spPr>
+          <a:xfrm>
+            <a:off x="6510528" y="4507992"/>
+            <a:ext cx="2212848" cy="0"/>
+          </a:xfrm>
+          <a:prstGeom prst="line">
+            <a:avLst/>
+          </a:prstGeom>
+          <a:noFill/>
+          <a:ln w="10160">
+            <a:solidFill>
+              <a:srgbClr val="DCE1E7"/>
+            </a:solidFill>
+            <a:prstDash val="solid"/>
+          </a:ln>
+        </p:spPr>
+      </p:sp>
+      <p:sp>
+        <p:nvSpPr>
+          <p:cNvPr id="28" name="Text 25"/>
+          <p:cNvSpPr/>
+          <p:nvPr/>
+        </p:nvSpPr>
+        <p:spPr>
+          <a:xfrm>
+            <a:off x="6510528" y="4590288"/>
+            <a:ext cx="2212848" cy="274320"/>
+          </a:xfrm>
+          <a:prstGeom prst="rect">
+            <a:avLst/>
+          </a:prstGeom>
+          <a:noFill/>
+          <a:ln/>
+        </p:spPr>
+        <p:txBody>
+          <a:bodyPr wrap="square" lIns="0" tIns="0" rIns="0" bIns="0" rtlCol="0" anchor="ctr">
+            <a:normAutofit/>
+          </a:bodyPr>
+          <a:lstStyle/>
+          <a:p>
+            <a:pPr algn="ctr" indent="0" marL="0">
+              <a:buNone/>
+            </a:pPr>
+            <a:r>
+              <a:rPr lang="en-US" sz="820" b="1" dirty="0">
+                <a:solidFill>
+                  <a:srgbClr val="FF8F5B"/>
+                </a:solidFill>
+                <a:latin typeface="Noto Sans KR" pitchFamily="34" charset="0"/>
+                <a:ea typeface="Noto Sans KR" pitchFamily="34" charset="-122"/>
+                <a:cs typeface="Noto Sans KR" pitchFamily="34" charset="-120"/>
+              </a:rPr>
+              <a:t>Databricks Apps · Lakebase</a:t>
+            </a:r>
+            <a:endParaRPr lang="en-US" sz="820" dirty="0"/>
+          </a:p>
+        </p:txBody>
+      </p:sp>
+      <p:sp>
+        <p:nvSpPr>
+          <p:cNvPr id="29" name="Shape 26"/>
+          <p:cNvSpPr/>
+          <p:nvPr/>
+        </p:nvSpPr>
+        <p:spPr>
+          <a:xfrm>
+            <a:off x="8933688" y="3438144"/>
+            <a:ext cx="246888" cy="0"/>
+          </a:xfrm>
+          <a:prstGeom prst="line">
+            <a:avLst/>
+          </a:prstGeom>
+          <a:noFill/>
+          <a:ln w="27940">
+            <a:solidFill>
+              <a:srgbClr val="DCE1E7"/>
+            </a:solidFill>
+            <a:prstDash val="solid"/>
+            <a:headEnd type="none"/>
+            <a:tailEnd type="triangle"/>
+          </a:ln>
+        </p:spPr>
+      </p:sp>
+      <p:sp>
+        <p:nvSpPr>
+          <p:cNvPr id="30" name="Shape 27"/>
+          <p:cNvSpPr/>
+          <p:nvPr/>
+        </p:nvSpPr>
+        <p:spPr>
+          <a:xfrm>
+            <a:off x="9226296" y="1856232"/>
+            <a:ext cx="2578608" cy="3200400"/>
+          </a:xfrm>
+          <a:prstGeom prst="roundRect">
+            <a:avLst>
+              <a:gd name="adj" fmla="val 2837"/>
+            </a:avLst>
+          </a:prstGeom>
+          <a:solidFill>
+            <a:srgbClr val="FFFFFF"/>
+          </a:solidFill>
+          <a:ln w="15240">
+            <a:solidFill>
+              <a:srgbClr val="EE3D2C"/>
+            </a:solidFill>
+            <a:prstDash val="solid"/>
+          </a:ln>
+        </p:spPr>
+      </p:sp>
+      <p:sp>
+        <p:nvSpPr>
+          <p:cNvPr id="31" name="Shape 28"/>
+          <p:cNvSpPr/>
+          <p:nvPr/>
+        </p:nvSpPr>
+        <p:spPr>
+          <a:xfrm>
+            <a:off x="9390888" y="2029968"/>
+            <a:ext cx="438912" cy="438912"/>
+          </a:xfrm>
+          <a:prstGeom prst="ellipse">
+            <a:avLst/>
+          </a:prstGeom>
+          <a:solidFill>
+            <a:srgbClr val="EE3D2C"/>
+          </a:solidFill>
+          <a:ln w="12700">
+            <a:solidFill>
+              <a:srgbClr val="EE3D2C"/>
+            </a:solidFill>
+            <a:prstDash val="solid"/>
+          </a:ln>
+        </p:spPr>
+      </p:sp>
+      <p:sp>
+        <p:nvSpPr>
+          <p:cNvPr id="32" name="Text 29"/>
+          <p:cNvSpPr/>
+          <p:nvPr/>
+        </p:nvSpPr>
+        <p:spPr>
+          <a:xfrm>
+            <a:off x="9390888" y="2029968"/>
+            <a:ext cx="438912" cy="438912"/>
+          </a:xfrm>
+          <a:prstGeom prst="rect">
+            <a:avLst/>
+          </a:prstGeom>
+          <a:noFill/>
+          <a:ln/>
+        </p:spPr>
+        <p:txBody>
+          <a:bodyPr wrap="square" lIns="0" tIns="0" rIns="0" bIns="0" rtlCol="0" anchor="ctr">
+            <a:normAutofit/>
+          </a:bodyPr>
+          <a:lstStyle/>
+          <a:p>
+            <a:pPr algn="ctr" indent="0" marL="0">
+              <a:buNone/>
+            </a:pPr>
+            <a:r>
+              <a:rPr lang="en-US" sz="900" b="1" dirty="0">
+                <a:solidFill>
+                  <a:srgbClr val="FFFFFF"/>
+                </a:solidFill>
+                <a:latin typeface="Noto Sans KR" pitchFamily="34" charset="0"/>
+                <a:ea typeface="Noto Sans KR" pitchFamily="34" charset="-122"/>
+                <a:cs typeface="Noto Sans KR" pitchFamily="34" charset="-120"/>
+              </a:rPr>
+              <a:t>04</a:t>
+            </a:r>
+            <a:endParaRPr lang="en-US" sz="900" dirty="0"/>
+          </a:p>
+        </p:txBody>
+      </p:sp>
+      <p:sp>
+        <p:nvSpPr>
+          <p:cNvPr id="33" name="Text 30"/>
+          <p:cNvSpPr/>
+          <p:nvPr/>
+        </p:nvSpPr>
+        <p:spPr>
+          <a:xfrm>
+            <a:off x="9409176" y="2615184"/>
+            <a:ext cx="2212848" cy="512064"/>
+          </a:xfrm>
+          <a:prstGeom prst="rect">
+            <a:avLst/>
+          </a:prstGeom>
+          <a:noFill/>
+          <a:ln/>
+        </p:spPr>
+        <p:txBody>
+          <a:bodyPr wrap="square" lIns="0" tIns="0" rIns="0" bIns="0" rtlCol="0" anchor="t">
+            <a:normAutofit/>
+          </a:bodyPr>
+          <a:lstStyle/>
+          <a:p>
+            <a:pPr indent="0" marL="0">
+              <a:buNone/>
+            </a:pPr>
+            <a:r>
+              <a:rPr lang="en-US" sz="1500" b="1" dirty="0">
+                <a:solidFill>
+                  <a:srgbClr val="1F2530"/>
+                </a:solidFill>
+                <a:latin typeface="Noto Sans KR" pitchFamily="34" charset="0"/>
+                <a:ea typeface="Noto Sans KR" pitchFamily="34" charset="-122"/>
+                <a:cs typeface="Noto Sans KR" pitchFamily="34" charset="-120"/>
+              </a:rPr>
+              <a:t>데이터와 AI를 함께 통제</a:t>
+            </a:r>
+            <a:endParaRPr lang="en-US" sz="1500" dirty="0"/>
+          </a:p>
+        </p:txBody>
+      </p:sp>
+      <p:sp>
+        <p:nvSpPr>
+          <p:cNvPr id="34" name="Text 31"/>
+          <p:cNvSpPr/>
+          <p:nvPr/>
+        </p:nvSpPr>
+        <p:spPr>
+          <a:xfrm>
+            <a:off x="9409176" y="3246120"/>
+            <a:ext cx="2212848" cy="1143000"/>
+          </a:xfrm>
+          <a:prstGeom prst="rect">
+            <a:avLst/>
+          </a:prstGeom>
+          <a:noFill/>
+          <a:ln/>
+        </p:spPr>
+        <p:txBody>
+          <a:bodyPr wrap="square" lIns="0" tIns="0" rIns="0" bIns="0" rtlCol="0" anchor="t">
+            <a:normAutofit/>
+          </a:bodyPr>
+          <a:lstStyle/>
+          <a:p>
+            <a:pPr indent="0" marL="0">
+              <a:buNone/>
+            </a:pPr>
+            <a:r>
+              <a:rPr lang="en-US" sz="1020" dirty="0">
+                <a:solidFill>
+                  <a:srgbClr val="5B6573"/>
+                </a:solidFill>
+                <a:latin typeface="Noto Sans KR" pitchFamily="34" charset="0"/>
+                <a:ea typeface="Noto Sans KR" pitchFamily="34" charset="-122"/>
+                <a:cs typeface="Noto Sans KR" pitchFamily="34" charset="-120"/>
+              </a:rPr>
+              <a:t>• 접근 권한·보호·추적성을 일관되게 적용</a:t>
+            </a:r>
+            <a:endParaRPr lang="en-US" sz="1020" dirty="0"/>
+          </a:p>
+          <a:p>
+            <a:pPr indent="0" marL="0">
+              <a:buNone/>
+            </a:pPr>
+            <a:endParaRPr lang="en-US" sz="1020" dirty="0"/>
+          </a:p>
+          <a:p>
+            <a:pPr indent="0" marL="0">
+              <a:buNone/>
+            </a:pPr>
+            <a:r>
+              <a:rPr lang="en-US" sz="1020" dirty="0">
+                <a:solidFill>
+                  <a:srgbClr val="5B6573"/>
+                </a:solidFill>
+                <a:latin typeface="Noto Sans KR" pitchFamily="34" charset="0"/>
+                <a:ea typeface="Noto Sans KR" pitchFamily="34" charset="-122"/>
+                <a:cs typeface="Noto Sans KR" pitchFamily="34" charset="-120"/>
+              </a:rPr>
+              <a:t>• 사용자별 비용 확인·예산 초과 차단</a:t>
+            </a:r>
+            <a:endParaRPr lang="en-US" sz="1020" dirty="0"/>
+          </a:p>
+        </p:txBody>
+      </p:sp>
+      <p:sp>
+        <p:nvSpPr>
+          <p:cNvPr id="35" name="Shape 32"/>
+          <p:cNvSpPr/>
+          <p:nvPr/>
+        </p:nvSpPr>
+        <p:spPr>
+          <a:xfrm>
+            <a:off x="9409176" y="4507992"/>
+            <a:ext cx="2212848" cy="0"/>
+          </a:xfrm>
+          <a:prstGeom prst="line">
+            <a:avLst/>
+          </a:prstGeom>
+          <a:noFill/>
+          <a:ln w="10160">
+            <a:solidFill>
+              <a:srgbClr val="DCE1E7"/>
+            </a:solidFill>
+            <a:prstDash val="solid"/>
+          </a:ln>
+        </p:spPr>
+      </p:sp>
+      <p:sp>
+        <p:nvSpPr>
+          <p:cNvPr id="36" name="Text 33"/>
+          <p:cNvSpPr/>
+          <p:nvPr/>
+        </p:nvSpPr>
+        <p:spPr>
+          <a:xfrm>
+            <a:off x="9409176" y="4590288"/>
+            <a:ext cx="2212848" cy="274320"/>
+          </a:xfrm>
+          <a:prstGeom prst="rect">
+            <a:avLst/>
+          </a:prstGeom>
+          <a:noFill/>
+          <a:ln/>
+        </p:spPr>
+        <p:txBody>
+          <a:bodyPr wrap="square" lIns="0" tIns="0" rIns="0" bIns="0" rtlCol="0" anchor="ctr">
+            <a:normAutofit/>
+          </a:bodyPr>
+          <a:lstStyle/>
+          <a:p>
+            <a:pPr algn="ctr" indent="0" marL="0">
+              <a:buNone/>
+            </a:pPr>
+            <a:r>
+              <a:rPr lang="en-US" sz="820" b="1" dirty="0">
+                <a:solidFill>
+                  <a:srgbClr val="EE3D2C"/>
+                </a:solidFill>
+                <a:latin typeface="Noto Sans KR" pitchFamily="34" charset="0"/>
+                <a:ea typeface="Noto Sans KR" pitchFamily="34" charset="-122"/>
+                <a:cs typeface="Noto Sans KR" pitchFamily="34" charset="-120"/>
+              </a:rPr>
+              <a:t>Unity Catalog · Unity AI Gateway</a:t>
+            </a:r>
+            <a:endParaRPr lang="en-US" sz="820" dirty="0"/>
+          </a:p>
+        </p:txBody>
+      </p:sp>
+      <p:sp>
+        <p:nvSpPr>
+          <p:cNvPr id="37" name="Shape 34"/>
+          <p:cNvSpPr/>
+          <p:nvPr/>
+        </p:nvSpPr>
+        <p:spPr>
+          <a:xfrm>
+            <a:off x="786384" y="5358384"/>
+            <a:ext cx="10607040" cy="585216"/>
+          </a:xfrm>
+          <a:prstGeom prst="roundRect">
+            <a:avLst>
+              <a:gd name="adj" fmla="val 12500"/>
+            </a:avLst>
+          </a:prstGeom>
+          <a:solidFill>
+            <a:srgbClr val="11171C"/>
+          </a:solidFill>
+          <a:ln w="12700">
+            <a:solidFill>
+              <a:srgbClr val="11171C"/>
+            </a:solidFill>
+            <a:prstDash val="solid"/>
+          </a:ln>
+        </p:spPr>
+      </p:sp>
+      <p:sp>
+        <p:nvSpPr>
+          <p:cNvPr id="38" name="Text 35"/>
+          <p:cNvSpPr/>
+          <p:nvPr/>
+        </p:nvSpPr>
+        <p:spPr>
+          <a:xfrm>
+            <a:off x="1024128" y="5358384"/>
+            <a:ext cx="10131552" cy="585216"/>
+          </a:xfrm>
+          <a:prstGeom prst="rect">
+            <a:avLst/>
+          </a:prstGeom>
+          <a:noFill/>
+          <a:ln/>
+        </p:spPr>
+        <p:txBody>
+          <a:bodyPr wrap="square" lIns="0" tIns="0" rIns="0" bIns="0" rtlCol="0" anchor="ctr">
+            <a:normAutofit/>
+          </a:bodyPr>
+          <a:lstStyle/>
+          <a:p>
+            <a:pPr algn="ctr" indent="0" marL="0">
+              <a:buNone/>
+            </a:pPr>
+            <a:r>
+              <a:rPr lang="en-US" sz="1350" b="1" dirty="0">
+                <a:solidFill>
+                  <a:srgbClr val="FFFFFF"/>
+                </a:solidFill>
+                <a:latin typeface="Noto Sans KR" pitchFamily="34" charset="0"/>
+                <a:ea typeface="Noto Sans KR" pitchFamily="34" charset="-122"/>
+                <a:cs typeface="Noto Sans KR" pitchFamily="34" charset="-120"/>
+              </a:rPr>
+              <a:t>도구 간 연결과 수작업 인계를 줄여, 적은 인원으로 더 빠른 의사결정과 예측 가능한 비용 운영이 가능합니다.</a:t>
+            </a:r>
+            <a:endParaRPr lang="en-US" sz="1350" dirty="0"/>
+          </a:p>
+        </p:txBody>
+      </p:sp>
+      <p:sp>
+        <p:nvSpPr>
+          <p:cNvPr id="39" name="Text 36"/>
+          <p:cNvSpPr/>
+          <p:nvPr/>
+        </p:nvSpPr>
+        <p:spPr>
+          <a:xfrm>
+            <a:off x="1024128" y="6035040"/>
+            <a:ext cx="10131552" cy="228600"/>
+          </a:xfrm>
+          <a:prstGeom prst="rect">
+            <a:avLst/>
+          </a:prstGeom>
+          <a:noFill/>
+          <a:ln/>
+        </p:spPr>
+        <p:txBody>
+          <a:bodyPr wrap="square" lIns="0" tIns="0" rIns="0" bIns="0" rtlCol="0" anchor="ctr">
+            <a:normAutofit/>
+          </a:bodyPr>
+          <a:lstStyle/>
+          <a:p>
+            <a:pPr algn="ctr" indent="0" marL="0">
+              <a:buNone/>
+            </a:pPr>
+            <a:r>
+              <a:rPr lang="en-US" sz="880" dirty="0">
+                <a:solidFill>
+                  <a:srgbClr val="5B6573"/>
+                </a:solidFill>
+                <a:latin typeface="Noto Sans KR" pitchFamily="34" charset="0"/>
+                <a:ea typeface="Noto Sans KR" pitchFamily="34" charset="-122"/>
+                <a:cs typeface="Noto Sans KR" pitchFamily="34" charset="-120"/>
+              </a:rPr>
+              <a:t>앱은 승인된 결정을 기록하고, 실제 고객 대상 실행은 제품팀이 담당합니다.</a:t>
+            </a:r>
+            <a:endParaRPr lang="en-US" sz="880" dirty="0"/>
+          </a:p>
+        </p:txBody>
+      </p:sp>
+      <p:sp>
+        <p:nvSpPr>
+          <p:cNvPr id="25" name="Slide Number Placeholder 0"/>
+          <p:cNvSpPr>
+            <a:spLocks noGrp="1"/>
+          </p:cNvSpPr>
+          <p:nvPr>
+            <p:ph type="sldNum" sz="quarter" idx="4294967295"/>
+          </p:nvPr>
+        </p:nvSpPr>
+        <p:spPr>
+          <a:xfrm>
+            <a:off x="11750040" y="6565392"/>
+            <a:ext cx="164592" cy="164592"/>
+          </a:xfrm>
+          <a:prstGeom prst="rect">
+            <a:avLst/>
+          </a:prstGeom>
+          <a:extLst>
+            <a:ext uri="{C572A759-6A51-4108-AA02-DFA0A04FC94B}">
+              <ma14:wrappingTextBoxFlag xmlns:ma14="http://schemas.microsoft.com/office/mac/drawingml/2011/main" val="0"/>
+            </a:ext>
+          </a:extLst>
+        </p:spPr>
+        <p:txBody>
+          <a:bodyPr lIns="0" tIns="0" rIns="0" bIns="0"/>
+          <a:lstStyle>
+            <a:lvl1pPr>
+              <a:defRPr sz="750">
+                <a:solidFill>
+                  <a:srgbClr val="5B6573"/>
+                </a:solidFill>
+                <a:latin typeface="Noto Sans KR"/>
+                <a:ea typeface="Noto Sans KR"/>
+                <a:cs typeface="Noto Sans KR"/>
+              </a:defRPr>
+            </a:lvl1pPr>
+          </a:lstStyle>
+          <a:p>
+            <a:pPr algn="l"/>
+            <a:fld id="{F7021451-1387-4CA6-816F-3879F97B5CBC}" type="slidenum">
+              <a:rPr b="0" lang="en-US"/>
+              <a:t>7</a:t>
+            </a:fld>
+            <a:endParaRPr lang="en-US"/>
+          </a:p>
+        </p:txBody>
+      </p:sp>
+    </p:spTree>
+  </p:cSld>
+  <p:clrMapOvr>
+    <a:masterClrMapping/>
+  </p:clrMapOvr>
+</p:sld>
+</file>
+
+<file path=ppt/slides/slide8.xml><?xml version="1.0" encoding="utf-8"?>
+<p:sld xmlns:a="http://schemas.openxmlformats.org/drawingml/2006/main" xmlns:r="http://schemas.openxmlformats.org/officeDocument/2006/relationships" xmlns:p="http://schemas.openxmlformats.org/presentationml/2006/main">
+  <p:cSld name="Slide 8">
     <p:bg>
       <p:bgPr>
         <a:solidFill>
@@ -13817,1303 +18630,6 @@
               <a:t>AI 사용량·비용 화면</a:t>
             </a:r>
             <a:endParaRPr lang="en-US" sz="950" dirty="0"/>
-          </a:p>
-        </p:txBody>
-      </p:sp>
-      <p:sp>
-        <p:nvSpPr>
-          <p:cNvPr id="25" name="Slide Number Placeholder 0"/>
-          <p:cNvSpPr>
-            <a:spLocks noGrp="1"/>
-          </p:cNvSpPr>
-          <p:nvPr>
-            <p:ph type="sldNum" sz="quarter" idx="4294967295"/>
-          </p:nvPr>
-        </p:nvSpPr>
-        <p:spPr>
-          <a:xfrm>
-            <a:off x="11750040" y="6565392"/>
-            <a:ext cx="164592" cy="164592"/>
-          </a:xfrm>
-          <a:prstGeom prst="rect">
-            <a:avLst/>
-          </a:prstGeom>
-          <a:extLst>
-            <a:ext uri="{C572A759-6A51-4108-AA02-DFA0A04FC94B}">
-              <ma14:wrappingTextBoxFlag xmlns:ma14="http://schemas.microsoft.com/office/mac/drawingml/2011/main" val="0"/>
-            </a:ext>
-          </a:extLst>
-        </p:spPr>
-        <p:txBody>
-          <a:bodyPr lIns="0" tIns="0" rIns="0" bIns="0"/>
-          <a:lstStyle>
-            <a:lvl1pPr>
-              <a:defRPr sz="750">
-                <a:solidFill>
-                  <a:srgbClr val="5B6573"/>
-                </a:solidFill>
-                <a:latin typeface="Noto Sans KR"/>
-                <a:ea typeface="Noto Sans KR"/>
-                <a:cs typeface="Noto Sans KR"/>
-              </a:defRPr>
-            </a:lvl1pPr>
-          </a:lstStyle>
-          <a:p>
-            <a:pPr algn="l"/>
-            <a:fld id="{F7021451-1387-4CA6-816F-3879F97B5CBC}" type="slidenum">
-              <a:rPr b="0" lang="en-US"/>
-              <a:t>7</a:t>
-            </a:fld>
-            <a:endParaRPr lang="en-US"/>
-          </a:p>
-        </p:txBody>
-      </p:sp>
-    </p:spTree>
-  </p:cSld>
-  <p:clrMapOvr>
-    <a:masterClrMapping/>
-  </p:clrMapOvr>
-</p:sld>
-</file>
-
-<file path=ppt/slides/slide8.xml><?xml version="1.0" encoding="utf-8"?>
-<p:sld xmlns:a="http://schemas.openxmlformats.org/drawingml/2006/main" xmlns:r="http://schemas.openxmlformats.org/officeDocument/2006/relationships" xmlns:p="http://schemas.openxmlformats.org/presentationml/2006/main">
-  <p:cSld name="Slide 8">
-    <p:spTree>
-      <p:nvGrpSpPr>
-        <p:cNvPr id="1" name=""/>
-        <p:cNvGrpSpPr/>
-        <p:nvPr/>
-      </p:nvGrpSpPr>
-      <p:grpSpPr>
-        <a:xfrm>
-          <a:off x="0" y="0"/>
-          <a:ext cx="0" cy="0"/>
-          <a:chOff x="0" y="0"/>
-          <a:chExt cx="0" cy="0"/>
-        </a:xfrm>
-      </p:grpSpPr>
-      <p:sp>
-        <p:nvSpPr>
-          <p:cNvPr id="2" name="Text 0"/>
-          <p:cNvSpPr/>
-          <p:nvPr/>
-        </p:nvSpPr>
-        <p:spPr>
-          <a:xfrm>
-            <a:off x="566928" y="347472"/>
-            <a:ext cx="4114800" cy="274320"/>
-          </a:xfrm>
-          <a:prstGeom prst="rect">
-            <a:avLst/>
-          </a:prstGeom>
-          <a:noFill/>
-          <a:ln/>
-        </p:spPr>
-        <p:txBody>
-          <a:bodyPr wrap="square" lIns="0" tIns="0" rIns="0" bIns="0" rtlCol="0" anchor="ctr">
-            <a:normAutofit/>
-          </a:bodyPr>
-          <a:lstStyle/>
-          <a:p>
-            <a:pPr indent="0" marL="0">
-              <a:buNone/>
-            </a:pPr>
-            <a:r>
-              <a:rPr lang="en-US" sz="900" b="1" spc="180" kern="0" dirty="0">
-                <a:solidFill>
-                  <a:srgbClr val="EE3D2C"/>
-                </a:solidFill>
-                <a:latin typeface="Noto Sans KR" pitchFamily="34" charset="0"/>
-                <a:ea typeface="Noto Sans KR" pitchFamily="34" charset="-122"/>
-                <a:cs typeface="Noto Sans KR" pitchFamily="34" charset="-120"/>
-              </a:rPr>
-              <a:t>AI 비용 관리</a:t>
-            </a:r>
-            <a:endParaRPr lang="en-US" sz="900" dirty="0"/>
-          </a:p>
-        </p:txBody>
-      </p:sp>
-      <p:pic>
-        <p:nvPicPr>
-          <p:cNvPr id="3" name="Image 0" descr="Nimbus customer logo">    </p:cNvPr>
-          <p:cNvPicPr>
-            <a:picLocks noChangeAspect="1"/>
-          </p:cNvPicPr>
-          <p:nvPr/>
-        </p:nvPicPr>
-        <p:blipFill>
-          <a:blip r:embed="rId1"/>
-          <a:srcRect l="0" r="0" t="0" b="0"/>
-          <a:stretch/>
-        </p:blipFill>
-        <p:spPr>
-          <a:xfrm>
-            <a:off x="9985248" y="374904"/>
-            <a:ext cx="1426464" cy="804672"/>
-          </a:xfrm>
-          <a:prstGeom prst="rect">
-            <a:avLst/>
-          </a:prstGeom>
-        </p:spPr>
-      </p:pic>
-      <p:sp>
-        <p:nvSpPr>
-          <p:cNvPr id="4" name="Text 1"/>
-          <p:cNvSpPr/>
-          <p:nvPr/>
-        </p:nvSpPr>
-        <p:spPr>
-          <a:xfrm>
-            <a:off x="566928" y="658368"/>
-            <a:ext cx="9326880" cy="658368"/>
-          </a:xfrm>
-          <a:prstGeom prst="rect">
-            <a:avLst/>
-          </a:prstGeom>
-          <a:noFill/>
-          <a:ln/>
-        </p:spPr>
-        <p:txBody>
-          <a:bodyPr wrap="square" lIns="0" tIns="0" rIns="0" bIns="0" rtlCol="0" anchor="t">
-            <a:normAutofit/>
-          </a:bodyPr>
-          <a:lstStyle/>
-          <a:p>
-            <a:pPr indent="0" marL="0">
-              <a:buNone/>
-            </a:pPr>
-            <a:r>
-              <a:rPr lang="en-US" sz="2800" b="1" dirty="0">
-                <a:solidFill>
-                  <a:srgbClr val="1F2530"/>
-                </a:solidFill>
-                <a:latin typeface="Noto Sans KR" pitchFamily="34" charset="0"/>
-                <a:ea typeface="Noto Sans KR" pitchFamily="34" charset="-122"/>
-                <a:cs typeface="Noto Sans KR" pitchFamily="34" charset="-120"/>
-              </a:rPr>
-              <a:t>누가 얼마나 사용했고, 어디서 차단됐는지 확인합니다</a:t>
-            </a:r>
-            <a:endParaRPr lang="en-US" sz="2800" dirty="0"/>
-          </a:p>
-        </p:txBody>
-      </p:sp>
-      <p:sp>
-        <p:nvSpPr>
-          <p:cNvPr id="5" name="Text 2"/>
-          <p:cNvSpPr/>
-          <p:nvPr/>
-        </p:nvSpPr>
-        <p:spPr>
-          <a:xfrm>
-            <a:off x="585216" y="1353312"/>
-            <a:ext cx="10698480" cy="384048"/>
-          </a:xfrm>
-          <a:prstGeom prst="rect">
-            <a:avLst/>
-          </a:prstGeom>
-          <a:noFill/>
-          <a:ln/>
-        </p:spPr>
-        <p:txBody>
-          <a:bodyPr wrap="square" lIns="0" tIns="0" rIns="0" bIns="0" rtlCol="0" anchor="t">
-            <a:normAutofit/>
-          </a:bodyPr>
-          <a:lstStyle/>
-          <a:p>
-            <a:pPr indent="0" marL="0">
-              <a:buNone/>
-            </a:pPr>
-            <a:r>
-              <a:rPr lang="en-US" sz="1200" dirty="0">
-                <a:solidFill>
-                  <a:srgbClr val="5B6573"/>
-                </a:solidFill>
-                <a:latin typeface="Noto Sans KR" pitchFamily="34" charset="0"/>
-                <a:ea typeface="Noto Sans KR" pitchFamily="34" charset="-122"/>
-                <a:cs typeface="Noto Sans KR" pitchFamily="34" charset="-120"/>
-              </a:rPr>
-              <a:t>AI 사용량, 계산한 예상 비용, 한도 초과 차단 결과를 한 화면에서 확인합니다.</a:t>
-            </a:r>
-            <a:endParaRPr lang="en-US" sz="1200" dirty="0"/>
-          </a:p>
-        </p:txBody>
-      </p:sp>
-      <p:sp>
-        <p:nvSpPr>
-          <p:cNvPr id="6" name="Shape 3"/>
-          <p:cNvSpPr/>
-          <p:nvPr/>
-        </p:nvSpPr>
-        <p:spPr>
-          <a:xfrm>
-            <a:off x="594360" y="1874520"/>
-            <a:ext cx="2514600" cy="1700784"/>
-          </a:xfrm>
-          <a:prstGeom prst="roundRect">
-            <a:avLst>
-              <a:gd name="adj" fmla="val 4301"/>
-            </a:avLst>
-          </a:prstGeom>
-          <a:solidFill>
-            <a:srgbClr val="FFFFFF"/>
-          </a:solidFill>
-          <a:ln w="12700">
-            <a:solidFill>
-              <a:srgbClr val="DCE1E7"/>
-            </a:solidFill>
-            <a:prstDash val="solid"/>
-          </a:ln>
-        </p:spPr>
-      </p:sp>
-      <p:sp>
-        <p:nvSpPr>
-          <p:cNvPr id="7" name="Shape 4"/>
-          <p:cNvSpPr/>
-          <p:nvPr/>
-        </p:nvSpPr>
-        <p:spPr>
-          <a:xfrm>
-            <a:off x="594360" y="1874520"/>
-            <a:ext cx="54864" cy="1700784"/>
-          </a:xfrm>
-          <a:prstGeom prst="rect">
-            <a:avLst/>
-          </a:prstGeom>
-          <a:solidFill>
-            <a:srgbClr val="2272B4"/>
-          </a:solidFill>
-          <a:ln w="12700">
-            <a:solidFill>
-              <a:srgbClr val="2272B4"/>
-            </a:solidFill>
-            <a:prstDash val="solid"/>
-          </a:ln>
-        </p:spPr>
-      </p:sp>
-      <p:sp>
-        <p:nvSpPr>
-          <p:cNvPr id="8" name="Text 5"/>
-          <p:cNvSpPr/>
-          <p:nvPr/>
-        </p:nvSpPr>
-        <p:spPr>
-          <a:xfrm>
-            <a:off x="795528" y="2039112"/>
-            <a:ext cx="2185416" cy="256032"/>
-          </a:xfrm>
-          <a:prstGeom prst="rect">
-            <a:avLst/>
-          </a:prstGeom>
-          <a:noFill/>
-          <a:ln/>
-        </p:spPr>
-        <p:txBody>
-          <a:bodyPr wrap="square" lIns="0" tIns="0" rIns="0" bIns="0" rtlCol="0" anchor="ctr">
-            <a:normAutofit/>
-          </a:bodyPr>
-          <a:lstStyle/>
-          <a:p>
-            <a:pPr indent="0" marL="0">
-              <a:buNone/>
-            </a:pPr>
-            <a:r>
-              <a:rPr lang="en-US" sz="1000" b="1" dirty="0">
-                <a:solidFill>
-                  <a:srgbClr val="5B6573"/>
-                </a:solidFill>
-                <a:latin typeface="Noto Sans KR" pitchFamily="34" charset="0"/>
-                <a:ea typeface="Noto Sans KR" pitchFamily="34" charset="-122"/>
-                <a:cs typeface="Noto Sans KR" pitchFamily="34" charset="-120"/>
-              </a:rPr>
-              <a:t>예상 사용 비용</a:t>
-            </a:r>
-            <a:endParaRPr lang="en-US" sz="1000" dirty="0"/>
-          </a:p>
-        </p:txBody>
-      </p:sp>
-      <p:sp>
-        <p:nvSpPr>
-          <p:cNvPr id="9" name="Text 6"/>
-          <p:cNvSpPr/>
-          <p:nvPr/>
-        </p:nvSpPr>
-        <p:spPr>
-          <a:xfrm>
-            <a:off x="795528" y="2359152"/>
-            <a:ext cx="2185416" cy="530352"/>
-          </a:xfrm>
-          <a:prstGeom prst="rect">
-            <a:avLst/>
-          </a:prstGeom>
-          <a:noFill/>
-          <a:ln/>
-        </p:spPr>
-        <p:txBody>
-          <a:bodyPr wrap="square" lIns="0" tIns="0" rIns="0" bIns="0" rtlCol="0" anchor="ctr">
-            <a:normAutofit/>
-          </a:bodyPr>
-          <a:lstStyle/>
-          <a:p>
-            <a:pPr indent="0" marL="0">
-              <a:buNone/>
-            </a:pPr>
-            <a:r>
-              <a:rPr lang="en-US" sz="2700" b="1" dirty="0">
-                <a:solidFill>
-                  <a:srgbClr val="2272B4"/>
-                </a:solidFill>
-                <a:latin typeface="Noto Sans KR" pitchFamily="34" charset="0"/>
-                <a:ea typeface="Noto Sans KR" pitchFamily="34" charset="-122"/>
-                <a:cs typeface="Noto Sans KR" pitchFamily="34" charset="-120"/>
-              </a:rPr>
-              <a:t>$0.0976</a:t>
-            </a:r>
-            <a:endParaRPr lang="en-US" sz="2700" dirty="0"/>
-          </a:p>
-        </p:txBody>
-      </p:sp>
-      <p:sp>
-        <p:nvSpPr>
-          <p:cNvPr id="10" name="Text 7"/>
-          <p:cNvSpPr/>
-          <p:nvPr/>
-        </p:nvSpPr>
-        <p:spPr>
-          <a:xfrm>
-            <a:off x="795528" y="3072384"/>
-            <a:ext cx="2185416" cy="329184"/>
-          </a:xfrm>
-          <a:prstGeom prst="rect">
-            <a:avLst/>
-          </a:prstGeom>
-          <a:noFill/>
-          <a:ln/>
-        </p:spPr>
-        <p:txBody>
-          <a:bodyPr wrap="square" lIns="0" tIns="0" rIns="0" bIns="0" rtlCol="0" anchor="t">
-            <a:normAutofit/>
-          </a:bodyPr>
-          <a:lstStyle/>
-          <a:p>
-            <a:pPr indent="0" marL="0">
-              <a:buNone/>
-            </a:pPr>
-            <a:r>
-              <a:rPr lang="en-US" sz="950" dirty="0">
-                <a:solidFill>
-                  <a:srgbClr val="5B6573"/>
-                </a:solidFill>
-                <a:latin typeface="Noto Sans KR" pitchFamily="34" charset="0"/>
-                <a:ea typeface="Noto Sans KR" pitchFamily="34" charset="-122"/>
-                <a:cs typeface="Noto Sans KR" pitchFamily="34" charset="-120"/>
-              </a:rPr>
-              <a:t>사용량과 명시된 단가로 계산</a:t>
-            </a:r>
-            <a:endParaRPr lang="en-US" sz="950" dirty="0"/>
-          </a:p>
-        </p:txBody>
-      </p:sp>
-      <p:sp>
-        <p:nvSpPr>
-          <p:cNvPr id="11" name="Shape 8"/>
-          <p:cNvSpPr/>
-          <p:nvPr/>
-        </p:nvSpPr>
-        <p:spPr>
-          <a:xfrm>
-            <a:off x="3273552" y="1874520"/>
-            <a:ext cx="2514600" cy="1700784"/>
-          </a:xfrm>
-          <a:prstGeom prst="roundRect">
-            <a:avLst>
-              <a:gd name="adj" fmla="val 4301"/>
-            </a:avLst>
-          </a:prstGeom>
-          <a:solidFill>
-            <a:srgbClr val="FFFFFF"/>
-          </a:solidFill>
-          <a:ln w="12700">
-            <a:solidFill>
-              <a:srgbClr val="DCE1E7"/>
-            </a:solidFill>
-            <a:prstDash val="solid"/>
-          </a:ln>
-        </p:spPr>
-      </p:sp>
-      <p:sp>
-        <p:nvSpPr>
-          <p:cNvPr id="12" name="Shape 9"/>
-          <p:cNvSpPr/>
-          <p:nvPr/>
-        </p:nvSpPr>
-        <p:spPr>
-          <a:xfrm>
-            <a:off x="3273552" y="1874520"/>
-            <a:ext cx="54864" cy="1700784"/>
-          </a:xfrm>
-          <a:prstGeom prst="rect">
-            <a:avLst/>
-          </a:prstGeom>
-          <a:solidFill>
-            <a:srgbClr val="2272B4"/>
-          </a:solidFill>
-          <a:ln w="12700">
-            <a:solidFill>
-              <a:srgbClr val="2272B4"/>
-            </a:solidFill>
-            <a:prstDash val="solid"/>
-          </a:ln>
-        </p:spPr>
-      </p:sp>
-      <p:sp>
-        <p:nvSpPr>
-          <p:cNvPr id="13" name="Text 10"/>
-          <p:cNvSpPr/>
-          <p:nvPr/>
-        </p:nvSpPr>
-        <p:spPr>
-          <a:xfrm>
-            <a:off x="3474720" y="2039112"/>
-            <a:ext cx="2185416" cy="256032"/>
-          </a:xfrm>
-          <a:prstGeom prst="rect">
-            <a:avLst/>
-          </a:prstGeom>
-          <a:noFill/>
-          <a:ln/>
-        </p:spPr>
-        <p:txBody>
-          <a:bodyPr wrap="square" lIns="0" tIns="0" rIns="0" bIns="0" rtlCol="0" anchor="ctr">
-            <a:normAutofit/>
-          </a:bodyPr>
-          <a:lstStyle/>
-          <a:p>
-            <a:pPr indent="0" marL="0">
-              <a:buNone/>
-            </a:pPr>
-            <a:r>
-              <a:rPr lang="en-US" sz="1000" b="1" dirty="0">
-                <a:solidFill>
-                  <a:srgbClr val="5B6573"/>
-                </a:solidFill>
-                <a:latin typeface="Noto Sans KR" pitchFamily="34" charset="0"/>
-                <a:ea typeface="Noto Sans KR" pitchFamily="34" charset="-122"/>
-                <a:cs typeface="Noto Sans KR" pitchFamily="34" charset="-120"/>
-              </a:rPr>
-              <a:t>AI 요청 횟수</a:t>
-            </a:r>
-            <a:endParaRPr lang="en-US" sz="1000" dirty="0"/>
-          </a:p>
-        </p:txBody>
-      </p:sp>
-      <p:sp>
-        <p:nvSpPr>
-          <p:cNvPr id="14" name="Text 11"/>
-          <p:cNvSpPr/>
-          <p:nvPr/>
-        </p:nvSpPr>
-        <p:spPr>
-          <a:xfrm>
-            <a:off x="3474720" y="2359152"/>
-            <a:ext cx="2185416" cy="530352"/>
-          </a:xfrm>
-          <a:prstGeom prst="rect">
-            <a:avLst/>
-          </a:prstGeom>
-          <a:noFill/>
-          <a:ln/>
-        </p:spPr>
-        <p:txBody>
-          <a:bodyPr wrap="square" lIns="0" tIns="0" rIns="0" bIns="0" rtlCol="0" anchor="ctr">
-            <a:normAutofit/>
-          </a:bodyPr>
-          <a:lstStyle/>
-          <a:p>
-            <a:pPr indent="0" marL="0">
-              <a:buNone/>
-            </a:pPr>
-            <a:r>
-              <a:rPr lang="en-US" sz="2700" b="1" dirty="0">
-                <a:solidFill>
-                  <a:srgbClr val="2272B4"/>
-                </a:solidFill>
-                <a:latin typeface="Noto Sans KR" pitchFamily="34" charset="0"/>
-                <a:ea typeface="Noto Sans KR" pitchFamily="34" charset="-122"/>
-                <a:cs typeface="Noto Sans KR" pitchFamily="34" charset="-120"/>
-              </a:rPr>
-              <a:t>55건</a:t>
-            </a:r>
-            <a:endParaRPr lang="en-US" sz="2700" dirty="0"/>
-          </a:p>
-        </p:txBody>
-      </p:sp>
-      <p:sp>
-        <p:nvSpPr>
-          <p:cNvPr id="15" name="Text 12"/>
-          <p:cNvSpPr/>
-          <p:nvPr/>
-        </p:nvSpPr>
-        <p:spPr>
-          <a:xfrm>
-            <a:off x="3474720" y="3072384"/>
-            <a:ext cx="2185416" cy="329184"/>
-          </a:xfrm>
-          <a:prstGeom prst="rect">
-            <a:avLst/>
-          </a:prstGeom>
-          <a:noFill/>
-          <a:ln/>
-        </p:spPr>
-        <p:txBody>
-          <a:bodyPr wrap="square" lIns="0" tIns="0" rIns="0" bIns="0" rtlCol="0" anchor="t">
-            <a:normAutofit/>
-          </a:bodyPr>
-          <a:lstStyle/>
-          <a:p>
-            <a:pPr indent="0" marL="0">
-              <a:buNone/>
-            </a:pPr>
-            <a:r>
-              <a:rPr lang="en-US" sz="950" dirty="0">
-                <a:solidFill>
-                  <a:srgbClr val="5B6573"/>
-                </a:solidFill>
-                <a:latin typeface="Noto Sans KR" pitchFamily="34" charset="0"/>
-                <a:ea typeface="Noto Sans KR" pitchFamily="34" charset="-122"/>
-                <a:cs typeface="Noto Sans KR" pitchFamily="34" charset="-120"/>
-              </a:rPr>
-              <a:t>처리한 텍스트 양 414,600 토큰</a:t>
-            </a:r>
-            <a:endParaRPr lang="en-US" sz="950" dirty="0"/>
-          </a:p>
-        </p:txBody>
-      </p:sp>
-      <p:sp>
-        <p:nvSpPr>
-          <p:cNvPr id="16" name="Shape 13"/>
-          <p:cNvSpPr/>
-          <p:nvPr/>
-        </p:nvSpPr>
-        <p:spPr>
-          <a:xfrm>
-            <a:off x="5952744" y="1874520"/>
-            <a:ext cx="2514600" cy="1700784"/>
-          </a:xfrm>
-          <a:prstGeom prst="roundRect">
-            <a:avLst>
-              <a:gd name="adj" fmla="val 4301"/>
-            </a:avLst>
-          </a:prstGeom>
-          <a:solidFill>
-            <a:srgbClr val="FFFFFF"/>
-          </a:solidFill>
-          <a:ln w="12700">
-            <a:solidFill>
-              <a:srgbClr val="DCE1E7"/>
-            </a:solidFill>
-            <a:prstDash val="solid"/>
-          </a:ln>
-        </p:spPr>
-      </p:sp>
-      <p:sp>
-        <p:nvSpPr>
-          <p:cNvPr id="17" name="Shape 14"/>
-          <p:cNvSpPr/>
-          <p:nvPr/>
-        </p:nvSpPr>
-        <p:spPr>
-          <a:xfrm>
-            <a:off x="5952744" y="1874520"/>
-            <a:ext cx="54864" cy="1700784"/>
-          </a:xfrm>
-          <a:prstGeom prst="rect">
-            <a:avLst/>
-          </a:prstGeom>
-          <a:solidFill>
-            <a:srgbClr val="EE3D2C"/>
-          </a:solidFill>
-          <a:ln w="12700">
-            <a:solidFill>
-              <a:srgbClr val="EE3D2C"/>
-            </a:solidFill>
-            <a:prstDash val="solid"/>
-          </a:ln>
-        </p:spPr>
-      </p:sp>
-      <p:sp>
-        <p:nvSpPr>
-          <p:cNvPr id="18" name="Text 15"/>
-          <p:cNvSpPr/>
-          <p:nvPr/>
-        </p:nvSpPr>
-        <p:spPr>
-          <a:xfrm>
-            <a:off x="6153912" y="2039112"/>
-            <a:ext cx="2185416" cy="256032"/>
-          </a:xfrm>
-          <a:prstGeom prst="rect">
-            <a:avLst/>
-          </a:prstGeom>
-          <a:noFill/>
-          <a:ln/>
-        </p:spPr>
-        <p:txBody>
-          <a:bodyPr wrap="square" lIns="0" tIns="0" rIns="0" bIns="0" rtlCol="0" anchor="ctr">
-            <a:normAutofit/>
-          </a:bodyPr>
-          <a:lstStyle/>
-          <a:p>
-            <a:pPr indent="0" marL="0">
-              <a:buNone/>
-            </a:pPr>
-            <a:r>
-              <a:rPr lang="en-US" sz="1000" b="1" dirty="0">
-                <a:solidFill>
-                  <a:srgbClr val="5B6573"/>
-                </a:solidFill>
-                <a:latin typeface="Noto Sans KR" pitchFamily="34" charset="0"/>
-                <a:ea typeface="Noto Sans KR" pitchFamily="34" charset="-122"/>
-                <a:cs typeface="Noto Sans KR" pitchFamily="34" charset="-120"/>
-              </a:rPr>
-              <a:t>한도 초과 차단</a:t>
-            </a:r>
-            <a:endParaRPr lang="en-US" sz="1000" dirty="0"/>
-          </a:p>
-        </p:txBody>
-      </p:sp>
-      <p:sp>
-        <p:nvSpPr>
-          <p:cNvPr id="19" name="Text 16"/>
-          <p:cNvSpPr/>
-          <p:nvPr/>
-        </p:nvSpPr>
-        <p:spPr>
-          <a:xfrm>
-            <a:off x="6153912" y="2359152"/>
-            <a:ext cx="2185416" cy="530352"/>
-          </a:xfrm>
-          <a:prstGeom prst="rect">
-            <a:avLst/>
-          </a:prstGeom>
-          <a:noFill/>
-          <a:ln/>
-        </p:spPr>
-        <p:txBody>
-          <a:bodyPr wrap="square" lIns="0" tIns="0" rIns="0" bIns="0" rtlCol="0" anchor="ctr">
-            <a:normAutofit/>
-          </a:bodyPr>
-          <a:lstStyle/>
-          <a:p>
-            <a:pPr indent="0" marL="0">
-              <a:buNone/>
-            </a:pPr>
-            <a:r>
-              <a:rPr lang="en-US" sz="2700" b="1" dirty="0">
-                <a:solidFill>
-                  <a:srgbClr val="EE3D2C"/>
-                </a:solidFill>
-                <a:latin typeface="Noto Sans KR" pitchFamily="34" charset="0"/>
-                <a:ea typeface="Noto Sans KR" pitchFamily="34" charset="-122"/>
-                <a:cs typeface="Noto Sans KR" pitchFamily="34" charset="-120"/>
-              </a:rPr>
-              <a:t>3건</a:t>
-            </a:r>
-            <a:endParaRPr lang="en-US" sz="2700" dirty="0"/>
-          </a:p>
-        </p:txBody>
-      </p:sp>
-      <p:sp>
-        <p:nvSpPr>
-          <p:cNvPr id="20" name="Text 17"/>
-          <p:cNvSpPr/>
-          <p:nvPr/>
-        </p:nvSpPr>
-        <p:spPr>
-          <a:xfrm>
-            <a:off x="6153912" y="3072384"/>
-            <a:ext cx="2185416" cy="329184"/>
-          </a:xfrm>
-          <a:prstGeom prst="rect">
-            <a:avLst/>
-          </a:prstGeom>
-          <a:noFill/>
-          <a:ln/>
-        </p:spPr>
-        <p:txBody>
-          <a:bodyPr wrap="square" lIns="0" tIns="0" rIns="0" bIns="0" rtlCol="0" anchor="t">
-            <a:normAutofit/>
-          </a:bodyPr>
-          <a:lstStyle/>
-          <a:p>
-            <a:pPr indent="0" marL="0">
-              <a:buNone/>
-            </a:pPr>
-            <a:r>
-              <a:rPr lang="en-US" sz="950" dirty="0">
-                <a:solidFill>
-                  <a:srgbClr val="5B6573"/>
-                </a:solidFill>
-                <a:latin typeface="Noto Sans KR" pitchFamily="34" charset="0"/>
-                <a:ea typeface="Noto Sans KR" pitchFamily="34" charset="-122"/>
-                <a:cs typeface="Noto Sans KR" pitchFamily="34" charset="-120"/>
-              </a:rPr>
-              <a:t>요청별 차단 기록 보관</a:t>
-            </a:r>
-            <a:endParaRPr lang="en-US" sz="950" dirty="0"/>
-          </a:p>
-        </p:txBody>
-      </p:sp>
-      <p:sp>
-        <p:nvSpPr>
-          <p:cNvPr id="21" name="Shape 18"/>
-          <p:cNvSpPr/>
-          <p:nvPr/>
-        </p:nvSpPr>
-        <p:spPr>
-          <a:xfrm>
-            <a:off x="8631936" y="1874520"/>
-            <a:ext cx="2514600" cy="1700784"/>
-          </a:xfrm>
-          <a:prstGeom prst="roundRect">
-            <a:avLst>
-              <a:gd name="adj" fmla="val 4301"/>
-            </a:avLst>
-          </a:prstGeom>
-          <a:solidFill>
-            <a:srgbClr val="FFFFFF"/>
-          </a:solidFill>
-          <a:ln w="12700">
-            <a:solidFill>
-              <a:srgbClr val="DCE1E7"/>
-            </a:solidFill>
-            <a:prstDash val="solid"/>
-          </a:ln>
-        </p:spPr>
-      </p:sp>
-      <p:sp>
-        <p:nvSpPr>
-          <p:cNvPr id="22" name="Shape 19"/>
-          <p:cNvSpPr/>
-          <p:nvPr/>
-        </p:nvSpPr>
-        <p:spPr>
-          <a:xfrm>
-            <a:off x="8631936" y="1874520"/>
-            <a:ext cx="54864" cy="1700784"/>
-          </a:xfrm>
-          <a:prstGeom prst="rect">
-            <a:avLst/>
-          </a:prstGeom>
-          <a:solidFill>
-            <a:srgbClr val="FF8F5B"/>
-          </a:solidFill>
-          <a:ln w="12700">
-            <a:solidFill>
-              <a:srgbClr val="FF8F5B"/>
-            </a:solidFill>
-            <a:prstDash val="solid"/>
-          </a:ln>
-        </p:spPr>
-      </p:sp>
-      <p:sp>
-        <p:nvSpPr>
-          <p:cNvPr id="23" name="Text 20"/>
-          <p:cNvSpPr/>
-          <p:nvPr/>
-        </p:nvSpPr>
-        <p:spPr>
-          <a:xfrm>
-            <a:off x="8833104" y="2039112"/>
-            <a:ext cx="2185416" cy="256032"/>
-          </a:xfrm>
-          <a:prstGeom prst="rect">
-            <a:avLst/>
-          </a:prstGeom>
-          <a:noFill/>
-          <a:ln/>
-        </p:spPr>
-        <p:txBody>
-          <a:bodyPr wrap="square" lIns="0" tIns="0" rIns="0" bIns="0" rtlCol="0" anchor="ctr">
-            <a:normAutofit/>
-          </a:bodyPr>
-          <a:lstStyle/>
-          <a:p>
-            <a:pPr indent="0" marL="0">
-              <a:buNone/>
-            </a:pPr>
-            <a:r>
-              <a:rPr lang="en-US" sz="1000" b="1" dirty="0">
-                <a:solidFill>
-                  <a:srgbClr val="5B6573"/>
-                </a:solidFill>
-                <a:latin typeface="Noto Sans KR" pitchFamily="34" charset="0"/>
-                <a:ea typeface="Noto Sans KR" pitchFamily="34" charset="-122"/>
-                <a:cs typeface="Noto Sans KR" pitchFamily="34" charset="-120"/>
-              </a:rPr>
-              <a:t>알림 / 사용 중단</a:t>
-            </a:r>
-            <a:endParaRPr lang="en-US" sz="1000" dirty="0"/>
-          </a:p>
-        </p:txBody>
-      </p:sp>
-      <p:sp>
-        <p:nvSpPr>
-          <p:cNvPr id="24" name="Text 21"/>
-          <p:cNvSpPr/>
-          <p:nvPr/>
-        </p:nvSpPr>
-        <p:spPr>
-          <a:xfrm>
-            <a:off x="8833104" y="2359152"/>
-            <a:ext cx="2185416" cy="530352"/>
-          </a:xfrm>
-          <a:prstGeom prst="rect">
-            <a:avLst/>
-          </a:prstGeom>
-          <a:noFill/>
-          <a:ln/>
-        </p:spPr>
-        <p:txBody>
-          <a:bodyPr wrap="square" lIns="0" tIns="0" rIns="0" bIns="0" rtlCol="0" anchor="ctr">
-            <a:normAutofit/>
-          </a:bodyPr>
-          <a:lstStyle/>
-          <a:p>
-            <a:pPr indent="0" marL="0">
-              <a:buNone/>
-            </a:pPr>
-            <a:r>
-              <a:rPr lang="en-US" sz="2700" b="1" dirty="0">
-                <a:solidFill>
-                  <a:srgbClr val="FF8F5B"/>
-                </a:solidFill>
-                <a:latin typeface="Noto Sans KR" pitchFamily="34" charset="0"/>
-                <a:ea typeface="Noto Sans KR" pitchFamily="34" charset="-122"/>
-                <a:cs typeface="Noto Sans KR" pitchFamily="34" charset="-120"/>
-              </a:rPr>
-              <a:t>$0.03 / $0.05</a:t>
-            </a:r>
-            <a:endParaRPr lang="en-US" sz="2700" dirty="0"/>
-          </a:p>
-        </p:txBody>
-      </p:sp>
-      <p:sp>
-        <p:nvSpPr>
-          <p:cNvPr id="25" name="Text 22"/>
-          <p:cNvSpPr/>
-          <p:nvPr/>
-        </p:nvSpPr>
-        <p:spPr>
-          <a:xfrm>
-            <a:off x="8833104" y="3072384"/>
-            <a:ext cx="2185416" cy="329184"/>
-          </a:xfrm>
-          <a:prstGeom prst="rect">
-            <a:avLst/>
-          </a:prstGeom>
-          <a:noFill/>
-          <a:ln/>
-        </p:spPr>
-        <p:txBody>
-          <a:bodyPr wrap="square" lIns="0" tIns="0" rIns="0" bIns="0" rtlCol="0" anchor="t">
-            <a:normAutofit/>
-          </a:bodyPr>
-          <a:lstStyle/>
-          <a:p>
-            <a:pPr indent="0" marL="0">
-              <a:buNone/>
-            </a:pPr>
-            <a:r>
-              <a:rPr lang="en-US" sz="950" dirty="0">
-                <a:solidFill>
-                  <a:srgbClr val="5B6573"/>
-                </a:solidFill>
-                <a:latin typeface="Noto Sans KR" pitchFamily="34" charset="0"/>
-                <a:ea typeface="Noto Sans KR" pitchFamily="34" charset="-122"/>
-                <a:cs typeface="Noto Sans KR" pitchFamily="34" charset="-120"/>
-              </a:rPr>
-              <a:t>시연용 한도</a:t>
-            </a:r>
-            <a:endParaRPr lang="en-US" sz="950" dirty="0"/>
-          </a:p>
-        </p:txBody>
-      </p:sp>
-      <p:sp>
-        <p:nvSpPr>
-          <p:cNvPr id="26" name="Shape 23"/>
-          <p:cNvSpPr/>
-          <p:nvPr/>
-        </p:nvSpPr>
-        <p:spPr>
-          <a:xfrm>
-            <a:off x="621792" y="4160520"/>
-            <a:ext cx="3255264" cy="1188720"/>
-          </a:xfrm>
-          <a:prstGeom prst="roundRect">
-            <a:avLst>
-              <a:gd name="adj" fmla="val 6154"/>
-            </a:avLst>
-          </a:prstGeom>
-          <a:solidFill>
-            <a:srgbClr val="FFFFFF"/>
-          </a:solidFill>
-          <a:ln w="17780">
-            <a:solidFill>
-              <a:srgbClr val="2272B4"/>
-            </a:solidFill>
-            <a:prstDash val="solid"/>
-          </a:ln>
-        </p:spPr>
-      </p:sp>
-      <p:sp>
-        <p:nvSpPr>
-          <p:cNvPr id="27" name="Text 24"/>
-          <p:cNvSpPr/>
-          <p:nvPr/>
-        </p:nvSpPr>
-        <p:spPr>
-          <a:xfrm>
-            <a:off x="768096" y="4270248"/>
-            <a:ext cx="2962656" cy="274320"/>
-          </a:xfrm>
-          <a:prstGeom prst="rect">
-            <a:avLst/>
-          </a:prstGeom>
-          <a:noFill/>
-          <a:ln/>
-        </p:spPr>
-        <p:txBody>
-          <a:bodyPr wrap="square" lIns="0" tIns="0" rIns="0" bIns="0" rtlCol="0" anchor="ctr">
-            <a:normAutofit/>
-          </a:bodyPr>
-          <a:lstStyle/>
-          <a:p>
-            <a:pPr algn="ctr" indent="0" marL="0">
-              <a:buNone/>
-            </a:pPr>
-            <a:r>
-              <a:rPr lang="en-US" sz="1200" b="1" dirty="0">
-                <a:solidFill>
-                  <a:srgbClr val="1F2530"/>
-                </a:solidFill>
-                <a:latin typeface="Noto Sans KR" pitchFamily="34" charset="0"/>
-                <a:ea typeface="Noto Sans KR" pitchFamily="34" charset="-122"/>
-                <a:cs typeface="Noto Sans KR" pitchFamily="34" charset="-120"/>
-              </a:rPr>
-              <a:t>비용을 본다</a:t>
-            </a:r>
-            <a:endParaRPr lang="en-US" sz="1200" dirty="0"/>
-          </a:p>
-        </p:txBody>
-      </p:sp>
-      <p:sp>
-        <p:nvSpPr>
-          <p:cNvPr id="28" name="Text 25"/>
-          <p:cNvSpPr/>
-          <p:nvPr/>
-        </p:nvSpPr>
-        <p:spPr>
-          <a:xfrm>
-            <a:off x="768096" y="4581144"/>
-            <a:ext cx="2962656" cy="676656"/>
-          </a:xfrm>
-          <a:prstGeom prst="rect">
-            <a:avLst/>
-          </a:prstGeom>
-          <a:noFill/>
-          <a:ln/>
-        </p:spPr>
-        <p:txBody>
-          <a:bodyPr wrap="square" lIns="0" tIns="0" rIns="0" bIns="0" rtlCol="0" anchor="t">
-            <a:normAutofit/>
-          </a:bodyPr>
-          <a:lstStyle/>
-          <a:p>
-            <a:pPr algn="ctr" indent="0" marL="0">
-              <a:buNone/>
-            </a:pPr>
-            <a:r>
-              <a:rPr lang="en-US" sz="900" dirty="0">
-                <a:solidFill>
-                  <a:srgbClr val="5B6573"/>
-                </a:solidFill>
-                <a:latin typeface="Noto Sans KR" pitchFamily="34" charset="0"/>
-                <a:ea typeface="Noto Sans KR" pitchFamily="34" charset="-122"/>
-                <a:cs typeface="Noto Sans KR" pitchFamily="34" charset="-120"/>
-              </a:rPr>
-              <a:t>시간별 예상 비용</a:t>
-            </a:r>
-            <a:endParaRPr lang="en-US" sz="900" dirty="0"/>
-          </a:p>
-          <a:p>
-            <a:pPr algn="ctr" indent="0" marL="0">
-              <a:buNone/>
-            </a:pPr>
-            <a:r>
-              <a:rPr lang="en-US" sz="900" dirty="0">
-                <a:solidFill>
-                  <a:srgbClr val="5B6573"/>
-                </a:solidFill>
-                <a:latin typeface="Noto Sans KR" pitchFamily="34" charset="0"/>
-                <a:ea typeface="Noto Sans KR" pitchFamily="34" charset="-122"/>
-                <a:cs typeface="Noto Sans KR" pitchFamily="34" charset="-120"/>
-              </a:rPr>
-              <a:t>AI 모델별 사용량</a:t>
-            </a:r>
-            <a:endParaRPr lang="en-US" sz="900" dirty="0"/>
-          </a:p>
-        </p:txBody>
-      </p:sp>
-      <p:sp>
-        <p:nvSpPr>
-          <p:cNvPr id="29" name="Shape 26"/>
-          <p:cNvSpPr/>
-          <p:nvPr/>
-        </p:nvSpPr>
-        <p:spPr>
-          <a:xfrm>
-            <a:off x="4443984" y="4160520"/>
-            <a:ext cx="3255264" cy="1188720"/>
-          </a:xfrm>
-          <a:prstGeom prst="roundRect">
-            <a:avLst>
-              <a:gd name="adj" fmla="val 6154"/>
-            </a:avLst>
-          </a:prstGeom>
-          <a:solidFill>
-            <a:srgbClr val="FFFFFF"/>
-          </a:solidFill>
-          <a:ln w="17780">
-            <a:solidFill>
-              <a:srgbClr val="2F9E6F"/>
-            </a:solidFill>
-            <a:prstDash val="solid"/>
-          </a:ln>
-        </p:spPr>
-      </p:sp>
-      <p:sp>
-        <p:nvSpPr>
-          <p:cNvPr id="30" name="Text 27"/>
-          <p:cNvSpPr/>
-          <p:nvPr/>
-        </p:nvSpPr>
-        <p:spPr>
-          <a:xfrm>
-            <a:off x="4590288" y="4270248"/>
-            <a:ext cx="2962656" cy="274320"/>
-          </a:xfrm>
-          <a:prstGeom prst="rect">
-            <a:avLst/>
-          </a:prstGeom>
-          <a:noFill/>
-          <a:ln/>
-        </p:spPr>
-        <p:txBody>
-          <a:bodyPr wrap="square" lIns="0" tIns="0" rIns="0" bIns="0" rtlCol="0" anchor="ctr">
-            <a:normAutofit/>
-          </a:bodyPr>
-          <a:lstStyle/>
-          <a:p>
-            <a:pPr algn="ctr" indent="0" marL="0">
-              <a:buNone/>
-            </a:pPr>
-            <a:r>
-              <a:rPr lang="en-US" sz="1200" b="1" dirty="0">
-                <a:solidFill>
-                  <a:srgbClr val="1F2530"/>
-                </a:solidFill>
-                <a:latin typeface="Noto Sans KR" pitchFamily="34" charset="0"/>
-                <a:ea typeface="Noto Sans KR" pitchFamily="34" charset="-122"/>
-                <a:cs typeface="Noto Sans KR" pitchFamily="34" charset="-120"/>
-              </a:rPr>
-              <a:t>사용자를 찾는다</a:t>
-            </a:r>
-            <a:endParaRPr lang="en-US" sz="1200" dirty="0"/>
-          </a:p>
-        </p:txBody>
-      </p:sp>
-      <p:sp>
-        <p:nvSpPr>
-          <p:cNvPr id="31" name="Text 28"/>
-          <p:cNvSpPr/>
-          <p:nvPr/>
-        </p:nvSpPr>
-        <p:spPr>
-          <a:xfrm>
-            <a:off x="4590288" y="4581144"/>
-            <a:ext cx="2962656" cy="676656"/>
-          </a:xfrm>
-          <a:prstGeom prst="rect">
-            <a:avLst/>
-          </a:prstGeom>
-          <a:noFill/>
-          <a:ln/>
-        </p:spPr>
-        <p:txBody>
-          <a:bodyPr wrap="square" lIns="0" tIns="0" rIns="0" bIns="0" rtlCol="0" anchor="t">
-            <a:normAutofit/>
-          </a:bodyPr>
-          <a:lstStyle/>
-          <a:p>
-            <a:pPr algn="ctr" indent="0" marL="0">
-              <a:buNone/>
-            </a:pPr>
-            <a:r>
-              <a:rPr lang="en-US" sz="900" dirty="0">
-                <a:solidFill>
-                  <a:srgbClr val="5B6573"/>
-                </a:solidFill>
-                <a:latin typeface="Noto Sans KR" pitchFamily="34" charset="0"/>
-                <a:ea typeface="Noto Sans KR" pitchFamily="34" charset="-122"/>
-                <a:cs typeface="Noto Sans KR" pitchFamily="34" charset="-120"/>
-              </a:rPr>
-              <a:t>어떤 앱에서</a:t>
-            </a:r>
-            <a:endParaRPr lang="en-US" sz="900" dirty="0"/>
-          </a:p>
-          <a:p>
-            <a:pPr algn="ctr" indent="0" marL="0">
-              <a:buNone/>
-            </a:pPr>
-            <a:r>
-              <a:rPr lang="en-US" sz="900" dirty="0">
-                <a:solidFill>
-                  <a:srgbClr val="5B6573"/>
-                </a:solidFill>
-                <a:latin typeface="Noto Sans KR" pitchFamily="34" charset="0"/>
-                <a:ea typeface="Noto Sans KR" pitchFamily="34" charset="-122"/>
-                <a:cs typeface="Noto Sans KR" pitchFamily="34" charset="-120"/>
-              </a:rPr>
-              <a:t>누가 요청했는지 확인</a:t>
-            </a:r>
-            <a:endParaRPr lang="en-US" sz="900" dirty="0"/>
-          </a:p>
-        </p:txBody>
-      </p:sp>
-      <p:sp>
-        <p:nvSpPr>
-          <p:cNvPr id="32" name="Shape 29"/>
-          <p:cNvSpPr/>
-          <p:nvPr/>
-        </p:nvSpPr>
-        <p:spPr>
-          <a:xfrm>
-            <a:off x="8266176" y="4160520"/>
-            <a:ext cx="3255264" cy="1188720"/>
-          </a:xfrm>
-          <a:prstGeom prst="roundRect">
-            <a:avLst>
-              <a:gd name="adj" fmla="val 6154"/>
-            </a:avLst>
-          </a:prstGeom>
-          <a:solidFill>
-            <a:srgbClr val="FFFFFF"/>
-          </a:solidFill>
-          <a:ln w="17780">
-            <a:solidFill>
-              <a:srgbClr val="EE3D2C"/>
-            </a:solidFill>
-            <a:prstDash val="solid"/>
-          </a:ln>
-        </p:spPr>
-      </p:sp>
-      <p:sp>
-        <p:nvSpPr>
-          <p:cNvPr id="33" name="Text 30"/>
-          <p:cNvSpPr/>
-          <p:nvPr/>
-        </p:nvSpPr>
-        <p:spPr>
-          <a:xfrm>
-            <a:off x="8412480" y="4270248"/>
-            <a:ext cx="2962656" cy="274320"/>
-          </a:xfrm>
-          <a:prstGeom prst="rect">
-            <a:avLst/>
-          </a:prstGeom>
-          <a:noFill/>
-          <a:ln/>
-        </p:spPr>
-        <p:txBody>
-          <a:bodyPr wrap="square" lIns="0" tIns="0" rIns="0" bIns="0" rtlCol="0" anchor="ctr">
-            <a:normAutofit/>
-          </a:bodyPr>
-          <a:lstStyle/>
-          <a:p>
-            <a:pPr algn="ctr" indent="0" marL="0">
-              <a:buNone/>
-            </a:pPr>
-            <a:r>
-              <a:rPr lang="en-US" sz="1200" b="1" dirty="0">
-                <a:solidFill>
-                  <a:srgbClr val="1F2530"/>
-                </a:solidFill>
-                <a:latin typeface="Noto Sans KR" pitchFamily="34" charset="0"/>
-                <a:ea typeface="Noto Sans KR" pitchFamily="34" charset="-122"/>
-                <a:cs typeface="Noto Sans KR" pitchFamily="34" charset="-120"/>
-              </a:rPr>
-              <a:t>초과 사용을 막는다</a:t>
-            </a:r>
-            <a:endParaRPr lang="en-US" sz="1200" dirty="0"/>
-          </a:p>
-        </p:txBody>
-      </p:sp>
-      <p:sp>
-        <p:nvSpPr>
-          <p:cNvPr id="34" name="Text 31"/>
-          <p:cNvSpPr/>
-          <p:nvPr/>
-        </p:nvSpPr>
-        <p:spPr>
-          <a:xfrm>
-            <a:off x="8412480" y="4581144"/>
-            <a:ext cx="2962656" cy="676656"/>
-          </a:xfrm>
-          <a:prstGeom prst="rect">
-            <a:avLst/>
-          </a:prstGeom>
-          <a:noFill/>
-          <a:ln/>
-        </p:spPr>
-        <p:txBody>
-          <a:bodyPr wrap="square" lIns="0" tIns="0" rIns="0" bIns="0" rtlCol="0" anchor="t">
-            <a:normAutofit/>
-          </a:bodyPr>
-          <a:lstStyle/>
-          <a:p>
-            <a:pPr algn="ctr" indent="0" marL="0">
-              <a:buNone/>
-            </a:pPr>
-            <a:r>
-              <a:rPr lang="en-US" sz="900" dirty="0">
-                <a:solidFill>
-                  <a:srgbClr val="5B6573"/>
-                </a:solidFill>
-                <a:latin typeface="Noto Sans KR" pitchFamily="34" charset="0"/>
-                <a:ea typeface="Noto Sans KR" pitchFamily="34" charset="-122"/>
-                <a:cs typeface="Noto Sans KR" pitchFamily="34" charset="-120"/>
-              </a:rPr>
-              <a:t>$0.03에서 알림</a:t>
-            </a:r>
-            <a:endParaRPr lang="en-US" sz="900" dirty="0"/>
-          </a:p>
-          <a:p>
-            <a:pPr algn="ctr" indent="0" marL="0">
-              <a:buNone/>
-            </a:pPr>
-            <a:r>
-              <a:rPr lang="en-US" sz="900" dirty="0">
-                <a:solidFill>
-                  <a:srgbClr val="5B6573"/>
-                </a:solidFill>
-                <a:latin typeface="Noto Sans KR" pitchFamily="34" charset="0"/>
-                <a:ea typeface="Noto Sans KR" pitchFamily="34" charset="-122"/>
-                <a:cs typeface="Noto Sans KR" pitchFamily="34" charset="-120"/>
-              </a:rPr>
-              <a:t>$0.05에서 요청 차단</a:t>
-            </a:r>
-            <a:endParaRPr lang="en-US" sz="900" dirty="0"/>
           </a:p>
         </p:txBody>
       </p:sp>
@@ -15225,7 +18741,7 @@
                 <a:ea typeface="Noto Sans KR" pitchFamily="34" charset="-122"/>
                 <a:cs typeface="Noto Sans KR" pitchFamily="34" charset="-120"/>
               </a:rPr>
-              <a:t>다음 단계</a:t>
+              <a:t>AI 비용 관리</a:t>
             </a:r>
             <a:endParaRPr lang="en-US" sz="900" dirty="0"/>
           </a:p>
@@ -15289,7 +18805,7 @@
                 <a:ea typeface="Noto Sans KR" pitchFamily="34" charset="-122"/>
                 <a:cs typeface="Noto Sans KR" pitchFamily="34" charset="-120"/>
               </a:rPr>
-              <a:t>작게 시험하고, 결과를 보고 확대하거나 중단합니다</a:t>
+              <a:t>누가 얼마나 사용했고, 어디서 차단됐는지 확인합니다</a:t>
             </a:r>
             <a:endParaRPr lang="en-US" sz="2800" dirty="0"/>
           </a:p>
@@ -15330,7 +18846,7 @@
                 <a:ea typeface="Noto Sans KR" pitchFamily="34" charset="-122"/>
                 <a:cs typeface="Noto Sans KR" pitchFamily="34" charset="-120"/>
               </a:rPr>
-              <a:t>앱에서 승인한 시험안을 제품팀이 실행하고 결제 완료율과 AI 비용을 함께 확인합니다.</a:t>
+              <a:t>AI 사용량, 계산한 예상 비용, 한도 초과 차단 결과를 한 화면에서 확인합니다.</a:t>
             </a:r>
             <a:endParaRPr lang="en-US" sz="1200" dirty="0"/>
           </a:p>
@@ -15344,12 +18860,12 @@
         </p:nvSpPr>
         <p:spPr>
           <a:xfrm>
-            <a:off x="594360" y="1920240"/>
-            <a:ext cx="2487168" cy="3246120"/>
+            <a:off x="594360" y="1874520"/>
+            <a:ext cx="2514600" cy="1700784"/>
           </a:xfrm>
           <a:prstGeom prst="roundRect">
             <a:avLst>
-              <a:gd name="adj" fmla="val 2941"/>
+              <a:gd name="adj" fmla="val 4301"/>
             </a:avLst>
           </a:prstGeom>
           <a:solidFill>
@@ -15365,108 +18881,24 @@
       </p:sp>
       <p:sp>
         <p:nvSpPr>
-          <p:cNvPr id="7" name="Text 4"/>
-          <p:cNvSpPr/>
-          <p:nvPr/>
-        </p:nvSpPr>
-        <p:spPr>
-          <a:xfrm>
-            <a:off x="777240" y="2130552"/>
-            <a:ext cx="502920" cy="310896"/>
-          </a:xfrm>
-          <a:prstGeom prst="rect">
-            <a:avLst/>
-          </a:prstGeom>
-          <a:noFill/>
-          <a:ln/>
-        </p:spPr>
-        <p:txBody>
-          <a:bodyPr wrap="square" lIns="0" tIns="0" rIns="0" bIns="0" rtlCol="0" anchor="ctr">
-            <a:normAutofit/>
-          </a:bodyPr>
-          <a:lstStyle/>
-          <a:p>
-            <a:pPr indent="0" marL="0">
-              <a:buNone/>
-            </a:pPr>
-            <a:r>
-              <a:rPr lang="en-US" sz="1000" b="1" dirty="0">
-                <a:solidFill>
-                  <a:srgbClr val="EE3D2C"/>
-                </a:solidFill>
-                <a:latin typeface="Noto Sans KR" pitchFamily="34" charset="0"/>
-                <a:ea typeface="Noto Sans KR" pitchFamily="34" charset="-122"/>
-                <a:cs typeface="Noto Sans KR" pitchFamily="34" charset="-120"/>
-              </a:rPr>
-              <a:t>01</a:t>
-            </a:r>
-            <a:endParaRPr lang="en-US" sz="1000" dirty="0"/>
-          </a:p>
-        </p:txBody>
-      </p:sp>
-      <p:sp>
-        <p:nvSpPr>
-          <p:cNvPr id="8" name="Text 5"/>
-          <p:cNvSpPr/>
-          <p:nvPr/>
-        </p:nvSpPr>
-        <p:spPr>
-          <a:xfrm>
-            <a:off x="777240" y="2670048"/>
-            <a:ext cx="2103120" cy="621792"/>
-          </a:xfrm>
-          <a:prstGeom prst="rect">
-            <a:avLst/>
-          </a:prstGeom>
-          <a:noFill/>
-          <a:ln/>
-        </p:spPr>
-        <p:txBody>
-          <a:bodyPr wrap="square" lIns="0" tIns="0" rIns="0" bIns="0" rtlCol="0" anchor="t">
-            <a:normAutofit/>
-          </a:bodyPr>
-          <a:lstStyle/>
-          <a:p>
-            <a:pPr indent="0" marL="0">
-              <a:buNone/>
-            </a:pPr>
-            <a:r>
-              <a:rPr lang="en-US" sz="1800" b="1" dirty="0">
-                <a:solidFill>
-                  <a:srgbClr val="1F2530"/>
-                </a:solidFill>
-                <a:latin typeface="Noto Sans KR" pitchFamily="34" charset="0"/>
-                <a:ea typeface="Noto Sans KR" pitchFamily="34" charset="-122"/>
-                <a:cs typeface="Noto Sans KR" pitchFamily="34" charset="-120"/>
-              </a:rPr>
-              <a:t>오늘</a:t>
-            </a:r>
-            <a:endParaRPr lang="en-US" sz="1800" dirty="0"/>
-          </a:p>
-        </p:txBody>
-      </p:sp>
-      <p:sp>
-        <p:nvSpPr>
-          <p:cNvPr id="9" name="Shape 6"/>
-          <p:cNvSpPr/>
-          <p:nvPr/>
-        </p:nvSpPr>
-        <p:spPr>
-          <a:xfrm>
-            <a:off x="777240" y="3493008"/>
-            <a:ext cx="2103120" cy="329184"/>
-          </a:xfrm>
-          <a:prstGeom prst="roundRect">
-            <a:avLst>
-              <a:gd name="adj" fmla="val 22222"/>
-            </a:avLst>
+          <p:cNvPr id="7" name="Shape 4"/>
+          <p:cNvSpPr/>
+          <p:nvPr/>
+        </p:nvSpPr>
+        <p:spPr>
+          <a:xfrm>
+            <a:off x="594360" y="1874520"/>
+            <a:ext cx="54864" cy="1700784"/>
+          </a:xfrm>
+          <a:prstGeom prst="rect">
+            <a:avLst/>
           </a:prstGeom>
           <a:solidFill>
-            <a:srgbClr val="EDF4FA"/>
+            <a:srgbClr val="2272B4"/>
           </a:solidFill>
           <a:ln w="12700">
             <a:solidFill>
-              <a:srgbClr val="EDF4FA"/>
+              <a:srgbClr val="2272B4"/>
             </a:solidFill>
             <a:prstDash val="solid"/>
           </a:ln>
@@ -15474,55 +18906,96 @@
       </p:sp>
       <p:sp>
         <p:nvSpPr>
+          <p:cNvPr id="8" name="Text 5"/>
+          <p:cNvSpPr/>
+          <p:nvPr/>
+        </p:nvSpPr>
+        <p:spPr>
+          <a:xfrm>
+            <a:off x="795528" y="2039112"/>
+            <a:ext cx="2185416" cy="256032"/>
+          </a:xfrm>
+          <a:prstGeom prst="rect">
+            <a:avLst/>
+          </a:prstGeom>
+          <a:noFill/>
+          <a:ln/>
+        </p:spPr>
+        <p:txBody>
+          <a:bodyPr wrap="square" lIns="0" tIns="0" rIns="0" bIns="0" rtlCol="0" anchor="ctr">
+            <a:normAutofit/>
+          </a:bodyPr>
+          <a:lstStyle/>
+          <a:p>
+            <a:pPr indent="0" marL="0">
+              <a:buNone/>
+            </a:pPr>
+            <a:r>
+              <a:rPr lang="en-US" sz="1000" b="1" dirty="0">
+                <a:solidFill>
+                  <a:srgbClr val="5B6573"/>
+                </a:solidFill>
+                <a:latin typeface="Noto Sans KR" pitchFamily="34" charset="0"/>
+                <a:ea typeface="Noto Sans KR" pitchFamily="34" charset="-122"/>
+                <a:cs typeface="Noto Sans KR" pitchFamily="34" charset="-120"/>
+              </a:rPr>
+              <a:t>예상 사용 비용</a:t>
+            </a:r>
+            <a:endParaRPr lang="en-US" sz="1000" dirty="0"/>
+          </a:p>
+        </p:txBody>
+      </p:sp>
+      <p:sp>
+        <p:nvSpPr>
+          <p:cNvPr id="9" name="Text 6"/>
+          <p:cNvSpPr/>
+          <p:nvPr/>
+        </p:nvSpPr>
+        <p:spPr>
+          <a:xfrm>
+            <a:off x="795528" y="2359152"/>
+            <a:ext cx="2185416" cy="530352"/>
+          </a:xfrm>
+          <a:prstGeom prst="rect">
+            <a:avLst/>
+          </a:prstGeom>
+          <a:noFill/>
+          <a:ln/>
+        </p:spPr>
+        <p:txBody>
+          <a:bodyPr wrap="square" lIns="0" tIns="0" rIns="0" bIns="0" rtlCol="0" anchor="ctr">
+            <a:normAutofit/>
+          </a:bodyPr>
+          <a:lstStyle/>
+          <a:p>
+            <a:pPr indent="0" marL="0">
+              <a:buNone/>
+            </a:pPr>
+            <a:r>
+              <a:rPr lang="en-US" sz="2700" b="1" dirty="0">
+                <a:solidFill>
+                  <a:srgbClr val="2272B4"/>
+                </a:solidFill>
+                <a:latin typeface="Noto Sans KR" pitchFamily="34" charset="0"/>
+                <a:ea typeface="Noto Sans KR" pitchFamily="34" charset="-122"/>
+                <a:cs typeface="Noto Sans KR" pitchFamily="34" charset="-120"/>
+              </a:rPr>
+              <a:t>$0.0976</a:t>
+            </a:r>
+            <a:endParaRPr lang="en-US" sz="2700" dirty="0"/>
+          </a:p>
+        </p:txBody>
+      </p:sp>
+      <p:sp>
+        <p:nvSpPr>
           <p:cNvPr id="10" name="Text 7"/>
           <p:cNvSpPr/>
           <p:nvPr/>
         </p:nvSpPr>
         <p:spPr>
           <a:xfrm>
-            <a:off x="850392" y="3493008"/>
-            <a:ext cx="1956816" cy="329184"/>
-          </a:xfrm>
-          <a:prstGeom prst="rect">
-            <a:avLst/>
-          </a:prstGeom>
-          <a:noFill/>
-          <a:ln/>
-        </p:spPr>
-        <p:txBody>
-          <a:bodyPr wrap="square" lIns="0" tIns="0" rIns="0" bIns="0" rtlCol="0" anchor="ctr">
-            <a:normAutofit/>
-          </a:bodyPr>
-          <a:lstStyle/>
-          <a:p>
-            <a:pPr algn="ctr" indent="0" marL="0">
-              <a:buNone/>
-            </a:pPr>
-            <a:r>
-              <a:rPr lang="en-US" sz="900" b="1" dirty="0">
-                <a:solidFill>
-                  <a:srgbClr val="2272B4"/>
-                </a:solidFill>
-                <a:latin typeface="Noto Sans KR" pitchFamily="34" charset="0"/>
-                <a:ea typeface="Noto Sans KR" pitchFamily="34" charset="-122"/>
-                <a:cs typeface="Noto Sans KR" pitchFamily="34" charset="-120"/>
-              </a:rPr>
-              <a:t>시험안 승인·기록</a:t>
-            </a:r>
-            <a:endParaRPr lang="en-US" sz="900" dirty="0"/>
-          </a:p>
-        </p:txBody>
-      </p:sp>
-      <p:sp>
-        <p:nvSpPr>
-          <p:cNvPr id="11" name="Text 8"/>
-          <p:cNvSpPr/>
-          <p:nvPr/>
-        </p:nvSpPr>
-        <p:spPr>
-          <a:xfrm>
-            <a:off x="777240" y="4041648"/>
-            <a:ext cx="2103120" cy="658368"/>
+            <a:off x="795528" y="3072384"/>
+            <a:ext cx="2185416" cy="329184"/>
           </a:xfrm>
           <a:prstGeom prst="rect">
             <a:avLst/>
@@ -15540,7 +19013,7 @@
               <a:buNone/>
             </a:pPr>
             <a:r>
-              <a:rPr lang="en-US" sz="1050" dirty="0">
+              <a:rPr lang="en-US" sz="950" dirty="0">
                 <a:solidFill>
                   <a:srgbClr val="5B6573"/>
                 </a:solidFill>
@@ -15548,26 +19021,26 @@
                 <a:ea typeface="Noto Sans KR" pitchFamily="34" charset="-122"/>
                 <a:cs typeface="Noto Sans KR" pitchFamily="34" charset="-120"/>
               </a:rPr>
-              <a:t>담당자가 고객 25% 시험안을 검토하고 승인</a:t>
-            </a:r>
-            <a:endParaRPr lang="en-US" sz="1050" dirty="0"/>
-          </a:p>
-        </p:txBody>
-      </p:sp>
-      <p:sp>
-        <p:nvSpPr>
-          <p:cNvPr id="12" name="Shape 9"/>
-          <p:cNvSpPr/>
-          <p:nvPr/>
-        </p:nvSpPr>
-        <p:spPr>
-          <a:xfrm>
-            <a:off x="3447288" y="1920240"/>
-            <a:ext cx="2487168" cy="3246120"/>
+              <a:t>사용량과 명시된 단가로 계산</a:t>
+            </a:r>
+            <a:endParaRPr lang="en-US" sz="950" dirty="0"/>
+          </a:p>
+        </p:txBody>
+      </p:sp>
+      <p:sp>
+        <p:nvSpPr>
+          <p:cNvPr id="11" name="Shape 8"/>
+          <p:cNvSpPr/>
+          <p:nvPr/>
+        </p:nvSpPr>
+        <p:spPr>
+          <a:xfrm>
+            <a:off x="3273552" y="1874520"/>
+            <a:ext cx="2514600" cy="1700784"/>
           </a:xfrm>
           <a:prstGeom prst="roundRect">
             <a:avLst>
-              <a:gd name="adj" fmla="val 2941"/>
+              <a:gd name="adj" fmla="val 4301"/>
             </a:avLst>
           </a:prstGeom>
           <a:solidFill>
@@ -15583,108 +19056,24 @@
       </p:sp>
       <p:sp>
         <p:nvSpPr>
-          <p:cNvPr id="13" name="Text 10"/>
-          <p:cNvSpPr/>
-          <p:nvPr/>
-        </p:nvSpPr>
-        <p:spPr>
-          <a:xfrm>
-            <a:off x="3630168" y="2130552"/>
-            <a:ext cx="502920" cy="310896"/>
-          </a:xfrm>
-          <a:prstGeom prst="rect">
-            <a:avLst/>
-          </a:prstGeom>
-          <a:noFill/>
-          <a:ln/>
-        </p:spPr>
-        <p:txBody>
-          <a:bodyPr wrap="square" lIns="0" tIns="0" rIns="0" bIns="0" rtlCol="0" anchor="ctr">
-            <a:normAutofit/>
-          </a:bodyPr>
-          <a:lstStyle/>
-          <a:p>
-            <a:pPr indent="0" marL="0">
-              <a:buNone/>
-            </a:pPr>
-            <a:r>
-              <a:rPr lang="en-US" sz="1000" b="1" dirty="0">
-                <a:solidFill>
-                  <a:srgbClr val="EE3D2C"/>
-                </a:solidFill>
-                <a:latin typeface="Noto Sans KR" pitchFamily="34" charset="0"/>
-                <a:ea typeface="Noto Sans KR" pitchFamily="34" charset="-122"/>
-                <a:cs typeface="Noto Sans KR" pitchFamily="34" charset="-120"/>
-              </a:rPr>
-              <a:t>02</a:t>
-            </a:r>
-            <a:endParaRPr lang="en-US" sz="1000" dirty="0"/>
-          </a:p>
-        </p:txBody>
-      </p:sp>
-      <p:sp>
-        <p:nvSpPr>
-          <p:cNvPr id="14" name="Text 11"/>
-          <p:cNvSpPr/>
-          <p:nvPr/>
-        </p:nvSpPr>
-        <p:spPr>
-          <a:xfrm>
-            <a:off x="3630168" y="2670048"/>
-            <a:ext cx="2103120" cy="621792"/>
-          </a:xfrm>
-          <a:prstGeom prst="rect">
-            <a:avLst/>
-          </a:prstGeom>
-          <a:noFill/>
-          <a:ln/>
-        </p:spPr>
-        <p:txBody>
-          <a:bodyPr wrap="square" lIns="0" tIns="0" rIns="0" bIns="0" rtlCol="0" anchor="t">
-            <a:normAutofit/>
-          </a:bodyPr>
-          <a:lstStyle/>
-          <a:p>
-            <a:pPr indent="0" marL="0">
-              <a:buNone/>
-            </a:pPr>
-            <a:r>
-              <a:rPr lang="en-US" sz="1800" b="1" dirty="0">
-                <a:solidFill>
-                  <a:srgbClr val="1F2530"/>
-                </a:solidFill>
-                <a:latin typeface="Noto Sans KR" pitchFamily="34" charset="0"/>
-                <a:ea typeface="Noto Sans KR" pitchFamily="34" charset="-122"/>
-                <a:cs typeface="Noto Sans KR" pitchFamily="34" charset="-120"/>
-              </a:rPr>
-              <a:t>제품팀 실행</a:t>
-            </a:r>
-            <a:endParaRPr lang="en-US" sz="1800" dirty="0"/>
-          </a:p>
-        </p:txBody>
-      </p:sp>
-      <p:sp>
-        <p:nvSpPr>
-          <p:cNvPr id="15" name="Shape 12"/>
-          <p:cNvSpPr/>
-          <p:nvPr/>
-        </p:nvSpPr>
-        <p:spPr>
-          <a:xfrm>
-            <a:off x="3630168" y="3493008"/>
-            <a:ext cx="2103120" cy="329184"/>
-          </a:xfrm>
-          <a:prstGeom prst="roundRect">
-            <a:avLst>
-              <a:gd name="adj" fmla="val 22222"/>
-            </a:avLst>
+          <p:cNvPr id="12" name="Shape 9"/>
+          <p:cNvSpPr/>
+          <p:nvPr/>
+        </p:nvSpPr>
+        <p:spPr>
+          <a:xfrm>
+            <a:off x="3273552" y="1874520"/>
+            <a:ext cx="54864" cy="1700784"/>
+          </a:xfrm>
+          <a:prstGeom prst="rect">
+            <a:avLst/>
           </a:prstGeom>
           <a:solidFill>
-            <a:srgbClr val="EDF4FA"/>
+            <a:srgbClr val="2272B4"/>
           </a:solidFill>
           <a:ln w="12700">
             <a:solidFill>
-              <a:srgbClr val="EDF4FA"/>
+              <a:srgbClr val="2272B4"/>
             </a:solidFill>
             <a:prstDash val="solid"/>
           </a:ln>
@@ -15692,14 +19081,14 @@
       </p:sp>
       <p:sp>
         <p:nvSpPr>
-          <p:cNvPr id="16" name="Text 13"/>
-          <p:cNvSpPr/>
-          <p:nvPr/>
-        </p:nvSpPr>
-        <p:spPr>
-          <a:xfrm>
-            <a:off x="3703320" y="3493008"/>
-            <a:ext cx="1956816" cy="329184"/>
+          <p:cNvPr id="13" name="Text 10"/>
+          <p:cNvSpPr/>
+          <p:nvPr/>
+        </p:nvSpPr>
+        <p:spPr>
+          <a:xfrm>
+            <a:off x="3474720" y="2039112"/>
+            <a:ext cx="2185416" cy="256032"/>
           </a:xfrm>
           <a:prstGeom prst="rect">
             <a:avLst/>
@@ -15713,11 +19102,52 @@
           </a:bodyPr>
           <a:lstStyle/>
           <a:p>
-            <a:pPr algn="ctr" indent="0" marL="0">
-              <a:buNone/>
-            </a:pPr>
-            <a:r>
-              <a:rPr lang="en-US" sz="900" b="1" dirty="0">
+            <a:pPr indent="0" marL="0">
+              <a:buNone/>
+            </a:pPr>
+            <a:r>
+              <a:rPr lang="en-US" sz="1000" b="1" dirty="0">
+                <a:solidFill>
+                  <a:srgbClr val="5B6573"/>
+                </a:solidFill>
+                <a:latin typeface="Noto Sans KR" pitchFamily="34" charset="0"/>
+                <a:ea typeface="Noto Sans KR" pitchFamily="34" charset="-122"/>
+                <a:cs typeface="Noto Sans KR" pitchFamily="34" charset="-120"/>
+              </a:rPr>
+              <a:t>AI 요청 횟수</a:t>
+            </a:r>
+            <a:endParaRPr lang="en-US" sz="1000" dirty="0"/>
+          </a:p>
+        </p:txBody>
+      </p:sp>
+      <p:sp>
+        <p:nvSpPr>
+          <p:cNvPr id="14" name="Text 11"/>
+          <p:cNvSpPr/>
+          <p:nvPr/>
+        </p:nvSpPr>
+        <p:spPr>
+          <a:xfrm>
+            <a:off x="3474720" y="2359152"/>
+            <a:ext cx="2185416" cy="530352"/>
+          </a:xfrm>
+          <a:prstGeom prst="rect">
+            <a:avLst/>
+          </a:prstGeom>
+          <a:noFill/>
+          <a:ln/>
+        </p:spPr>
+        <p:txBody>
+          <a:bodyPr wrap="square" lIns="0" tIns="0" rIns="0" bIns="0" rtlCol="0" anchor="ctr">
+            <a:normAutofit/>
+          </a:bodyPr>
+          <a:lstStyle/>
+          <a:p>
+            <a:pPr indent="0" marL="0">
+              <a:buNone/>
+            </a:pPr>
+            <a:r>
+              <a:rPr lang="en-US" sz="2700" b="1" dirty="0">
                 <a:solidFill>
                   <a:srgbClr val="2272B4"/>
                 </a:solidFill>
@@ -15725,22 +19155,22 @@
                 <a:ea typeface="Noto Sans KR" pitchFamily="34" charset="-122"/>
                 <a:cs typeface="Noto Sans KR" pitchFamily="34" charset="-120"/>
               </a:rPr>
-              <a:t>25% 시험 시작</a:t>
-            </a:r>
-            <a:endParaRPr lang="en-US" sz="900" dirty="0"/>
-          </a:p>
-        </p:txBody>
-      </p:sp>
-      <p:sp>
-        <p:nvSpPr>
-          <p:cNvPr id="17" name="Text 14"/>
-          <p:cNvSpPr/>
-          <p:nvPr/>
-        </p:nvSpPr>
-        <p:spPr>
-          <a:xfrm>
-            <a:off x="3630168" y="4041648"/>
-            <a:ext cx="2103120" cy="658368"/>
+              <a:t>55건</a:t>
+            </a:r>
+            <a:endParaRPr lang="en-US" sz="2700" dirty="0"/>
+          </a:p>
+        </p:txBody>
+      </p:sp>
+      <p:sp>
+        <p:nvSpPr>
+          <p:cNvPr id="15" name="Text 12"/>
+          <p:cNvSpPr/>
+          <p:nvPr/>
+        </p:nvSpPr>
+        <p:spPr>
+          <a:xfrm>
+            <a:off x="3474720" y="3072384"/>
+            <a:ext cx="2185416" cy="329184"/>
           </a:xfrm>
           <a:prstGeom prst="rect">
             <a:avLst/>
@@ -15758,7 +19188,7 @@
               <a:buNone/>
             </a:pPr>
             <a:r>
-              <a:rPr lang="en-US" sz="1050" dirty="0">
+              <a:rPr lang="en-US" sz="950" dirty="0">
                 <a:solidFill>
                   <a:srgbClr val="5B6573"/>
                 </a:solidFill>
@@ -15766,26 +19196,26 @@
                 <a:ea typeface="Noto Sans KR" pitchFamily="34" charset="-122"/>
                 <a:cs typeface="Noto Sans KR" pitchFamily="34" charset="-120"/>
               </a:rPr>
-              <a:t>한 화면 간편결제를 실제 고객에게 적용</a:t>
-            </a:r>
-            <a:endParaRPr lang="en-US" sz="1050" dirty="0"/>
-          </a:p>
-        </p:txBody>
-      </p:sp>
-      <p:sp>
-        <p:nvSpPr>
-          <p:cNvPr id="18" name="Shape 15"/>
-          <p:cNvSpPr/>
-          <p:nvPr/>
-        </p:nvSpPr>
-        <p:spPr>
-          <a:xfrm>
-            <a:off x="6300216" y="1920240"/>
-            <a:ext cx="2487168" cy="3246120"/>
+              <a:t>처리한 텍스트 양 414,600 토큰</a:t>
+            </a:r>
+            <a:endParaRPr lang="en-US" sz="950" dirty="0"/>
+          </a:p>
+        </p:txBody>
+      </p:sp>
+      <p:sp>
+        <p:nvSpPr>
+          <p:cNvPr id="16" name="Shape 13"/>
+          <p:cNvSpPr/>
+          <p:nvPr/>
+        </p:nvSpPr>
+        <p:spPr>
+          <a:xfrm>
+            <a:off x="5952744" y="1874520"/>
+            <a:ext cx="2514600" cy="1700784"/>
           </a:xfrm>
           <a:prstGeom prst="roundRect">
             <a:avLst>
-              <a:gd name="adj" fmla="val 2941"/>
+              <a:gd name="adj" fmla="val 4301"/>
             </a:avLst>
           </a:prstGeom>
           <a:solidFill>
@@ -15801,108 +19231,24 @@
       </p:sp>
       <p:sp>
         <p:nvSpPr>
-          <p:cNvPr id="19" name="Text 16"/>
-          <p:cNvSpPr/>
-          <p:nvPr/>
-        </p:nvSpPr>
-        <p:spPr>
-          <a:xfrm>
-            <a:off x="6483096" y="2130552"/>
-            <a:ext cx="502920" cy="310896"/>
-          </a:xfrm>
-          <a:prstGeom prst="rect">
-            <a:avLst/>
-          </a:prstGeom>
-          <a:noFill/>
-          <a:ln/>
-        </p:spPr>
-        <p:txBody>
-          <a:bodyPr wrap="square" lIns="0" tIns="0" rIns="0" bIns="0" rtlCol="0" anchor="ctr">
-            <a:normAutofit/>
-          </a:bodyPr>
-          <a:lstStyle/>
-          <a:p>
-            <a:pPr indent="0" marL="0">
-              <a:buNone/>
-            </a:pPr>
-            <a:r>
-              <a:rPr lang="en-US" sz="1000" b="1" dirty="0">
-                <a:solidFill>
-                  <a:srgbClr val="EE3D2C"/>
-                </a:solidFill>
-                <a:latin typeface="Noto Sans KR" pitchFamily="34" charset="0"/>
-                <a:ea typeface="Noto Sans KR" pitchFamily="34" charset="-122"/>
-                <a:cs typeface="Noto Sans KR" pitchFamily="34" charset="-120"/>
-              </a:rPr>
-              <a:t>03</a:t>
-            </a:r>
-            <a:endParaRPr lang="en-US" sz="1000" dirty="0"/>
-          </a:p>
-        </p:txBody>
-      </p:sp>
-      <p:sp>
-        <p:nvSpPr>
-          <p:cNvPr id="20" name="Text 17"/>
-          <p:cNvSpPr/>
-          <p:nvPr/>
-        </p:nvSpPr>
-        <p:spPr>
-          <a:xfrm>
-            <a:off x="6483096" y="2670048"/>
-            <a:ext cx="2103120" cy="621792"/>
-          </a:xfrm>
-          <a:prstGeom prst="rect">
-            <a:avLst/>
-          </a:prstGeom>
-          <a:noFill/>
-          <a:ln/>
-        </p:spPr>
-        <p:txBody>
-          <a:bodyPr wrap="square" lIns="0" tIns="0" rIns="0" bIns="0" rtlCol="0" anchor="t">
-            <a:normAutofit/>
-          </a:bodyPr>
-          <a:lstStyle/>
-          <a:p>
-            <a:pPr indent="0" marL="0">
-              <a:buNone/>
-            </a:pPr>
-            <a:r>
-              <a:rPr lang="en-US" sz="1800" b="1" dirty="0">
-                <a:solidFill>
-                  <a:srgbClr val="1F2530"/>
-                </a:solidFill>
-                <a:latin typeface="Noto Sans KR" pitchFamily="34" charset="0"/>
-                <a:ea typeface="Noto Sans KR" pitchFamily="34" charset="-122"/>
-                <a:cs typeface="Noto Sans KR" pitchFamily="34" charset="-120"/>
-              </a:rPr>
-              <a:t>24시간</a:t>
-            </a:r>
-            <a:endParaRPr lang="en-US" sz="1800" dirty="0"/>
-          </a:p>
-        </p:txBody>
-      </p:sp>
-      <p:sp>
-        <p:nvSpPr>
-          <p:cNvPr id="21" name="Shape 18"/>
-          <p:cNvSpPr/>
-          <p:nvPr/>
-        </p:nvSpPr>
-        <p:spPr>
-          <a:xfrm>
-            <a:off x="6483096" y="3493008"/>
-            <a:ext cx="2103120" cy="329184"/>
-          </a:xfrm>
-          <a:prstGeom prst="roundRect">
-            <a:avLst>
-              <a:gd name="adj" fmla="val 22222"/>
-            </a:avLst>
+          <p:cNvPr id="17" name="Shape 14"/>
+          <p:cNvSpPr/>
+          <p:nvPr/>
+        </p:nvSpPr>
+        <p:spPr>
+          <a:xfrm>
+            <a:off x="5952744" y="1874520"/>
+            <a:ext cx="54864" cy="1700784"/>
+          </a:xfrm>
+          <a:prstGeom prst="rect">
+            <a:avLst/>
           </a:prstGeom>
           <a:solidFill>
-            <a:srgbClr val="EDF4FA"/>
+            <a:srgbClr val="EE3D2C"/>
           </a:solidFill>
           <a:ln w="12700">
             <a:solidFill>
-              <a:srgbClr val="EDF4FA"/>
+              <a:srgbClr val="EE3D2C"/>
             </a:solidFill>
             <a:prstDash val="solid"/>
           </a:ln>
@@ -15910,14 +19256,14 @@
       </p:sp>
       <p:sp>
         <p:nvSpPr>
-          <p:cNvPr id="22" name="Text 19"/>
-          <p:cNvSpPr/>
-          <p:nvPr/>
-        </p:nvSpPr>
-        <p:spPr>
-          <a:xfrm>
-            <a:off x="6556248" y="3493008"/>
-            <a:ext cx="1956816" cy="329184"/>
+          <p:cNvPr id="18" name="Text 15"/>
+          <p:cNvSpPr/>
+          <p:nvPr/>
+        </p:nvSpPr>
+        <p:spPr>
+          <a:xfrm>
+            <a:off x="6153912" y="2039112"/>
+            <a:ext cx="2185416" cy="256032"/>
           </a:xfrm>
           <a:prstGeom prst="rect">
             <a:avLst/>
@@ -15931,34 +19277,75 @@
           </a:bodyPr>
           <a:lstStyle/>
           <a:p>
-            <a:pPr algn="ctr" indent="0" marL="0">
-              <a:buNone/>
-            </a:pPr>
-            <a:r>
-              <a:rPr lang="en-US" sz="900" b="1" dirty="0">
-                <a:solidFill>
-                  <a:srgbClr val="2272B4"/>
-                </a:solidFill>
-                <a:latin typeface="Noto Sans KR" pitchFamily="34" charset="0"/>
-                <a:ea typeface="Noto Sans KR" pitchFamily="34" charset="-122"/>
-                <a:cs typeface="Noto Sans KR" pitchFamily="34" charset="-120"/>
-              </a:rPr>
-              <a:t>효과·비용 확인</a:t>
-            </a:r>
-            <a:endParaRPr lang="en-US" sz="900" dirty="0"/>
-          </a:p>
-        </p:txBody>
-      </p:sp>
-      <p:sp>
-        <p:nvSpPr>
-          <p:cNvPr id="23" name="Text 20"/>
-          <p:cNvSpPr/>
-          <p:nvPr/>
-        </p:nvSpPr>
-        <p:spPr>
-          <a:xfrm>
-            <a:off x="6483096" y="4041648"/>
-            <a:ext cx="2103120" cy="658368"/>
+            <a:pPr indent="0" marL="0">
+              <a:buNone/>
+            </a:pPr>
+            <a:r>
+              <a:rPr lang="en-US" sz="1000" b="1" dirty="0">
+                <a:solidFill>
+                  <a:srgbClr val="5B6573"/>
+                </a:solidFill>
+                <a:latin typeface="Noto Sans KR" pitchFamily="34" charset="0"/>
+                <a:ea typeface="Noto Sans KR" pitchFamily="34" charset="-122"/>
+                <a:cs typeface="Noto Sans KR" pitchFamily="34" charset="-120"/>
+              </a:rPr>
+              <a:t>한도 초과 차단</a:t>
+            </a:r>
+            <a:endParaRPr lang="en-US" sz="1000" dirty="0"/>
+          </a:p>
+        </p:txBody>
+      </p:sp>
+      <p:sp>
+        <p:nvSpPr>
+          <p:cNvPr id="19" name="Text 16"/>
+          <p:cNvSpPr/>
+          <p:nvPr/>
+        </p:nvSpPr>
+        <p:spPr>
+          <a:xfrm>
+            <a:off x="6153912" y="2359152"/>
+            <a:ext cx="2185416" cy="530352"/>
+          </a:xfrm>
+          <a:prstGeom prst="rect">
+            <a:avLst/>
+          </a:prstGeom>
+          <a:noFill/>
+          <a:ln/>
+        </p:spPr>
+        <p:txBody>
+          <a:bodyPr wrap="square" lIns="0" tIns="0" rIns="0" bIns="0" rtlCol="0" anchor="ctr">
+            <a:normAutofit/>
+          </a:bodyPr>
+          <a:lstStyle/>
+          <a:p>
+            <a:pPr indent="0" marL="0">
+              <a:buNone/>
+            </a:pPr>
+            <a:r>
+              <a:rPr lang="en-US" sz="2700" b="1" dirty="0">
+                <a:solidFill>
+                  <a:srgbClr val="EE3D2C"/>
+                </a:solidFill>
+                <a:latin typeface="Noto Sans KR" pitchFamily="34" charset="0"/>
+                <a:ea typeface="Noto Sans KR" pitchFamily="34" charset="-122"/>
+                <a:cs typeface="Noto Sans KR" pitchFamily="34" charset="-120"/>
+              </a:rPr>
+              <a:t>3건</a:t>
+            </a:r>
+            <a:endParaRPr lang="en-US" sz="2700" dirty="0"/>
+          </a:p>
+        </p:txBody>
+      </p:sp>
+      <p:sp>
+        <p:nvSpPr>
+          <p:cNvPr id="20" name="Text 17"/>
+          <p:cNvSpPr/>
+          <p:nvPr/>
+        </p:nvSpPr>
+        <p:spPr>
+          <a:xfrm>
+            <a:off x="6153912" y="3072384"/>
+            <a:ext cx="2185416" cy="329184"/>
           </a:xfrm>
           <a:prstGeom prst="rect">
             <a:avLst/>
@@ -15976,7 +19363,7 @@
               <a:buNone/>
             </a:pPr>
             <a:r>
-              <a:rPr lang="en-US" sz="1050" dirty="0">
+              <a:rPr lang="en-US" sz="950" dirty="0">
                 <a:solidFill>
                   <a:srgbClr val="5B6573"/>
                 </a:solidFill>
@@ -15984,34 +19371,34 @@
                 <a:ea typeface="Noto Sans KR" pitchFamily="34" charset="-122"/>
                 <a:cs typeface="Noto Sans KR" pitchFamily="34" charset="-120"/>
               </a:rPr>
-              <a:t>결제 완료율, 오류율, AI 사용 비용 점검</a:t>
-            </a:r>
-            <a:endParaRPr lang="en-US" sz="1050" dirty="0"/>
-          </a:p>
-        </p:txBody>
-      </p:sp>
-      <p:sp>
-        <p:nvSpPr>
-          <p:cNvPr id="24" name="Shape 21"/>
-          <p:cNvSpPr/>
-          <p:nvPr/>
-        </p:nvSpPr>
-        <p:spPr>
-          <a:xfrm>
-            <a:off x="9153144" y="1920240"/>
-            <a:ext cx="2487168" cy="3246120"/>
+              <a:t>요청별 차단 기록 보관</a:t>
+            </a:r>
+            <a:endParaRPr lang="en-US" sz="950" dirty="0"/>
+          </a:p>
+        </p:txBody>
+      </p:sp>
+      <p:sp>
+        <p:nvSpPr>
+          <p:cNvPr id="21" name="Shape 18"/>
+          <p:cNvSpPr/>
+          <p:nvPr/>
+        </p:nvSpPr>
+        <p:spPr>
+          <a:xfrm>
+            <a:off x="8631936" y="1874520"/>
+            <a:ext cx="2514600" cy="1700784"/>
           </a:xfrm>
           <a:prstGeom prst="roundRect">
             <a:avLst>
-              <a:gd name="adj" fmla="val 2941"/>
+              <a:gd name="adj" fmla="val 4301"/>
             </a:avLst>
           </a:prstGeom>
           <a:solidFill>
-            <a:srgbClr val="11171C"/>
+            <a:srgbClr val="FFFFFF"/>
           </a:solidFill>
           <a:ln w="12700">
             <a:solidFill>
-              <a:srgbClr val="11171C"/>
+              <a:srgbClr val="DCE1E7"/>
             </a:solidFill>
             <a:prstDash val="solid"/>
           </a:ln>
@@ -16019,108 +19406,24 @@
       </p:sp>
       <p:sp>
         <p:nvSpPr>
-          <p:cNvPr id="25" name="Text 22"/>
-          <p:cNvSpPr/>
-          <p:nvPr/>
-        </p:nvSpPr>
-        <p:spPr>
-          <a:xfrm>
-            <a:off x="9336024" y="2130552"/>
-            <a:ext cx="502920" cy="310896"/>
-          </a:xfrm>
-          <a:prstGeom prst="rect">
-            <a:avLst/>
-          </a:prstGeom>
-          <a:noFill/>
-          <a:ln/>
-        </p:spPr>
-        <p:txBody>
-          <a:bodyPr wrap="square" lIns="0" tIns="0" rIns="0" bIns="0" rtlCol="0" anchor="ctr">
-            <a:normAutofit/>
-          </a:bodyPr>
-          <a:lstStyle/>
-          <a:p>
-            <a:pPr indent="0" marL="0">
-              <a:buNone/>
-            </a:pPr>
-            <a:r>
-              <a:rPr lang="en-US" sz="1000" b="1" dirty="0">
-                <a:solidFill>
-                  <a:srgbClr val="40D1F5"/>
-                </a:solidFill>
-                <a:latin typeface="Noto Sans KR" pitchFamily="34" charset="0"/>
-                <a:ea typeface="Noto Sans KR" pitchFamily="34" charset="-122"/>
-                <a:cs typeface="Noto Sans KR" pitchFamily="34" charset="-120"/>
-              </a:rPr>
-              <a:t>04</a:t>
-            </a:r>
-            <a:endParaRPr lang="en-US" sz="1000" dirty="0"/>
-          </a:p>
-        </p:txBody>
-      </p:sp>
-      <p:sp>
-        <p:nvSpPr>
-          <p:cNvPr id="26" name="Text 23"/>
-          <p:cNvSpPr/>
-          <p:nvPr/>
-        </p:nvSpPr>
-        <p:spPr>
-          <a:xfrm>
-            <a:off x="9336024" y="2670048"/>
-            <a:ext cx="2103120" cy="621792"/>
-          </a:xfrm>
-          <a:prstGeom prst="rect">
-            <a:avLst/>
-          </a:prstGeom>
-          <a:noFill/>
-          <a:ln/>
-        </p:spPr>
-        <p:txBody>
-          <a:bodyPr wrap="square" lIns="0" tIns="0" rIns="0" bIns="0" rtlCol="0" anchor="t">
-            <a:normAutofit/>
-          </a:bodyPr>
-          <a:lstStyle/>
-          <a:p>
-            <a:pPr indent="0" marL="0">
-              <a:buNone/>
-            </a:pPr>
-            <a:r>
-              <a:rPr lang="en-US" sz="1800" b="1" dirty="0">
-                <a:solidFill>
-                  <a:srgbClr val="FFFFFF"/>
-                </a:solidFill>
-                <a:latin typeface="Noto Sans KR" pitchFamily="34" charset="0"/>
-                <a:ea typeface="Noto Sans KR" pitchFamily="34" charset="-122"/>
-                <a:cs typeface="Noto Sans KR" pitchFamily="34" charset="-120"/>
-              </a:rPr>
-              <a:t>72시간</a:t>
-            </a:r>
-            <a:endParaRPr lang="en-US" sz="1800" dirty="0"/>
-          </a:p>
-        </p:txBody>
-      </p:sp>
-      <p:sp>
-        <p:nvSpPr>
-          <p:cNvPr id="27" name="Shape 24"/>
-          <p:cNvSpPr/>
-          <p:nvPr/>
-        </p:nvSpPr>
-        <p:spPr>
-          <a:xfrm>
-            <a:off x="9336024" y="3493008"/>
-            <a:ext cx="2103120" cy="329184"/>
-          </a:xfrm>
-          <a:prstGeom prst="roundRect">
-            <a:avLst>
-              <a:gd name="adj" fmla="val 22222"/>
-            </a:avLst>
+          <p:cNvPr id="22" name="Shape 19"/>
+          <p:cNvSpPr/>
+          <p:nvPr/>
+        </p:nvSpPr>
+        <p:spPr>
+          <a:xfrm>
+            <a:off x="8631936" y="1874520"/>
+            <a:ext cx="54864" cy="1700784"/>
+          </a:xfrm>
+          <a:prstGeom prst="rect">
+            <a:avLst/>
           </a:prstGeom>
           <a:solidFill>
-            <a:srgbClr val="243039"/>
+            <a:srgbClr val="FF8F5B"/>
           </a:solidFill>
           <a:ln w="12700">
             <a:solidFill>
-              <a:srgbClr val="243039"/>
+              <a:srgbClr val="FF8F5B"/>
             </a:solidFill>
             <a:prstDash val="solid"/>
           </a:ln>
@@ -16128,14 +19431,290 @@
       </p:sp>
       <p:sp>
         <p:nvSpPr>
+          <p:cNvPr id="23" name="Text 20"/>
+          <p:cNvSpPr/>
+          <p:nvPr/>
+        </p:nvSpPr>
+        <p:spPr>
+          <a:xfrm>
+            <a:off x="8833104" y="2039112"/>
+            <a:ext cx="2185416" cy="256032"/>
+          </a:xfrm>
+          <a:prstGeom prst="rect">
+            <a:avLst/>
+          </a:prstGeom>
+          <a:noFill/>
+          <a:ln/>
+        </p:spPr>
+        <p:txBody>
+          <a:bodyPr wrap="square" lIns="0" tIns="0" rIns="0" bIns="0" rtlCol="0" anchor="ctr">
+            <a:normAutofit/>
+          </a:bodyPr>
+          <a:lstStyle/>
+          <a:p>
+            <a:pPr indent="0" marL="0">
+              <a:buNone/>
+            </a:pPr>
+            <a:r>
+              <a:rPr lang="en-US" sz="1000" b="1" dirty="0">
+                <a:solidFill>
+                  <a:srgbClr val="5B6573"/>
+                </a:solidFill>
+                <a:latin typeface="Noto Sans KR" pitchFamily="34" charset="0"/>
+                <a:ea typeface="Noto Sans KR" pitchFamily="34" charset="-122"/>
+                <a:cs typeface="Noto Sans KR" pitchFamily="34" charset="-120"/>
+              </a:rPr>
+              <a:t>알림 / 사용 중단</a:t>
+            </a:r>
+            <a:endParaRPr lang="en-US" sz="1000" dirty="0"/>
+          </a:p>
+        </p:txBody>
+      </p:sp>
+      <p:sp>
+        <p:nvSpPr>
+          <p:cNvPr id="24" name="Text 21"/>
+          <p:cNvSpPr/>
+          <p:nvPr/>
+        </p:nvSpPr>
+        <p:spPr>
+          <a:xfrm>
+            <a:off x="8833104" y="2359152"/>
+            <a:ext cx="2185416" cy="530352"/>
+          </a:xfrm>
+          <a:prstGeom prst="rect">
+            <a:avLst/>
+          </a:prstGeom>
+          <a:noFill/>
+          <a:ln/>
+        </p:spPr>
+        <p:txBody>
+          <a:bodyPr wrap="square" lIns="0" tIns="0" rIns="0" bIns="0" rtlCol="0" anchor="ctr">
+            <a:normAutofit/>
+          </a:bodyPr>
+          <a:lstStyle/>
+          <a:p>
+            <a:pPr indent="0" marL="0">
+              <a:buNone/>
+            </a:pPr>
+            <a:r>
+              <a:rPr lang="en-US" sz="2700" b="1" dirty="0">
+                <a:solidFill>
+                  <a:srgbClr val="FF8F5B"/>
+                </a:solidFill>
+                <a:latin typeface="Noto Sans KR" pitchFamily="34" charset="0"/>
+                <a:ea typeface="Noto Sans KR" pitchFamily="34" charset="-122"/>
+                <a:cs typeface="Noto Sans KR" pitchFamily="34" charset="-120"/>
+              </a:rPr>
+              <a:t>$0.03 / $0.05</a:t>
+            </a:r>
+            <a:endParaRPr lang="en-US" sz="2700" dirty="0"/>
+          </a:p>
+        </p:txBody>
+      </p:sp>
+      <p:sp>
+        <p:nvSpPr>
+          <p:cNvPr id="25" name="Text 22"/>
+          <p:cNvSpPr/>
+          <p:nvPr/>
+        </p:nvSpPr>
+        <p:spPr>
+          <a:xfrm>
+            <a:off x="8833104" y="3072384"/>
+            <a:ext cx="2185416" cy="329184"/>
+          </a:xfrm>
+          <a:prstGeom prst="rect">
+            <a:avLst/>
+          </a:prstGeom>
+          <a:noFill/>
+          <a:ln/>
+        </p:spPr>
+        <p:txBody>
+          <a:bodyPr wrap="square" lIns="0" tIns="0" rIns="0" bIns="0" rtlCol="0" anchor="t">
+            <a:normAutofit/>
+          </a:bodyPr>
+          <a:lstStyle/>
+          <a:p>
+            <a:pPr indent="0" marL="0">
+              <a:buNone/>
+            </a:pPr>
+            <a:r>
+              <a:rPr lang="en-US" sz="950" dirty="0">
+                <a:solidFill>
+                  <a:srgbClr val="5B6573"/>
+                </a:solidFill>
+                <a:latin typeface="Noto Sans KR" pitchFamily="34" charset="0"/>
+                <a:ea typeface="Noto Sans KR" pitchFamily="34" charset="-122"/>
+                <a:cs typeface="Noto Sans KR" pitchFamily="34" charset="-120"/>
+              </a:rPr>
+              <a:t>시연용 한도</a:t>
+            </a:r>
+            <a:endParaRPr lang="en-US" sz="950" dirty="0"/>
+          </a:p>
+        </p:txBody>
+      </p:sp>
+      <p:sp>
+        <p:nvSpPr>
+          <p:cNvPr id="26" name="Shape 23"/>
+          <p:cNvSpPr/>
+          <p:nvPr/>
+        </p:nvSpPr>
+        <p:spPr>
+          <a:xfrm>
+            <a:off x="621792" y="4160520"/>
+            <a:ext cx="3255264" cy="1188720"/>
+          </a:xfrm>
+          <a:prstGeom prst="roundRect">
+            <a:avLst>
+              <a:gd name="adj" fmla="val 6154"/>
+            </a:avLst>
+          </a:prstGeom>
+          <a:solidFill>
+            <a:srgbClr val="FFFFFF"/>
+          </a:solidFill>
+          <a:ln w="17780">
+            <a:solidFill>
+              <a:srgbClr val="2272B4"/>
+            </a:solidFill>
+            <a:prstDash val="solid"/>
+          </a:ln>
+        </p:spPr>
+      </p:sp>
+      <p:sp>
+        <p:nvSpPr>
+          <p:cNvPr id="27" name="Text 24"/>
+          <p:cNvSpPr/>
+          <p:nvPr/>
+        </p:nvSpPr>
+        <p:spPr>
+          <a:xfrm>
+            <a:off x="768096" y="4270248"/>
+            <a:ext cx="2962656" cy="274320"/>
+          </a:xfrm>
+          <a:prstGeom prst="rect">
+            <a:avLst/>
+          </a:prstGeom>
+          <a:noFill/>
+          <a:ln/>
+        </p:spPr>
+        <p:txBody>
+          <a:bodyPr wrap="square" lIns="0" tIns="0" rIns="0" bIns="0" rtlCol="0" anchor="ctr">
+            <a:normAutofit/>
+          </a:bodyPr>
+          <a:lstStyle/>
+          <a:p>
+            <a:pPr algn="ctr" indent="0" marL="0">
+              <a:buNone/>
+            </a:pPr>
+            <a:r>
+              <a:rPr lang="en-US" sz="1200" b="1" dirty="0">
+                <a:solidFill>
+                  <a:srgbClr val="1F2530"/>
+                </a:solidFill>
+                <a:latin typeface="Noto Sans KR" pitchFamily="34" charset="0"/>
+                <a:ea typeface="Noto Sans KR" pitchFamily="34" charset="-122"/>
+                <a:cs typeface="Noto Sans KR" pitchFamily="34" charset="-120"/>
+              </a:rPr>
+              <a:t>비용을 본다</a:t>
+            </a:r>
+            <a:endParaRPr lang="en-US" sz="1200" dirty="0"/>
+          </a:p>
+        </p:txBody>
+      </p:sp>
+      <p:sp>
+        <p:nvSpPr>
           <p:cNvPr id="28" name="Text 25"/>
           <p:cNvSpPr/>
           <p:nvPr/>
         </p:nvSpPr>
         <p:spPr>
           <a:xfrm>
-            <a:off x="9409176" y="3493008"/>
-            <a:ext cx="1956816" cy="329184"/>
+            <a:off x="768096" y="4581144"/>
+            <a:ext cx="2962656" cy="676656"/>
+          </a:xfrm>
+          <a:prstGeom prst="rect">
+            <a:avLst/>
+          </a:prstGeom>
+          <a:noFill/>
+          <a:ln/>
+        </p:spPr>
+        <p:txBody>
+          <a:bodyPr wrap="square" lIns="0" tIns="0" rIns="0" bIns="0" rtlCol="0" anchor="t">
+            <a:normAutofit/>
+          </a:bodyPr>
+          <a:lstStyle/>
+          <a:p>
+            <a:pPr algn="ctr" indent="0" marL="0">
+              <a:buNone/>
+            </a:pPr>
+            <a:r>
+              <a:rPr lang="en-US" sz="900" dirty="0">
+                <a:solidFill>
+                  <a:srgbClr val="5B6573"/>
+                </a:solidFill>
+                <a:latin typeface="Noto Sans KR" pitchFamily="34" charset="0"/>
+                <a:ea typeface="Noto Sans KR" pitchFamily="34" charset="-122"/>
+                <a:cs typeface="Noto Sans KR" pitchFamily="34" charset="-120"/>
+              </a:rPr>
+              <a:t>시간별 예상 비용</a:t>
+            </a:r>
+            <a:endParaRPr lang="en-US" sz="900" dirty="0"/>
+          </a:p>
+          <a:p>
+            <a:pPr algn="ctr" indent="0" marL="0">
+              <a:buNone/>
+            </a:pPr>
+            <a:r>
+              <a:rPr lang="en-US" sz="900" dirty="0">
+                <a:solidFill>
+                  <a:srgbClr val="5B6573"/>
+                </a:solidFill>
+                <a:latin typeface="Noto Sans KR" pitchFamily="34" charset="0"/>
+                <a:ea typeface="Noto Sans KR" pitchFamily="34" charset="-122"/>
+                <a:cs typeface="Noto Sans KR" pitchFamily="34" charset="-120"/>
+              </a:rPr>
+              <a:t>AI 모델별 사용량</a:t>
+            </a:r>
+            <a:endParaRPr lang="en-US" sz="900" dirty="0"/>
+          </a:p>
+        </p:txBody>
+      </p:sp>
+      <p:sp>
+        <p:nvSpPr>
+          <p:cNvPr id="29" name="Shape 26"/>
+          <p:cNvSpPr/>
+          <p:nvPr/>
+        </p:nvSpPr>
+        <p:spPr>
+          <a:xfrm>
+            <a:off x="4443984" y="4160520"/>
+            <a:ext cx="3255264" cy="1188720"/>
+          </a:xfrm>
+          <a:prstGeom prst="roundRect">
+            <a:avLst>
+              <a:gd name="adj" fmla="val 6154"/>
+            </a:avLst>
+          </a:prstGeom>
+          <a:solidFill>
+            <a:srgbClr val="FFFFFF"/>
+          </a:solidFill>
+          <a:ln w="17780">
+            <a:solidFill>
+              <a:srgbClr val="2F9E6F"/>
+            </a:solidFill>
+            <a:prstDash val="solid"/>
+          </a:ln>
+        </p:spPr>
+      </p:sp>
+      <p:sp>
+        <p:nvSpPr>
+          <p:cNvPr id="30" name="Text 27"/>
+          <p:cNvSpPr/>
+          <p:nvPr/>
+        </p:nvSpPr>
+        <p:spPr>
+          <a:xfrm>
+            <a:off x="4590288" y="4270248"/>
+            <a:ext cx="2962656" cy="274320"/>
           </a:xfrm>
           <a:prstGeom prst="rect">
             <a:avLst/>
@@ -16153,30 +19732,156 @@
               <a:buNone/>
             </a:pPr>
             <a:r>
-              <a:rPr lang="en-US" sz="900" b="1" dirty="0">
-                <a:solidFill>
-                  <a:srgbClr val="40D1F5"/>
-                </a:solidFill>
-                <a:latin typeface="Noto Sans KR" pitchFamily="34" charset="0"/>
-                <a:ea typeface="Noto Sans KR" pitchFamily="34" charset="-122"/>
-                <a:cs typeface="Noto Sans KR" pitchFamily="34" charset="-120"/>
-              </a:rPr>
-              <a:t>확대 또는 중단</a:t>
+              <a:rPr lang="en-US" sz="1200" b="1" dirty="0">
+                <a:solidFill>
+                  <a:srgbClr val="1F2530"/>
+                </a:solidFill>
+                <a:latin typeface="Noto Sans KR" pitchFamily="34" charset="0"/>
+                <a:ea typeface="Noto Sans KR" pitchFamily="34" charset="-122"/>
+                <a:cs typeface="Noto Sans KR" pitchFamily="34" charset="-120"/>
+              </a:rPr>
+              <a:t>사용자를 찾는다</a:t>
+            </a:r>
+            <a:endParaRPr lang="en-US" sz="1200" dirty="0"/>
+          </a:p>
+        </p:txBody>
+      </p:sp>
+      <p:sp>
+        <p:nvSpPr>
+          <p:cNvPr id="31" name="Text 28"/>
+          <p:cNvSpPr/>
+          <p:nvPr/>
+        </p:nvSpPr>
+        <p:spPr>
+          <a:xfrm>
+            <a:off x="4590288" y="4581144"/>
+            <a:ext cx="2962656" cy="676656"/>
+          </a:xfrm>
+          <a:prstGeom prst="rect">
+            <a:avLst/>
+          </a:prstGeom>
+          <a:noFill/>
+          <a:ln/>
+        </p:spPr>
+        <p:txBody>
+          <a:bodyPr wrap="square" lIns="0" tIns="0" rIns="0" bIns="0" rtlCol="0" anchor="t">
+            <a:normAutofit/>
+          </a:bodyPr>
+          <a:lstStyle/>
+          <a:p>
+            <a:pPr algn="ctr" indent="0" marL="0">
+              <a:buNone/>
+            </a:pPr>
+            <a:r>
+              <a:rPr lang="en-US" sz="900" dirty="0">
+                <a:solidFill>
+                  <a:srgbClr val="5B6573"/>
+                </a:solidFill>
+                <a:latin typeface="Noto Sans KR" pitchFamily="34" charset="0"/>
+                <a:ea typeface="Noto Sans KR" pitchFamily="34" charset="-122"/>
+                <a:cs typeface="Noto Sans KR" pitchFamily="34" charset="-120"/>
+              </a:rPr>
+              <a:t>어떤 앱에서</a:t>
             </a:r>
             <a:endParaRPr lang="en-US" sz="900" dirty="0"/>
           </a:p>
-        </p:txBody>
-      </p:sp>
-      <p:sp>
-        <p:nvSpPr>
-          <p:cNvPr id="29" name="Text 26"/>
-          <p:cNvSpPr/>
-          <p:nvPr/>
-        </p:nvSpPr>
-        <p:spPr>
-          <a:xfrm>
-            <a:off x="9336024" y="4041648"/>
-            <a:ext cx="2103120" cy="658368"/>
+          <a:p>
+            <a:pPr algn="ctr" indent="0" marL="0">
+              <a:buNone/>
+            </a:pPr>
+            <a:r>
+              <a:rPr lang="en-US" sz="900" dirty="0">
+                <a:solidFill>
+                  <a:srgbClr val="5B6573"/>
+                </a:solidFill>
+                <a:latin typeface="Noto Sans KR" pitchFamily="34" charset="0"/>
+                <a:ea typeface="Noto Sans KR" pitchFamily="34" charset="-122"/>
+                <a:cs typeface="Noto Sans KR" pitchFamily="34" charset="-120"/>
+              </a:rPr>
+              <a:t>누가 요청했는지 확인</a:t>
+            </a:r>
+            <a:endParaRPr lang="en-US" sz="900" dirty="0"/>
+          </a:p>
+        </p:txBody>
+      </p:sp>
+      <p:sp>
+        <p:nvSpPr>
+          <p:cNvPr id="32" name="Shape 29"/>
+          <p:cNvSpPr/>
+          <p:nvPr/>
+        </p:nvSpPr>
+        <p:spPr>
+          <a:xfrm>
+            <a:off x="8266176" y="4160520"/>
+            <a:ext cx="3255264" cy="1188720"/>
+          </a:xfrm>
+          <a:prstGeom prst="roundRect">
+            <a:avLst>
+              <a:gd name="adj" fmla="val 6154"/>
+            </a:avLst>
+          </a:prstGeom>
+          <a:solidFill>
+            <a:srgbClr val="FFFFFF"/>
+          </a:solidFill>
+          <a:ln w="17780">
+            <a:solidFill>
+              <a:srgbClr val="EE3D2C"/>
+            </a:solidFill>
+            <a:prstDash val="solid"/>
+          </a:ln>
+        </p:spPr>
+      </p:sp>
+      <p:sp>
+        <p:nvSpPr>
+          <p:cNvPr id="33" name="Text 30"/>
+          <p:cNvSpPr/>
+          <p:nvPr/>
+        </p:nvSpPr>
+        <p:spPr>
+          <a:xfrm>
+            <a:off x="8412480" y="4270248"/>
+            <a:ext cx="2962656" cy="274320"/>
+          </a:xfrm>
+          <a:prstGeom prst="rect">
+            <a:avLst/>
+          </a:prstGeom>
+          <a:noFill/>
+          <a:ln/>
+        </p:spPr>
+        <p:txBody>
+          <a:bodyPr wrap="square" lIns="0" tIns="0" rIns="0" bIns="0" rtlCol="0" anchor="ctr">
+            <a:normAutofit/>
+          </a:bodyPr>
+          <a:lstStyle/>
+          <a:p>
+            <a:pPr algn="ctr" indent="0" marL="0">
+              <a:buNone/>
+            </a:pPr>
+            <a:r>
+              <a:rPr lang="en-US" sz="1200" b="1" dirty="0">
+                <a:solidFill>
+                  <a:srgbClr val="1F2530"/>
+                </a:solidFill>
+                <a:latin typeface="Noto Sans KR" pitchFamily="34" charset="0"/>
+                <a:ea typeface="Noto Sans KR" pitchFamily="34" charset="-122"/>
+                <a:cs typeface="Noto Sans KR" pitchFamily="34" charset="-120"/>
+              </a:rPr>
+              <a:t>초과 사용을 막는다</a:t>
+            </a:r>
+            <a:endParaRPr lang="en-US" sz="1200" dirty="0"/>
+          </a:p>
+        </p:txBody>
+      </p:sp>
+      <p:sp>
+        <p:nvSpPr>
+          <p:cNvPr id="34" name="Text 31"/>
+          <p:cNvSpPr/>
+          <p:nvPr/>
+        </p:nvSpPr>
+        <p:spPr>
+          <a:xfrm>
+            <a:off x="8412480" y="4581144"/>
+            <a:ext cx="2962656" cy="676656"/>
           </a:xfrm>
           <a:prstGeom prst="rect">
             <a:avLst/>
@@ -16190,21 +19895,38 @@
           </a:bodyPr>
           <a:lstStyle/>
           <a:p>
-            <a:pPr indent="0" marL="0">
-              <a:buNone/>
-            </a:pPr>
-            <a:r>
-              <a:rPr lang="en-US" sz="1050" dirty="0">
-                <a:solidFill>
-                  <a:srgbClr val="B7C5CD"/>
-                </a:solidFill>
-                <a:latin typeface="Noto Sans KR" pitchFamily="34" charset="0"/>
-                <a:ea typeface="Noto Sans KR" pitchFamily="34" charset="-122"/>
-                <a:cs typeface="Noto Sans KR" pitchFamily="34" charset="-120"/>
-              </a:rPr>
-              <a:t>효과가 있으면 50%로 확대 · 문제 시 중단</a:t>
-            </a:r>
-            <a:endParaRPr lang="en-US" sz="1050" dirty="0"/>
+            <a:pPr algn="ctr" indent="0" marL="0">
+              <a:buNone/>
+            </a:pPr>
+            <a:r>
+              <a:rPr lang="en-US" sz="900" dirty="0">
+                <a:solidFill>
+                  <a:srgbClr val="5B6573"/>
+                </a:solidFill>
+                <a:latin typeface="Noto Sans KR" pitchFamily="34" charset="0"/>
+                <a:ea typeface="Noto Sans KR" pitchFamily="34" charset="-122"/>
+                <a:cs typeface="Noto Sans KR" pitchFamily="34" charset="-120"/>
+              </a:rPr>
+              <a:t>$0.03에서 알림</a:t>
+            </a:r>
+            <a:endParaRPr lang="en-US" sz="900" dirty="0"/>
+          </a:p>
+          <a:p>
+            <a:pPr algn="ctr" indent="0" marL="0">
+              <a:buNone/>
+            </a:pPr>
+            <a:r>
+              <a:rPr lang="en-US" sz="900" dirty="0">
+                <a:solidFill>
+                  <a:srgbClr val="5B6573"/>
+                </a:solidFill>
+                <a:latin typeface="Noto Sans KR" pitchFamily="34" charset="0"/>
+                <a:ea typeface="Noto Sans KR" pitchFamily="34" charset="-122"/>
+                <a:cs typeface="Noto Sans KR" pitchFamily="34" charset="-120"/>
+              </a:rPr>
+              <a:t>$0.05에서 요청 차단</a:t>
+            </a:r>
+            <a:endParaRPr lang="en-US" sz="900" dirty="0"/>
           </a:p>
         </p:txBody>
       </p:sp>
